--- a/lab_2/FIT3143 Lab 2.pptx
+++ b/lab_2/FIT3143 Lab 2.pptx
@@ -5,30 +5,19 @@
     <p:sldMasterId id="2147483659" r:id="rId1"/>
   </p:sldMasterIdLst>
   <p:notesMasterIdLst>
-    <p:notesMasterId r:id="rId23"/>
+    <p:notesMasterId r:id="rId12"/>
   </p:notesMasterIdLst>
   <p:sldIdLst>
     <p:sldId id="256" r:id="rId2"/>
-    <p:sldId id="257" r:id="rId3"/>
-    <p:sldId id="258" r:id="rId4"/>
-    <p:sldId id="259" r:id="rId5"/>
-    <p:sldId id="260" r:id="rId6"/>
-    <p:sldId id="261" r:id="rId7"/>
-    <p:sldId id="262" r:id="rId8"/>
-    <p:sldId id="263" r:id="rId9"/>
-    <p:sldId id="264" r:id="rId10"/>
-    <p:sldId id="265" r:id="rId11"/>
-    <p:sldId id="266" r:id="rId12"/>
-    <p:sldId id="267" r:id="rId13"/>
-    <p:sldId id="268" r:id="rId14"/>
-    <p:sldId id="269" r:id="rId15"/>
-    <p:sldId id="270" r:id="rId16"/>
-    <p:sldId id="271" r:id="rId17"/>
-    <p:sldId id="272" r:id="rId18"/>
-    <p:sldId id="273" r:id="rId19"/>
-    <p:sldId id="274" r:id="rId20"/>
-    <p:sldId id="275" r:id="rId21"/>
-    <p:sldId id="276" r:id="rId22"/>
+    <p:sldId id="282" r:id="rId3"/>
+    <p:sldId id="257" r:id="rId4"/>
+    <p:sldId id="277" r:id="rId5"/>
+    <p:sldId id="283" r:id="rId6"/>
+    <p:sldId id="280" r:id="rId7"/>
+    <p:sldId id="279" r:id="rId8"/>
+    <p:sldId id="281" r:id="rId9"/>
+    <p:sldId id="285" r:id="rId10"/>
+    <p:sldId id="276" r:id="rId11"/>
   </p:sldIdLst>
   <p:sldSz cx="9144000" cy="5143500" type="screen16x9"/>
   <p:notesSz cx="6858000" cy="9144000"/>
@@ -830,7 +819,7 @@
   <p:cSld>
     <p:spTree>
       <p:nvGrpSpPr>
-        <p:cNvPr id="1" name="Shape 111"/>
+        <p:cNvPr id="1" name="Shape 187"/>
         <p:cNvGrpSpPr/>
         <p:nvPr/>
       </p:nvGrpSpPr>
@@ -844,7 +833,7 @@
       </p:grpSpPr>
       <p:sp>
         <p:nvSpPr>
-          <p:cNvPr id="112" name="Google Shape;112;g3f76eb00e2a_0_74:notes"/>
+          <p:cNvPr id="188" name="Google Shape;188;g3f76eb00e2a_0_100:notes"/>
           <p:cNvSpPr>
             <a:spLocks noGrp="1" noRot="1" noChangeAspect="1"/>
           </p:cNvSpPr>
@@ -854,7 +843,7 @@
         </p:nvSpPr>
         <p:spPr>
           <a:xfrm>
-            <a:off x="381300" y="685800"/>
+            <a:off x="381000" y="685800"/>
             <a:ext cx="6096000" cy="3429000"/>
           </a:xfrm>
           <a:custGeom>
@@ -885,7 +874,7 @@
       </p:sp>
       <p:sp>
         <p:nvSpPr>
-          <p:cNvPr id="113" name="Google Shape;113;g3f76eb00e2a_0_74:notes"/>
+          <p:cNvPr id="189" name="Google Shape;189;g3f76eb00e2a_0_100:notes"/>
           <p:cNvSpPr txBox="1">
             <a:spLocks noGrp="1"/>
           </p:cNvSpPr>
@@ -929,12 +918,18 @@
 </p:notes>
 </file>
 
-<file path=ppt/notesSlides/notesSlide11.xml><?xml version="1.0" encoding="utf-8"?>
+<file path=ppt/notesSlides/notesSlide2.xml><?xml version="1.0" encoding="utf-8"?>
 <p:notes xmlns:a="http://schemas.openxmlformats.org/drawingml/2006/main" xmlns:r="http://schemas.openxmlformats.org/officeDocument/2006/relationships" xmlns:p="http://schemas.openxmlformats.org/presentationml/2006/main" showMasterSp="0" showMasterPhAnim="0">
   <p:cSld>
     <p:spTree>
       <p:nvGrpSpPr>
-        <p:cNvPr id="1" name="Shape 118"/>
+        <p:cNvPr id="1" name="Shape 50">
+          <a:extLst>
+            <a:ext uri="{FF2B5EF4-FFF2-40B4-BE49-F238E27FC236}">
+              <a16:creationId xmlns:a16="http://schemas.microsoft.com/office/drawing/2014/main" id="{F92720E0-E394-EAE8-6025-C0F83F6F8567}"/>
+            </a:ext>
+          </a:extLst>
+        </p:cNvPr>
         <p:cNvGrpSpPr/>
         <p:nvPr/>
       </p:nvGrpSpPr>
@@ -948,7 +943,13 @@
       </p:grpSpPr>
       <p:sp>
         <p:nvSpPr>
-          <p:cNvPr id="119" name="Google Shape;119;g3f76eb00e2a_0_105:notes"/>
+          <p:cNvPr id="51" name="Google Shape;51;p:notes">
+            <a:extLst>
+              <a:ext uri="{FF2B5EF4-FFF2-40B4-BE49-F238E27FC236}">
+                <a16:creationId xmlns:a16="http://schemas.microsoft.com/office/drawing/2014/main" id="{315C968F-F6AF-3D2D-16BA-33708A255782}"/>
+              </a:ext>
+            </a:extLst>
+          </p:cNvPr>
           <p:cNvSpPr>
             <a:spLocks noGrp="1" noRot="1" noChangeAspect="1"/>
           </p:cNvSpPr>
@@ -958,7 +959,7 @@
         </p:nvSpPr>
         <p:spPr>
           <a:xfrm>
-            <a:off x="381300" y="685800"/>
+            <a:off x="381000" y="685800"/>
             <a:ext cx="6096000" cy="3429000"/>
           </a:xfrm>
           <a:custGeom>
@@ -989,7 +990,13 @@
       </p:sp>
       <p:sp>
         <p:nvSpPr>
-          <p:cNvPr id="120" name="Google Shape;120;g3f76eb00e2a_0_105:notes"/>
+          <p:cNvPr id="52" name="Google Shape;52;p:notes">
+            <a:extLst>
+              <a:ext uri="{FF2B5EF4-FFF2-40B4-BE49-F238E27FC236}">
+                <a16:creationId xmlns:a16="http://schemas.microsoft.com/office/drawing/2014/main" id="{AD5E25C7-9709-F5C7-4CA9-57EA3B4B16DB}"/>
+              </a:ext>
+            </a:extLst>
+          </p:cNvPr>
           <p:cNvSpPr txBox="1">
             <a:spLocks noGrp="1"/>
           </p:cNvSpPr>
@@ -1026,6 +1033,11 @@
         </p:txBody>
       </p:sp>
     </p:spTree>
+    <p:extLst>
+      <p:ext uri="{BB962C8B-B14F-4D97-AF65-F5344CB8AC3E}">
+        <p14:creationId xmlns:p14="http://schemas.microsoft.com/office/powerpoint/2010/main" val="2956843077"/>
+      </p:ext>
+    </p:extLst>
   </p:cSld>
   <p:clrMapOvr>
     <a:masterClrMapping/>
@@ -1033,839 +1045,7 @@
 </p:notes>
 </file>
 
-<file path=ppt/notesSlides/notesSlide12.xml><?xml version="1.0" encoding="utf-8"?>
-<p:notes xmlns:a="http://schemas.openxmlformats.org/drawingml/2006/main" xmlns:r="http://schemas.openxmlformats.org/officeDocument/2006/relationships" xmlns:p="http://schemas.openxmlformats.org/presentationml/2006/main" showMasterSp="0" showMasterPhAnim="0">
-  <p:cSld>
-    <p:spTree>
-      <p:nvGrpSpPr>
-        <p:cNvPr id="1" name="Shape 125"/>
-        <p:cNvGrpSpPr/>
-        <p:nvPr/>
-      </p:nvGrpSpPr>
-      <p:grpSpPr>
-        <a:xfrm>
-          <a:off x="0" y="0"/>
-          <a:ext cx="0" cy="0"/>
-          <a:chOff x="0" y="0"/>
-          <a:chExt cx="0" cy="0"/>
-        </a:xfrm>
-      </p:grpSpPr>
-      <p:sp>
-        <p:nvSpPr>
-          <p:cNvPr id="126" name="Google Shape;126;g3f76eb00e2a_0_118:notes"/>
-          <p:cNvSpPr>
-            <a:spLocks noGrp="1" noRot="1" noChangeAspect="1"/>
-          </p:cNvSpPr>
-          <p:nvPr>
-            <p:ph type="sldImg" idx="2"/>
-          </p:nvPr>
-        </p:nvSpPr>
-        <p:spPr>
-          <a:xfrm>
-            <a:off x="381300" y="685800"/>
-            <a:ext cx="6096000" cy="3429000"/>
-          </a:xfrm>
-          <a:custGeom>
-            <a:avLst/>
-            <a:gdLst/>
-            <a:ahLst/>
-            <a:cxnLst/>
-            <a:rect l="l" t="t" r="r" b="b"/>
-            <a:pathLst>
-              <a:path w="120000" h="120000" extrusionOk="0">
-                <a:moveTo>
-                  <a:pt x="0" y="0"/>
-                </a:moveTo>
-                <a:lnTo>
-                  <a:pt x="120000" y="0"/>
-                </a:lnTo>
-                <a:lnTo>
-                  <a:pt x="120000" y="120000"/>
-                </a:lnTo>
-                <a:lnTo>
-                  <a:pt x="0" y="120000"/>
-                </a:lnTo>
-                <a:close/>
-              </a:path>
-            </a:pathLst>
-          </a:custGeom>
-        </p:spPr>
-      </p:sp>
-      <p:sp>
-        <p:nvSpPr>
-          <p:cNvPr id="127" name="Google Shape;127;g3f76eb00e2a_0_118:notes"/>
-          <p:cNvSpPr txBox="1">
-            <a:spLocks noGrp="1"/>
-          </p:cNvSpPr>
-          <p:nvPr>
-            <p:ph type="body" idx="1"/>
-          </p:nvPr>
-        </p:nvSpPr>
-        <p:spPr>
-          <a:xfrm>
-            <a:off x="685800" y="4343400"/>
-            <a:ext cx="5486400" cy="4114800"/>
-          </a:xfrm>
-          <a:prstGeom prst="rect">
-            <a:avLst/>
-          </a:prstGeom>
-        </p:spPr>
-        <p:txBody>
-          <a:bodyPr spcFirstLastPara="1" wrap="square" lIns="91425" tIns="91425" rIns="91425" bIns="91425" anchor="t" anchorCtr="0">
-            <a:noAutofit/>
-          </a:bodyPr>
-          <a:lstStyle/>
-          <a:p>
-            <a:pPr marL="0" lvl="0" indent="0" algn="l" rtl="0">
-              <a:spcBef>
-                <a:spcPts val="0"/>
-              </a:spcBef>
-              <a:spcAft>
-                <a:spcPts val="0"/>
-              </a:spcAft>
-              <a:buNone/>
-            </a:pPr>
-            <a:endParaRPr/>
-          </a:p>
-        </p:txBody>
-      </p:sp>
-    </p:spTree>
-  </p:cSld>
-  <p:clrMapOvr>
-    <a:masterClrMapping/>
-  </p:clrMapOvr>
-</p:notes>
-</file>
-
-<file path=ppt/notesSlides/notesSlide13.xml><?xml version="1.0" encoding="utf-8"?>
-<p:notes xmlns:a="http://schemas.openxmlformats.org/drawingml/2006/main" xmlns:r="http://schemas.openxmlformats.org/officeDocument/2006/relationships" xmlns:p="http://schemas.openxmlformats.org/presentationml/2006/main" showMasterSp="0" showMasterPhAnim="0">
-  <p:cSld>
-    <p:spTree>
-      <p:nvGrpSpPr>
-        <p:cNvPr id="1" name="Shape 132"/>
-        <p:cNvGrpSpPr/>
-        <p:nvPr/>
-      </p:nvGrpSpPr>
-      <p:grpSpPr>
-        <a:xfrm>
-          <a:off x="0" y="0"/>
-          <a:ext cx="0" cy="0"/>
-          <a:chOff x="0" y="0"/>
-          <a:chExt cx="0" cy="0"/>
-        </a:xfrm>
-      </p:grpSpPr>
-      <p:sp>
-        <p:nvSpPr>
-          <p:cNvPr id="133" name="Google Shape;133;g3f76eb00e2a_0_131:notes"/>
-          <p:cNvSpPr>
-            <a:spLocks noGrp="1" noRot="1" noChangeAspect="1"/>
-          </p:cNvSpPr>
-          <p:nvPr>
-            <p:ph type="sldImg" idx="2"/>
-          </p:nvPr>
-        </p:nvSpPr>
-        <p:spPr>
-          <a:xfrm>
-            <a:off x="381300" y="685800"/>
-            <a:ext cx="6096000" cy="3429000"/>
-          </a:xfrm>
-          <a:custGeom>
-            <a:avLst/>
-            <a:gdLst/>
-            <a:ahLst/>
-            <a:cxnLst/>
-            <a:rect l="l" t="t" r="r" b="b"/>
-            <a:pathLst>
-              <a:path w="120000" h="120000" extrusionOk="0">
-                <a:moveTo>
-                  <a:pt x="0" y="0"/>
-                </a:moveTo>
-                <a:lnTo>
-                  <a:pt x="120000" y="0"/>
-                </a:lnTo>
-                <a:lnTo>
-                  <a:pt x="120000" y="120000"/>
-                </a:lnTo>
-                <a:lnTo>
-                  <a:pt x="0" y="120000"/>
-                </a:lnTo>
-                <a:close/>
-              </a:path>
-            </a:pathLst>
-          </a:custGeom>
-        </p:spPr>
-      </p:sp>
-      <p:sp>
-        <p:nvSpPr>
-          <p:cNvPr id="134" name="Google Shape;134;g3f76eb00e2a_0_131:notes"/>
-          <p:cNvSpPr txBox="1">
-            <a:spLocks noGrp="1"/>
-          </p:cNvSpPr>
-          <p:nvPr>
-            <p:ph type="body" idx="1"/>
-          </p:nvPr>
-        </p:nvSpPr>
-        <p:spPr>
-          <a:xfrm>
-            <a:off x="685800" y="4343400"/>
-            <a:ext cx="5486400" cy="4114800"/>
-          </a:xfrm>
-          <a:prstGeom prst="rect">
-            <a:avLst/>
-          </a:prstGeom>
-        </p:spPr>
-        <p:txBody>
-          <a:bodyPr spcFirstLastPara="1" wrap="square" lIns="91425" tIns="91425" rIns="91425" bIns="91425" anchor="t" anchorCtr="0">
-            <a:noAutofit/>
-          </a:bodyPr>
-          <a:lstStyle/>
-          <a:p>
-            <a:pPr marL="0" lvl="0" indent="0" algn="l" rtl="0">
-              <a:spcBef>
-                <a:spcPts val="0"/>
-              </a:spcBef>
-              <a:spcAft>
-                <a:spcPts val="0"/>
-              </a:spcAft>
-              <a:buNone/>
-            </a:pPr>
-            <a:endParaRPr/>
-          </a:p>
-        </p:txBody>
-      </p:sp>
-    </p:spTree>
-  </p:cSld>
-  <p:clrMapOvr>
-    <a:masterClrMapping/>
-  </p:clrMapOvr>
-</p:notes>
-</file>
-
-<file path=ppt/notesSlides/notesSlide14.xml><?xml version="1.0" encoding="utf-8"?>
-<p:notes xmlns:a="http://schemas.openxmlformats.org/drawingml/2006/main" xmlns:r="http://schemas.openxmlformats.org/officeDocument/2006/relationships" xmlns:p="http://schemas.openxmlformats.org/presentationml/2006/main" showMasterSp="0" showMasterPhAnim="0">
-  <p:cSld>
-    <p:spTree>
-      <p:nvGrpSpPr>
-        <p:cNvPr id="1" name="Shape 139"/>
-        <p:cNvGrpSpPr/>
-        <p:nvPr/>
-      </p:nvGrpSpPr>
-      <p:grpSpPr>
-        <a:xfrm>
-          <a:off x="0" y="0"/>
-          <a:ext cx="0" cy="0"/>
-          <a:chOff x="0" y="0"/>
-          <a:chExt cx="0" cy="0"/>
-        </a:xfrm>
-      </p:grpSpPr>
-      <p:sp>
-        <p:nvSpPr>
-          <p:cNvPr id="140" name="Google Shape;140;g3f76eb00e2a_0_138:notes"/>
-          <p:cNvSpPr>
-            <a:spLocks noGrp="1" noRot="1" noChangeAspect="1"/>
-          </p:cNvSpPr>
-          <p:nvPr>
-            <p:ph type="sldImg" idx="2"/>
-          </p:nvPr>
-        </p:nvSpPr>
-        <p:spPr>
-          <a:xfrm>
-            <a:off x="381300" y="685800"/>
-            <a:ext cx="6096000" cy="3429000"/>
-          </a:xfrm>
-          <a:custGeom>
-            <a:avLst/>
-            <a:gdLst/>
-            <a:ahLst/>
-            <a:cxnLst/>
-            <a:rect l="l" t="t" r="r" b="b"/>
-            <a:pathLst>
-              <a:path w="120000" h="120000" extrusionOk="0">
-                <a:moveTo>
-                  <a:pt x="0" y="0"/>
-                </a:moveTo>
-                <a:lnTo>
-                  <a:pt x="120000" y="0"/>
-                </a:lnTo>
-                <a:lnTo>
-                  <a:pt x="120000" y="120000"/>
-                </a:lnTo>
-                <a:lnTo>
-                  <a:pt x="0" y="120000"/>
-                </a:lnTo>
-                <a:close/>
-              </a:path>
-            </a:pathLst>
-          </a:custGeom>
-        </p:spPr>
-      </p:sp>
-      <p:sp>
-        <p:nvSpPr>
-          <p:cNvPr id="141" name="Google Shape;141;g3f76eb00e2a_0_138:notes"/>
-          <p:cNvSpPr txBox="1">
-            <a:spLocks noGrp="1"/>
-          </p:cNvSpPr>
-          <p:nvPr>
-            <p:ph type="body" idx="1"/>
-          </p:nvPr>
-        </p:nvSpPr>
-        <p:spPr>
-          <a:xfrm>
-            <a:off x="685800" y="4343400"/>
-            <a:ext cx="5486400" cy="4114800"/>
-          </a:xfrm>
-          <a:prstGeom prst="rect">
-            <a:avLst/>
-          </a:prstGeom>
-        </p:spPr>
-        <p:txBody>
-          <a:bodyPr spcFirstLastPara="1" wrap="square" lIns="91425" tIns="91425" rIns="91425" bIns="91425" anchor="t" anchorCtr="0">
-            <a:noAutofit/>
-          </a:bodyPr>
-          <a:lstStyle/>
-          <a:p>
-            <a:pPr marL="0" lvl="0" indent="0" algn="l" rtl="0">
-              <a:spcBef>
-                <a:spcPts val="0"/>
-              </a:spcBef>
-              <a:spcAft>
-                <a:spcPts val="0"/>
-              </a:spcAft>
-              <a:buNone/>
-            </a:pPr>
-            <a:endParaRPr/>
-          </a:p>
-        </p:txBody>
-      </p:sp>
-    </p:spTree>
-  </p:cSld>
-  <p:clrMapOvr>
-    <a:masterClrMapping/>
-  </p:clrMapOvr>
-</p:notes>
-</file>
-
-<file path=ppt/notesSlides/notesSlide15.xml><?xml version="1.0" encoding="utf-8"?>
-<p:notes xmlns:a="http://schemas.openxmlformats.org/drawingml/2006/main" xmlns:r="http://schemas.openxmlformats.org/officeDocument/2006/relationships" xmlns:p="http://schemas.openxmlformats.org/presentationml/2006/main" showMasterSp="0" showMasterPhAnim="0">
-  <p:cSld>
-    <p:spTree>
-      <p:nvGrpSpPr>
-        <p:cNvPr id="1" name="Shape 146"/>
-        <p:cNvGrpSpPr/>
-        <p:nvPr/>
-      </p:nvGrpSpPr>
-      <p:grpSpPr>
-        <a:xfrm>
-          <a:off x="0" y="0"/>
-          <a:ext cx="0" cy="0"/>
-          <a:chOff x="0" y="0"/>
-          <a:chExt cx="0" cy="0"/>
-        </a:xfrm>
-      </p:grpSpPr>
-      <p:sp>
-        <p:nvSpPr>
-          <p:cNvPr id="147" name="Google Shape;147;g3f76eb00e2a_0_87:notes"/>
-          <p:cNvSpPr>
-            <a:spLocks noGrp="1" noRot="1" noChangeAspect="1"/>
-          </p:cNvSpPr>
-          <p:nvPr>
-            <p:ph type="sldImg" idx="2"/>
-          </p:nvPr>
-        </p:nvSpPr>
-        <p:spPr>
-          <a:xfrm>
-            <a:off x="381300" y="685800"/>
-            <a:ext cx="6096000" cy="3429000"/>
-          </a:xfrm>
-          <a:custGeom>
-            <a:avLst/>
-            <a:gdLst/>
-            <a:ahLst/>
-            <a:cxnLst/>
-            <a:rect l="l" t="t" r="r" b="b"/>
-            <a:pathLst>
-              <a:path w="120000" h="120000" extrusionOk="0">
-                <a:moveTo>
-                  <a:pt x="0" y="0"/>
-                </a:moveTo>
-                <a:lnTo>
-                  <a:pt x="120000" y="0"/>
-                </a:lnTo>
-                <a:lnTo>
-                  <a:pt x="120000" y="120000"/>
-                </a:lnTo>
-                <a:lnTo>
-                  <a:pt x="0" y="120000"/>
-                </a:lnTo>
-                <a:close/>
-              </a:path>
-            </a:pathLst>
-          </a:custGeom>
-        </p:spPr>
-      </p:sp>
-      <p:sp>
-        <p:nvSpPr>
-          <p:cNvPr id="148" name="Google Shape;148;g3f76eb00e2a_0_87:notes"/>
-          <p:cNvSpPr txBox="1">
-            <a:spLocks noGrp="1"/>
-          </p:cNvSpPr>
-          <p:nvPr>
-            <p:ph type="body" idx="1"/>
-          </p:nvPr>
-        </p:nvSpPr>
-        <p:spPr>
-          <a:xfrm>
-            <a:off x="685800" y="4343400"/>
-            <a:ext cx="5486400" cy="4114800"/>
-          </a:xfrm>
-          <a:prstGeom prst="rect">
-            <a:avLst/>
-          </a:prstGeom>
-        </p:spPr>
-        <p:txBody>
-          <a:bodyPr spcFirstLastPara="1" wrap="square" lIns="91425" tIns="91425" rIns="91425" bIns="91425" anchor="t" anchorCtr="0">
-            <a:noAutofit/>
-          </a:bodyPr>
-          <a:lstStyle/>
-          <a:p>
-            <a:pPr marL="0" lvl="0" indent="0" algn="l" rtl="0">
-              <a:spcBef>
-                <a:spcPts val="0"/>
-              </a:spcBef>
-              <a:spcAft>
-                <a:spcPts val="0"/>
-              </a:spcAft>
-              <a:buNone/>
-            </a:pPr>
-            <a:endParaRPr/>
-          </a:p>
-        </p:txBody>
-      </p:sp>
-    </p:spTree>
-  </p:cSld>
-  <p:clrMapOvr>
-    <a:masterClrMapping/>
-  </p:clrMapOvr>
-</p:notes>
-</file>
-
-<file path=ppt/notesSlides/notesSlide16.xml><?xml version="1.0" encoding="utf-8"?>
-<p:notes xmlns:a="http://schemas.openxmlformats.org/drawingml/2006/main" xmlns:r="http://schemas.openxmlformats.org/officeDocument/2006/relationships" xmlns:p="http://schemas.openxmlformats.org/presentationml/2006/main" showMasterSp="0" showMasterPhAnim="0">
-  <p:cSld>
-    <p:spTree>
-      <p:nvGrpSpPr>
-        <p:cNvPr id="1" name="Shape 153"/>
-        <p:cNvGrpSpPr/>
-        <p:nvPr/>
-      </p:nvGrpSpPr>
-      <p:grpSpPr>
-        <a:xfrm>
-          <a:off x="0" y="0"/>
-          <a:ext cx="0" cy="0"/>
-          <a:chOff x="0" y="0"/>
-          <a:chExt cx="0" cy="0"/>
-        </a:xfrm>
-      </p:grpSpPr>
-      <p:sp>
-        <p:nvSpPr>
-          <p:cNvPr id="154" name="Google Shape;154;g3f76eb00e2a_0_151:notes"/>
-          <p:cNvSpPr>
-            <a:spLocks noGrp="1" noRot="1" noChangeAspect="1"/>
-          </p:cNvSpPr>
-          <p:nvPr>
-            <p:ph type="sldImg" idx="2"/>
-          </p:nvPr>
-        </p:nvSpPr>
-        <p:spPr>
-          <a:xfrm>
-            <a:off x="381300" y="685800"/>
-            <a:ext cx="6096000" cy="3429000"/>
-          </a:xfrm>
-          <a:custGeom>
-            <a:avLst/>
-            <a:gdLst/>
-            <a:ahLst/>
-            <a:cxnLst/>
-            <a:rect l="l" t="t" r="r" b="b"/>
-            <a:pathLst>
-              <a:path w="120000" h="120000" extrusionOk="0">
-                <a:moveTo>
-                  <a:pt x="0" y="0"/>
-                </a:moveTo>
-                <a:lnTo>
-                  <a:pt x="120000" y="0"/>
-                </a:lnTo>
-                <a:lnTo>
-                  <a:pt x="120000" y="120000"/>
-                </a:lnTo>
-                <a:lnTo>
-                  <a:pt x="0" y="120000"/>
-                </a:lnTo>
-                <a:close/>
-              </a:path>
-            </a:pathLst>
-          </a:custGeom>
-        </p:spPr>
-      </p:sp>
-      <p:sp>
-        <p:nvSpPr>
-          <p:cNvPr id="155" name="Google Shape;155;g3f76eb00e2a_0_151:notes"/>
-          <p:cNvSpPr txBox="1">
-            <a:spLocks noGrp="1"/>
-          </p:cNvSpPr>
-          <p:nvPr>
-            <p:ph type="body" idx="1"/>
-          </p:nvPr>
-        </p:nvSpPr>
-        <p:spPr>
-          <a:xfrm>
-            <a:off x="685800" y="4343400"/>
-            <a:ext cx="5486400" cy="4114800"/>
-          </a:xfrm>
-          <a:prstGeom prst="rect">
-            <a:avLst/>
-          </a:prstGeom>
-        </p:spPr>
-        <p:txBody>
-          <a:bodyPr spcFirstLastPara="1" wrap="square" lIns="91425" tIns="91425" rIns="91425" bIns="91425" anchor="t" anchorCtr="0">
-            <a:noAutofit/>
-          </a:bodyPr>
-          <a:lstStyle/>
-          <a:p>
-            <a:pPr marL="0" lvl="0" indent="0" algn="l" rtl="0">
-              <a:spcBef>
-                <a:spcPts val="0"/>
-              </a:spcBef>
-              <a:spcAft>
-                <a:spcPts val="0"/>
-              </a:spcAft>
-              <a:buNone/>
-            </a:pPr>
-            <a:endParaRPr/>
-          </a:p>
-        </p:txBody>
-      </p:sp>
-    </p:spTree>
-  </p:cSld>
-  <p:clrMapOvr>
-    <a:masterClrMapping/>
-  </p:clrMapOvr>
-</p:notes>
-</file>
-
-<file path=ppt/notesSlides/notesSlide17.xml><?xml version="1.0" encoding="utf-8"?>
-<p:notes xmlns:a="http://schemas.openxmlformats.org/drawingml/2006/main" xmlns:r="http://schemas.openxmlformats.org/officeDocument/2006/relationships" xmlns:p="http://schemas.openxmlformats.org/presentationml/2006/main" showMasterSp="0" showMasterPhAnim="0">
-  <p:cSld>
-    <p:spTree>
-      <p:nvGrpSpPr>
-        <p:cNvPr id="1" name="Shape 160"/>
-        <p:cNvGrpSpPr/>
-        <p:nvPr/>
-      </p:nvGrpSpPr>
-      <p:grpSpPr>
-        <a:xfrm>
-          <a:off x="0" y="0"/>
-          <a:ext cx="0" cy="0"/>
-          <a:chOff x="0" y="0"/>
-          <a:chExt cx="0" cy="0"/>
-        </a:xfrm>
-      </p:grpSpPr>
-      <p:sp>
-        <p:nvSpPr>
-          <p:cNvPr id="161" name="Google Shape;161;g3f76eb00e2a_0_158:notes"/>
-          <p:cNvSpPr>
-            <a:spLocks noGrp="1" noRot="1" noChangeAspect="1"/>
-          </p:cNvSpPr>
-          <p:nvPr>
-            <p:ph type="sldImg" idx="2"/>
-          </p:nvPr>
-        </p:nvSpPr>
-        <p:spPr>
-          <a:xfrm>
-            <a:off x="381300" y="685800"/>
-            <a:ext cx="6096000" cy="3429000"/>
-          </a:xfrm>
-          <a:custGeom>
-            <a:avLst/>
-            <a:gdLst/>
-            <a:ahLst/>
-            <a:cxnLst/>
-            <a:rect l="l" t="t" r="r" b="b"/>
-            <a:pathLst>
-              <a:path w="120000" h="120000" extrusionOk="0">
-                <a:moveTo>
-                  <a:pt x="0" y="0"/>
-                </a:moveTo>
-                <a:lnTo>
-                  <a:pt x="120000" y="0"/>
-                </a:lnTo>
-                <a:lnTo>
-                  <a:pt x="120000" y="120000"/>
-                </a:lnTo>
-                <a:lnTo>
-                  <a:pt x="0" y="120000"/>
-                </a:lnTo>
-                <a:close/>
-              </a:path>
-            </a:pathLst>
-          </a:custGeom>
-        </p:spPr>
-      </p:sp>
-      <p:sp>
-        <p:nvSpPr>
-          <p:cNvPr id="162" name="Google Shape;162;g3f76eb00e2a_0_158:notes"/>
-          <p:cNvSpPr txBox="1">
-            <a:spLocks noGrp="1"/>
-          </p:cNvSpPr>
-          <p:nvPr>
-            <p:ph type="body" idx="1"/>
-          </p:nvPr>
-        </p:nvSpPr>
-        <p:spPr>
-          <a:xfrm>
-            <a:off x="685800" y="4343400"/>
-            <a:ext cx="5486400" cy="4114800"/>
-          </a:xfrm>
-          <a:prstGeom prst="rect">
-            <a:avLst/>
-          </a:prstGeom>
-        </p:spPr>
-        <p:txBody>
-          <a:bodyPr spcFirstLastPara="1" wrap="square" lIns="91425" tIns="91425" rIns="91425" bIns="91425" anchor="t" anchorCtr="0">
-            <a:noAutofit/>
-          </a:bodyPr>
-          <a:lstStyle/>
-          <a:p>
-            <a:pPr marL="0" lvl="0" indent="0" algn="l" rtl="0">
-              <a:spcBef>
-                <a:spcPts val="0"/>
-              </a:spcBef>
-              <a:spcAft>
-                <a:spcPts val="0"/>
-              </a:spcAft>
-              <a:buNone/>
-            </a:pPr>
-            <a:endParaRPr/>
-          </a:p>
-        </p:txBody>
-      </p:sp>
-    </p:spTree>
-  </p:cSld>
-  <p:clrMapOvr>
-    <a:masterClrMapping/>
-  </p:clrMapOvr>
-</p:notes>
-</file>
-
-<file path=ppt/notesSlides/notesSlide18.xml><?xml version="1.0" encoding="utf-8"?>
-<p:notes xmlns:a="http://schemas.openxmlformats.org/drawingml/2006/main" xmlns:r="http://schemas.openxmlformats.org/officeDocument/2006/relationships" xmlns:p="http://schemas.openxmlformats.org/presentationml/2006/main" showMasterSp="0" showMasterPhAnim="0">
-  <p:cSld>
-    <p:spTree>
-      <p:nvGrpSpPr>
-        <p:cNvPr id="1" name="Shape 167"/>
-        <p:cNvGrpSpPr/>
-        <p:nvPr/>
-      </p:nvGrpSpPr>
-      <p:grpSpPr>
-        <a:xfrm>
-          <a:off x="0" y="0"/>
-          <a:ext cx="0" cy="0"/>
-          <a:chOff x="0" y="0"/>
-          <a:chExt cx="0" cy="0"/>
-        </a:xfrm>
-      </p:grpSpPr>
-      <p:sp>
-        <p:nvSpPr>
-          <p:cNvPr id="168" name="Google Shape;168;g3f76eb00e2a_0_165:notes"/>
-          <p:cNvSpPr>
-            <a:spLocks noGrp="1" noRot="1" noChangeAspect="1"/>
-          </p:cNvSpPr>
-          <p:nvPr>
-            <p:ph type="sldImg" idx="2"/>
-          </p:nvPr>
-        </p:nvSpPr>
-        <p:spPr>
-          <a:xfrm>
-            <a:off x="381300" y="685800"/>
-            <a:ext cx="6096000" cy="3429000"/>
-          </a:xfrm>
-          <a:custGeom>
-            <a:avLst/>
-            <a:gdLst/>
-            <a:ahLst/>
-            <a:cxnLst/>
-            <a:rect l="l" t="t" r="r" b="b"/>
-            <a:pathLst>
-              <a:path w="120000" h="120000" extrusionOk="0">
-                <a:moveTo>
-                  <a:pt x="0" y="0"/>
-                </a:moveTo>
-                <a:lnTo>
-                  <a:pt x="120000" y="0"/>
-                </a:lnTo>
-                <a:lnTo>
-                  <a:pt x="120000" y="120000"/>
-                </a:lnTo>
-                <a:lnTo>
-                  <a:pt x="0" y="120000"/>
-                </a:lnTo>
-                <a:close/>
-              </a:path>
-            </a:pathLst>
-          </a:custGeom>
-        </p:spPr>
-      </p:sp>
-      <p:sp>
-        <p:nvSpPr>
-          <p:cNvPr id="169" name="Google Shape;169;g3f76eb00e2a_0_165:notes"/>
-          <p:cNvSpPr txBox="1">
-            <a:spLocks noGrp="1"/>
-          </p:cNvSpPr>
-          <p:nvPr>
-            <p:ph type="body" idx="1"/>
-          </p:nvPr>
-        </p:nvSpPr>
-        <p:spPr>
-          <a:xfrm>
-            <a:off x="685800" y="4343400"/>
-            <a:ext cx="5486400" cy="4114800"/>
-          </a:xfrm>
-          <a:prstGeom prst="rect">
-            <a:avLst/>
-          </a:prstGeom>
-        </p:spPr>
-        <p:txBody>
-          <a:bodyPr spcFirstLastPara="1" wrap="square" lIns="91425" tIns="91425" rIns="91425" bIns="91425" anchor="t" anchorCtr="0">
-            <a:noAutofit/>
-          </a:bodyPr>
-          <a:lstStyle/>
-          <a:p>
-            <a:pPr marL="0" lvl="0" indent="0" algn="l" rtl="0">
-              <a:spcBef>
-                <a:spcPts val="0"/>
-              </a:spcBef>
-              <a:spcAft>
-                <a:spcPts val="0"/>
-              </a:spcAft>
-              <a:buNone/>
-            </a:pPr>
-            <a:endParaRPr/>
-          </a:p>
-        </p:txBody>
-      </p:sp>
-    </p:spTree>
-  </p:cSld>
-  <p:clrMapOvr>
-    <a:masterClrMapping/>
-  </p:clrMapOvr>
-</p:notes>
-</file>
-
-<file path=ppt/notesSlides/notesSlide19.xml><?xml version="1.0" encoding="utf-8"?>
-<p:notes xmlns:a="http://schemas.openxmlformats.org/drawingml/2006/main" xmlns:r="http://schemas.openxmlformats.org/officeDocument/2006/relationships" xmlns:p="http://schemas.openxmlformats.org/presentationml/2006/main" showMasterSp="0" showMasterPhAnim="0">
-  <p:cSld>
-    <p:spTree>
-      <p:nvGrpSpPr>
-        <p:cNvPr id="1" name="Shape 174"/>
-        <p:cNvGrpSpPr/>
-        <p:nvPr/>
-      </p:nvGrpSpPr>
-      <p:grpSpPr>
-        <a:xfrm>
-          <a:off x="0" y="0"/>
-          <a:ext cx="0" cy="0"/>
-          <a:chOff x="0" y="0"/>
-          <a:chExt cx="0" cy="0"/>
-        </a:xfrm>
-      </p:grpSpPr>
-      <p:sp>
-        <p:nvSpPr>
-          <p:cNvPr id="175" name="Google Shape;175;g3f76eb00e2a_0_172:notes"/>
-          <p:cNvSpPr>
-            <a:spLocks noGrp="1" noRot="1" noChangeAspect="1"/>
-          </p:cNvSpPr>
-          <p:nvPr>
-            <p:ph type="sldImg" idx="2"/>
-          </p:nvPr>
-        </p:nvSpPr>
-        <p:spPr>
-          <a:xfrm>
-            <a:off x="381300" y="685800"/>
-            <a:ext cx="6096000" cy="3429000"/>
-          </a:xfrm>
-          <a:custGeom>
-            <a:avLst/>
-            <a:gdLst/>
-            <a:ahLst/>
-            <a:cxnLst/>
-            <a:rect l="l" t="t" r="r" b="b"/>
-            <a:pathLst>
-              <a:path w="120000" h="120000" extrusionOk="0">
-                <a:moveTo>
-                  <a:pt x="0" y="0"/>
-                </a:moveTo>
-                <a:lnTo>
-                  <a:pt x="120000" y="0"/>
-                </a:lnTo>
-                <a:lnTo>
-                  <a:pt x="120000" y="120000"/>
-                </a:lnTo>
-                <a:lnTo>
-                  <a:pt x="0" y="120000"/>
-                </a:lnTo>
-                <a:close/>
-              </a:path>
-            </a:pathLst>
-          </a:custGeom>
-        </p:spPr>
-      </p:sp>
-      <p:sp>
-        <p:nvSpPr>
-          <p:cNvPr id="176" name="Google Shape;176;g3f76eb00e2a_0_172:notes"/>
-          <p:cNvSpPr txBox="1">
-            <a:spLocks noGrp="1"/>
-          </p:cNvSpPr>
-          <p:nvPr>
-            <p:ph type="body" idx="1"/>
-          </p:nvPr>
-        </p:nvSpPr>
-        <p:spPr>
-          <a:xfrm>
-            <a:off x="685800" y="4343400"/>
-            <a:ext cx="5486400" cy="4114800"/>
-          </a:xfrm>
-          <a:prstGeom prst="rect">
-            <a:avLst/>
-          </a:prstGeom>
-        </p:spPr>
-        <p:txBody>
-          <a:bodyPr spcFirstLastPara="1" wrap="square" lIns="91425" tIns="91425" rIns="91425" bIns="91425" anchor="t" anchorCtr="0">
-            <a:noAutofit/>
-          </a:bodyPr>
-          <a:lstStyle/>
-          <a:p>
-            <a:pPr marL="0" lvl="0" indent="0" algn="l" rtl="0">
-              <a:spcBef>
-                <a:spcPts val="0"/>
-              </a:spcBef>
-              <a:spcAft>
-                <a:spcPts val="0"/>
-              </a:spcAft>
-              <a:buNone/>
-            </a:pPr>
-            <a:endParaRPr/>
-          </a:p>
-        </p:txBody>
-      </p:sp>
-    </p:spTree>
-  </p:cSld>
-  <p:clrMapOvr>
-    <a:masterClrMapping/>
-  </p:clrMapOvr>
-</p:notes>
-</file>
-
-<file path=ppt/notesSlides/notesSlide2.xml><?xml version="1.0" encoding="utf-8"?>
+<file path=ppt/notesSlides/notesSlide3.xml><?xml version="1.0" encoding="utf-8"?>
 <p:notes xmlns:a="http://schemas.openxmlformats.org/drawingml/2006/main" xmlns:r="http://schemas.openxmlformats.org/officeDocument/2006/relationships" xmlns:p="http://schemas.openxmlformats.org/presentationml/2006/main" showMasterSp="0" showMasterPhAnim="0">
   <p:cSld>
     <p:spTree>
@@ -1969,12 +1149,18 @@
 </p:notes>
 </file>
 
-<file path=ppt/notesSlides/notesSlide20.xml><?xml version="1.0" encoding="utf-8"?>
+<file path=ppt/notesSlides/notesSlide4.xml><?xml version="1.0" encoding="utf-8"?>
 <p:notes xmlns:a="http://schemas.openxmlformats.org/drawingml/2006/main" xmlns:r="http://schemas.openxmlformats.org/officeDocument/2006/relationships" xmlns:p="http://schemas.openxmlformats.org/presentationml/2006/main" showMasterSp="0" showMasterPhAnim="0">
   <p:cSld>
     <p:spTree>
       <p:nvGrpSpPr>
-        <p:cNvPr id="1" name="Shape 181"/>
+        <p:cNvPr id="1" name="Shape 56">
+          <a:extLst>
+            <a:ext uri="{FF2B5EF4-FFF2-40B4-BE49-F238E27FC236}">
+              <a16:creationId xmlns:a16="http://schemas.microsoft.com/office/drawing/2014/main" id="{EEC0646D-50AC-249E-98A9-B9383125B139}"/>
+            </a:ext>
+          </a:extLst>
+        </p:cNvPr>
         <p:cNvGrpSpPr/>
         <p:nvPr/>
       </p:nvGrpSpPr>
@@ -1988,215 +1174,13 @@
       </p:grpSpPr>
       <p:sp>
         <p:nvSpPr>
-          <p:cNvPr id="182" name="Google Shape;182;g3f76eb00e2a_0_94:notes"/>
-          <p:cNvSpPr>
-            <a:spLocks noGrp="1" noRot="1" noChangeAspect="1"/>
-          </p:cNvSpPr>
-          <p:nvPr>
-            <p:ph type="sldImg" idx="2"/>
-          </p:nvPr>
-        </p:nvSpPr>
-        <p:spPr>
-          <a:xfrm>
-            <a:off x="381300" y="685800"/>
-            <a:ext cx="6096000" cy="3429000"/>
-          </a:xfrm>
-          <a:custGeom>
-            <a:avLst/>
-            <a:gdLst/>
-            <a:ahLst/>
-            <a:cxnLst/>
-            <a:rect l="l" t="t" r="r" b="b"/>
-            <a:pathLst>
-              <a:path w="120000" h="120000" extrusionOk="0">
-                <a:moveTo>
-                  <a:pt x="0" y="0"/>
-                </a:moveTo>
-                <a:lnTo>
-                  <a:pt x="120000" y="0"/>
-                </a:lnTo>
-                <a:lnTo>
-                  <a:pt x="120000" y="120000"/>
-                </a:lnTo>
-                <a:lnTo>
-                  <a:pt x="0" y="120000"/>
-                </a:lnTo>
-                <a:close/>
-              </a:path>
-            </a:pathLst>
-          </a:custGeom>
-        </p:spPr>
-      </p:sp>
-      <p:sp>
-        <p:nvSpPr>
-          <p:cNvPr id="183" name="Google Shape;183;g3f76eb00e2a_0_94:notes"/>
-          <p:cNvSpPr txBox="1">
-            <a:spLocks noGrp="1"/>
-          </p:cNvSpPr>
-          <p:nvPr>
-            <p:ph type="body" idx="1"/>
-          </p:nvPr>
-        </p:nvSpPr>
-        <p:spPr>
-          <a:xfrm>
-            <a:off x="685800" y="4343400"/>
-            <a:ext cx="5486400" cy="4114800"/>
-          </a:xfrm>
-          <a:prstGeom prst="rect">
-            <a:avLst/>
-          </a:prstGeom>
-        </p:spPr>
-        <p:txBody>
-          <a:bodyPr spcFirstLastPara="1" wrap="square" lIns="91425" tIns="91425" rIns="91425" bIns="91425" anchor="t" anchorCtr="0">
-            <a:noAutofit/>
-          </a:bodyPr>
-          <a:lstStyle/>
-          <a:p>
-            <a:pPr marL="0" lvl="0" indent="0" algn="l" rtl="0">
-              <a:spcBef>
-                <a:spcPts val="0"/>
-              </a:spcBef>
-              <a:spcAft>
-                <a:spcPts val="0"/>
-              </a:spcAft>
-              <a:buNone/>
-            </a:pPr>
-            <a:endParaRPr/>
-          </a:p>
-        </p:txBody>
-      </p:sp>
-    </p:spTree>
-  </p:cSld>
-  <p:clrMapOvr>
-    <a:masterClrMapping/>
-  </p:clrMapOvr>
-</p:notes>
-</file>
-
-<file path=ppt/notesSlides/notesSlide21.xml><?xml version="1.0" encoding="utf-8"?>
-<p:notes xmlns:a="http://schemas.openxmlformats.org/drawingml/2006/main" xmlns:r="http://schemas.openxmlformats.org/officeDocument/2006/relationships" xmlns:p="http://schemas.openxmlformats.org/presentationml/2006/main" showMasterSp="0" showMasterPhAnim="0">
-  <p:cSld>
-    <p:spTree>
-      <p:nvGrpSpPr>
-        <p:cNvPr id="1" name="Shape 187"/>
-        <p:cNvGrpSpPr/>
-        <p:nvPr/>
-      </p:nvGrpSpPr>
-      <p:grpSpPr>
-        <a:xfrm>
-          <a:off x="0" y="0"/>
-          <a:ext cx="0" cy="0"/>
-          <a:chOff x="0" y="0"/>
-          <a:chExt cx="0" cy="0"/>
-        </a:xfrm>
-      </p:grpSpPr>
-      <p:sp>
-        <p:nvSpPr>
-          <p:cNvPr id="188" name="Google Shape;188;g3f76eb00e2a_0_100:notes"/>
-          <p:cNvSpPr>
-            <a:spLocks noGrp="1" noRot="1" noChangeAspect="1"/>
-          </p:cNvSpPr>
-          <p:nvPr>
-            <p:ph type="sldImg" idx="2"/>
-          </p:nvPr>
-        </p:nvSpPr>
-        <p:spPr>
-          <a:xfrm>
-            <a:off x="381300" y="685800"/>
-            <a:ext cx="6096000" cy="3429000"/>
-          </a:xfrm>
-          <a:custGeom>
-            <a:avLst/>
-            <a:gdLst/>
-            <a:ahLst/>
-            <a:cxnLst/>
-            <a:rect l="l" t="t" r="r" b="b"/>
-            <a:pathLst>
-              <a:path w="120000" h="120000" extrusionOk="0">
-                <a:moveTo>
-                  <a:pt x="0" y="0"/>
-                </a:moveTo>
-                <a:lnTo>
-                  <a:pt x="120000" y="0"/>
-                </a:lnTo>
-                <a:lnTo>
-                  <a:pt x="120000" y="120000"/>
-                </a:lnTo>
-                <a:lnTo>
-                  <a:pt x="0" y="120000"/>
-                </a:lnTo>
-                <a:close/>
-              </a:path>
-            </a:pathLst>
-          </a:custGeom>
-        </p:spPr>
-      </p:sp>
-      <p:sp>
-        <p:nvSpPr>
-          <p:cNvPr id="189" name="Google Shape;189;g3f76eb00e2a_0_100:notes"/>
-          <p:cNvSpPr txBox="1">
-            <a:spLocks noGrp="1"/>
-          </p:cNvSpPr>
-          <p:nvPr>
-            <p:ph type="body" idx="1"/>
-          </p:nvPr>
-        </p:nvSpPr>
-        <p:spPr>
-          <a:xfrm>
-            <a:off x="685800" y="4343400"/>
-            <a:ext cx="5486400" cy="4114800"/>
-          </a:xfrm>
-          <a:prstGeom prst="rect">
-            <a:avLst/>
-          </a:prstGeom>
-        </p:spPr>
-        <p:txBody>
-          <a:bodyPr spcFirstLastPara="1" wrap="square" lIns="91425" tIns="91425" rIns="91425" bIns="91425" anchor="t" anchorCtr="0">
-            <a:noAutofit/>
-          </a:bodyPr>
-          <a:lstStyle/>
-          <a:p>
-            <a:pPr marL="0" lvl="0" indent="0" algn="l" rtl="0">
-              <a:spcBef>
-                <a:spcPts val="0"/>
-              </a:spcBef>
-              <a:spcAft>
-                <a:spcPts val="0"/>
-              </a:spcAft>
-              <a:buNone/>
-            </a:pPr>
-            <a:endParaRPr/>
-          </a:p>
-        </p:txBody>
-      </p:sp>
-    </p:spTree>
-  </p:cSld>
-  <p:clrMapOvr>
-    <a:masterClrMapping/>
-  </p:clrMapOvr>
-</p:notes>
-</file>
-
-<file path=ppt/notesSlides/notesSlide3.xml><?xml version="1.0" encoding="utf-8"?>
-<p:notes xmlns:a="http://schemas.openxmlformats.org/drawingml/2006/main" xmlns:r="http://schemas.openxmlformats.org/officeDocument/2006/relationships" xmlns:p="http://schemas.openxmlformats.org/presentationml/2006/main" showMasterSp="0" showMasterPhAnim="0">
-  <p:cSld>
-    <p:spTree>
-      <p:nvGrpSpPr>
-        <p:cNvPr id="1" name="Shape 63"/>
-        <p:cNvGrpSpPr/>
-        <p:nvPr/>
-      </p:nvGrpSpPr>
-      <p:grpSpPr>
-        <a:xfrm>
-          <a:off x="0" y="0"/>
-          <a:ext cx="0" cy="0"/>
-          <a:chOff x="0" y="0"/>
-          <a:chExt cx="0" cy="0"/>
-        </a:xfrm>
-      </p:grpSpPr>
-      <p:sp>
-        <p:nvSpPr>
-          <p:cNvPr id="64" name="Google Shape;64;g3f76eb00e2a_0_53:notes"/>
+          <p:cNvPr id="57" name="Google Shape;57;g3f76eb00e2a_0_0:notes">
+            <a:extLst>
+              <a:ext uri="{FF2B5EF4-FFF2-40B4-BE49-F238E27FC236}">
+                <a16:creationId xmlns:a16="http://schemas.microsoft.com/office/drawing/2014/main" id="{061A8026-5BDE-09FB-E9F0-DF0B2245328B}"/>
+              </a:ext>
+            </a:extLst>
+          </p:cNvPr>
           <p:cNvSpPr>
             <a:spLocks noGrp="1" noRot="1" noChangeAspect="1"/>
           </p:cNvSpPr>
@@ -2237,7 +1221,13 @@
       </p:sp>
       <p:sp>
         <p:nvSpPr>
-          <p:cNvPr id="65" name="Google Shape;65;g3f76eb00e2a_0_53:notes"/>
+          <p:cNvPr id="58" name="Google Shape;58;g3f76eb00e2a_0_0:notes">
+            <a:extLst>
+              <a:ext uri="{FF2B5EF4-FFF2-40B4-BE49-F238E27FC236}">
+                <a16:creationId xmlns:a16="http://schemas.microsoft.com/office/drawing/2014/main" id="{45C3425F-19F2-394D-16F9-C1F960BF0E8C}"/>
+              </a:ext>
+            </a:extLst>
+          </p:cNvPr>
           <p:cNvSpPr txBox="1">
             <a:spLocks noGrp="1"/>
           </p:cNvSpPr>
@@ -2274,6 +1264,11 @@
         </p:txBody>
       </p:sp>
     </p:spTree>
+    <p:extLst>
+      <p:ext uri="{BB962C8B-B14F-4D97-AF65-F5344CB8AC3E}">
+        <p14:creationId xmlns:p14="http://schemas.microsoft.com/office/powerpoint/2010/main" val="160843083"/>
+      </p:ext>
+    </p:extLst>
   </p:cSld>
   <p:clrMapOvr>
     <a:masterClrMapping/>
@@ -2281,12 +1276,18 @@
 </p:notes>
 </file>
 
-<file path=ppt/notesSlides/notesSlide4.xml><?xml version="1.0" encoding="utf-8"?>
+<file path=ppt/notesSlides/notesSlide5.xml><?xml version="1.0" encoding="utf-8"?>
 <p:notes xmlns:a="http://schemas.openxmlformats.org/drawingml/2006/main" xmlns:r="http://schemas.openxmlformats.org/officeDocument/2006/relationships" xmlns:p="http://schemas.openxmlformats.org/presentationml/2006/main" showMasterSp="0" showMasterPhAnim="0">
   <p:cSld>
     <p:spTree>
       <p:nvGrpSpPr>
-        <p:cNvPr id="1" name="Shape 70"/>
+        <p:cNvPr id="1" name="Shape 50">
+          <a:extLst>
+            <a:ext uri="{FF2B5EF4-FFF2-40B4-BE49-F238E27FC236}">
+              <a16:creationId xmlns:a16="http://schemas.microsoft.com/office/drawing/2014/main" id="{233F8907-696A-B017-B078-727571C8388B}"/>
+            </a:ext>
+          </a:extLst>
+        </p:cNvPr>
         <p:cNvGrpSpPr/>
         <p:nvPr/>
       </p:nvGrpSpPr>
@@ -2300,7 +1301,13 @@
       </p:grpSpPr>
       <p:sp>
         <p:nvSpPr>
-          <p:cNvPr id="71" name="Google Shape;71;g3f76eb00e2a_0_46:notes"/>
+          <p:cNvPr id="51" name="Google Shape;51;p:notes">
+            <a:extLst>
+              <a:ext uri="{FF2B5EF4-FFF2-40B4-BE49-F238E27FC236}">
+                <a16:creationId xmlns:a16="http://schemas.microsoft.com/office/drawing/2014/main" id="{E1E79872-E9AD-96B8-50DC-D5E357FEB4F0}"/>
+              </a:ext>
+            </a:extLst>
+          </p:cNvPr>
           <p:cNvSpPr>
             <a:spLocks noGrp="1" noRot="1" noChangeAspect="1"/>
           </p:cNvSpPr>
@@ -2341,7 +1348,13 @@
       </p:sp>
       <p:sp>
         <p:nvSpPr>
-          <p:cNvPr id="72" name="Google Shape;72;g3f76eb00e2a_0_46:notes"/>
+          <p:cNvPr id="52" name="Google Shape;52;p:notes">
+            <a:extLst>
+              <a:ext uri="{FF2B5EF4-FFF2-40B4-BE49-F238E27FC236}">
+                <a16:creationId xmlns:a16="http://schemas.microsoft.com/office/drawing/2014/main" id="{C1EC8091-345B-5445-4130-1A2087F97CD2}"/>
+              </a:ext>
+            </a:extLst>
+          </p:cNvPr>
           <p:cNvSpPr txBox="1">
             <a:spLocks noGrp="1"/>
           </p:cNvSpPr>
@@ -2378,6 +1391,11 @@
         </p:txBody>
       </p:sp>
     </p:spTree>
+    <p:extLst>
+      <p:ext uri="{BB962C8B-B14F-4D97-AF65-F5344CB8AC3E}">
+        <p14:creationId xmlns:p14="http://schemas.microsoft.com/office/powerpoint/2010/main" val="1024028868"/>
+      </p:ext>
+    </p:extLst>
   </p:cSld>
   <p:clrMapOvr>
     <a:masterClrMapping/>
@@ -2385,12 +1403,18 @@
 </p:notes>
 </file>
 
-<file path=ppt/notesSlides/notesSlide5.xml><?xml version="1.0" encoding="utf-8"?>
+<file path=ppt/notesSlides/notesSlide6.xml><?xml version="1.0" encoding="utf-8"?>
 <p:notes xmlns:a="http://schemas.openxmlformats.org/drawingml/2006/main" xmlns:r="http://schemas.openxmlformats.org/officeDocument/2006/relationships" xmlns:p="http://schemas.openxmlformats.org/presentationml/2006/main" showMasterSp="0" showMasterPhAnim="0">
   <p:cSld>
     <p:spTree>
       <p:nvGrpSpPr>
-        <p:cNvPr id="1" name="Shape 77"/>
+        <p:cNvPr id="1" name="Shape 56">
+          <a:extLst>
+            <a:ext uri="{FF2B5EF4-FFF2-40B4-BE49-F238E27FC236}">
+              <a16:creationId xmlns:a16="http://schemas.microsoft.com/office/drawing/2014/main" id="{72944A4C-C625-6748-94B2-EFA32EAC534C}"/>
+            </a:ext>
+          </a:extLst>
+        </p:cNvPr>
         <p:cNvGrpSpPr/>
         <p:nvPr/>
       </p:nvGrpSpPr>
@@ -2404,7 +1428,13 @@
       </p:grpSpPr>
       <p:sp>
         <p:nvSpPr>
-          <p:cNvPr id="78" name="Google Shape;78;g3f76eb00e2a_0_31:notes"/>
+          <p:cNvPr id="57" name="Google Shape;57;g3f76eb00e2a_0_0:notes">
+            <a:extLst>
+              <a:ext uri="{FF2B5EF4-FFF2-40B4-BE49-F238E27FC236}">
+                <a16:creationId xmlns:a16="http://schemas.microsoft.com/office/drawing/2014/main" id="{FE9414C3-C661-B84D-BA1E-A6F7EB19149E}"/>
+              </a:ext>
+            </a:extLst>
+          </p:cNvPr>
           <p:cNvSpPr>
             <a:spLocks noGrp="1" noRot="1" noChangeAspect="1"/>
           </p:cNvSpPr>
@@ -2445,7 +1475,13 @@
       </p:sp>
       <p:sp>
         <p:nvSpPr>
-          <p:cNvPr id="79" name="Google Shape;79;g3f76eb00e2a_0_31:notes"/>
+          <p:cNvPr id="58" name="Google Shape;58;g3f76eb00e2a_0_0:notes">
+            <a:extLst>
+              <a:ext uri="{FF2B5EF4-FFF2-40B4-BE49-F238E27FC236}">
+                <a16:creationId xmlns:a16="http://schemas.microsoft.com/office/drawing/2014/main" id="{7914DC03-4095-BCC2-C40F-6C106C114D90}"/>
+              </a:ext>
+            </a:extLst>
+          </p:cNvPr>
           <p:cNvSpPr txBox="1">
             <a:spLocks noGrp="1"/>
           </p:cNvSpPr>
@@ -2482,6 +1518,11 @@
         </p:txBody>
       </p:sp>
     </p:spTree>
+    <p:extLst>
+      <p:ext uri="{BB962C8B-B14F-4D97-AF65-F5344CB8AC3E}">
+        <p14:creationId xmlns:p14="http://schemas.microsoft.com/office/powerpoint/2010/main" val="341271058"/>
+      </p:ext>
+    </p:extLst>
   </p:cSld>
   <p:clrMapOvr>
     <a:masterClrMapping/>
@@ -2489,12 +1530,18 @@
 </p:notes>
 </file>
 
-<file path=ppt/notesSlides/notesSlide6.xml><?xml version="1.0" encoding="utf-8"?>
+<file path=ppt/notesSlides/notesSlide7.xml><?xml version="1.0" encoding="utf-8"?>
 <p:notes xmlns:a="http://schemas.openxmlformats.org/drawingml/2006/main" xmlns:r="http://schemas.openxmlformats.org/officeDocument/2006/relationships" xmlns:p="http://schemas.openxmlformats.org/presentationml/2006/main" showMasterSp="0" showMasterPhAnim="0">
   <p:cSld>
     <p:spTree>
       <p:nvGrpSpPr>
-        <p:cNvPr id="1" name="Shape 84"/>
+        <p:cNvPr id="1" name="Shape 56">
+          <a:extLst>
+            <a:ext uri="{FF2B5EF4-FFF2-40B4-BE49-F238E27FC236}">
+              <a16:creationId xmlns:a16="http://schemas.microsoft.com/office/drawing/2014/main" id="{154A3496-5B8C-FB09-CDE4-29EDA7464444}"/>
+            </a:ext>
+          </a:extLst>
+        </p:cNvPr>
         <p:cNvGrpSpPr/>
         <p:nvPr/>
       </p:nvGrpSpPr>
@@ -2508,7 +1555,13 @@
       </p:grpSpPr>
       <p:sp>
         <p:nvSpPr>
-          <p:cNvPr id="85" name="Google Shape;85;g3f76eb00e2a_0_39:notes"/>
+          <p:cNvPr id="57" name="Google Shape;57;g3f76eb00e2a_0_0:notes">
+            <a:extLst>
+              <a:ext uri="{FF2B5EF4-FFF2-40B4-BE49-F238E27FC236}">
+                <a16:creationId xmlns:a16="http://schemas.microsoft.com/office/drawing/2014/main" id="{0FFB6AE4-A4C2-DC60-65B8-1BC98092FDE3}"/>
+              </a:ext>
+            </a:extLst>
+          </p:cNvPr>
           <p:cNvSpPr>
             <a:spLocks noGrp="1" noRot="1" noChangeAspect="1"/>
           </p:cNvSpPr>
@@ -2549,7 +1602,13 @@
       </p:sp>
       <p:sp>
         <p:nvSpPr>
-          <p:cNvPr id="86" name="Google Shape;86;g3f76eb00e2a_0_39:notes"/>
+          <p:cNvPr id="58" name="Google Shape;58;g3f76eb00e2a_0_0:notes">
+            <a:extLst>
+              <a:ext uri="{FF2B5EF4-FFF2-40B4-BE49-F238E27FC236}">
+                <a16:creationId xmlns:a16="http://schemas.microsoft.com/office/drawing/2014/main" id="{EE0D1C10-8A67-AB39-3C85-35A2CA98CFE1}"/>
+              </a:ext>
+            </a:extLst>
+          </p:cNvPr>
           <p:cNvSpPr txBox="1">
             <a:spLocks noGrp="1"/>
           </p:cNvSpPr>
@@ -2586,6 +1645,11 @@
         </p:txBody>
       </p:sp>
     </p:spTree>
+    <p:extLst>
+      <p:ext uri="{BB962C8B-B14F-4D97-AF65-F5344CB8AC3E}">
+        <p14:creationId xmlns:p14="http://schemas.microsoft.com/office/powerpoint/2010/main" val="576551821"/>
+      </p:ext>
+    </p:extLst>
   </p:cSld>
   <p:clrMapOvr>
     <a:masterClrMapping/>
@@ -2593,12 +1657,18 @@
 </p:notes>
 </file>
 
-<file path=ppt/notesSlides/notesSlide7.xml><?xml version="1.0" encoding="utf-8"?>
+<file path=ppt/notesSlides/notesSlide8.xml><?xml version="1.0" encoding="utf-8"?>
 <p:notes xmlns:a="http://schemas.openxmlformats.org/drawingml/2006/main" xmlns:r="http://schemas.openxmlformats.org/officeDocument/2006/relationships" xmlns:p="http://schemas.openxmlformats.org/presentationml/2006/main" showMasterSp="0" showMasterPhAnim="0">
   <p:cSld>
     <p:spTree>
       <p:nvGrpSpPr>
-        <p:cNvPr id="1" name="Shape 91"/>
+        <p:cNvPr id="1" name="Shape 56">
+          <a:extLst>
+            <a:ext uri="{FF2B5EF4-FFF2-40B4-BE49-F238E27FC236}">
+              <a16:creationId xmlns:a16="http://schemas.microsoft.com/office/drawing/2014/main" id="{2439F5EF-9434-D8C5-2A3B-2C25E6C8B724}"/>
+            </a:ext>
+          </a:extLst>
+        </p:cNvPr>
         <p:cNvGrpSpPr/>
         <p:nvPr/>
       </p:nvGrpSpPr>
@@ -2612,7 +1682,13 @@
       </p:grpSpPr>
       <p:sp>
         <p:nvSpPr>
-          <p:cNvPr id="92" name="Google Shape;92;g3f76eb00e2a_0_81:notes"/>
+          <p:cNvPr id="57" name="Google Shape;57;g3f76eb00e2a_0_0:notes">
+            <a:extLst>
+              <a:ext uri="{FF2B5EF4-FFF2-40B4-BE49-F238E27FC236}">
+                <a16:creationId xmlns:a16="http://schemas.microsoft.com/office/drawing/2014/main" id="{7B5F7BE9-E0F6-4ADC-834B-E49A79D2590A}"/>
+              </a:ext>
+            </a:extLst>
+          </p:cNvPr>
           <p:cNvSpPr>
             <a:spLocks noGrp="1" noRot="1" noChangeAspect="1"/>
           </p:cNvSpPr>
@@ -2653,7 +1729,13 @@
       </p:sp>
       <p:sp>
         <p:nvSpPr>
-          <p:cNvPr id="93" name="Google Shape;93;g3f76eb00e2a_0_81:notes"/>
+          <p:cNvPr id="58" name="Google Shape;58;g3f76eb00e2a_0_0:notes">
+            <a:extLst>
+              <a:ext uri="{FF2B5EF4-FFF2-40B4-BE49-F238E27FC236}">
+                <a16:creationId xmlns:a16="http://schemas.microsoft.com/office/drawing/2014/main" id="{3B9E57AD-BE33-C309-330D-6EDFE739B77D}"/>
+              </a:ext>
+            </a:extLst>
+          </p:cNvPr>
           <p:cNvSpPr txBox="1">
             <a:spLocks noGrp="1"/>
           </p:cNvSpPr>
@@ -2690,6 +1772,11 @@
         </p:txBody>
       </p:sp>
     </p:spTree>
+    <p:extLst>
+      <p:ext uri="{BB962C8B-B14F-4D97-AF65-F5344CB8AC3E}">
+        <p14:creationId xmlns:p14="http://schemas.microsoft.com/office/powerpoint/2010/main" val="3096274233"/>
+      </p:ext>
+    </p:extLst>
   </p:cSld>
   <p:clrMapOvr>
     <a:masterClrMapping/>
@@ -2697,12 +1784,18 @@
 </p:notes>
 </file>
 
-<file path=ppt/notesSlides/notesSlide8.xml><?xml version="1.0" encoding="utf-8"?>
+<file path=ppt/notesSlides/notesSlide9.xml><?xml version="1.0" encoding="utf-8"?>
 <p:notes xmlns:a="http://schemas.openxmlformats.org/drawingml/2006/main" xmlns:r="http://schemas.openxmlformats.org/officeDocument/2006/relationships" xmlns:p="http://schemas.openxmlformats.org/presentationml/2006/main" showMasterSp="0" showMasterPhAnim="0">
   <p:cSld>
     <p:spTree>
       <p:nvGrpSpPr>
-        <p:cNvPr id="1" name="Shape 97"/>
+        <p:cNvPr id="1" name="Shape 50">
+          <a:extLst>
+            <a:ext uri="{FF2B5EF4-FFF2-40B4-BE49-F238E27FC236}">
+              <a16:creationId xmlns:a16="http://schemas.microsoft.com/office/drawing/2014/main" id="{0FD5EF7D-668E-00D1-060A-D2E1811195F2}"/>
+            </a:ext>
+          </a:extLst>
+        </p:cNvPr>
         <p:cNvGrpSpPr/>
         <p:nvPr/>
       </p:nvGrpSpPr>
@@ -2716,7 +1809,13 @@
       </p:grpSpPr>
       <p:sp>
         <p:nvSpPr>
-          <p:cNvPr id="98" name="Google Shape;98;g3f76eb00e2a_0_60:notes"/>
+          <p:cNvPr id="51" name="Google Shape;51;p:notes">
+            <a:extLst>
+              <a:ext uri="{FF2B5EF4-FFF2-40B4-BE49-F238E27FC236}">
+                <a16:creationId xmlns:a16="http://schemas.microsoft.com/office/drawing/2014/main" id="{009DCA95-76EE-DE3F-CC98-65B9A72DD928}"/>
+              </a:ext>
+            </a:extLst>
+          </p:cNvPr>
           <p:cNvSpPr>
             <a:spLocks noGrp="1" noRot="1" noChangeAspect="1"/>
           </p:cNvSpPr>
@@ -2757,7 +1856,13 @@
       </p:sp>
       <p:sp>
         <p:nvSpPr>
-          <p:cNvPr id="99" name="Google Shape;99;g3f76eb00e2a_0_60:notes"/>
+          <p:cNvPr id="52" name="Google Shape;52;p:notes">
+            <a:extLst>
+              <a:ext uri="{FF2B5EF4-FFF2-40B4-BE49-F238E27FC236}">
+                <a16:creationId xmlns:a16="http://schemas.microsoft.com/office/drawing/2014/main" id="{D1F61234-7CA9-6258-8237-DA83987890E4}"/>
+              </a:ext>
+            </a:extLst>
+          </p:cNvPr>
           <p:cNvSpPr txBox="1">
             <a:spLocks noGrp="1"/>
           </p:cNvSpPr>
@@ -2794,110 +1899,11 @@
         </p:txBody>
       </p:sp>
     </p:spTree>
-  </p:cSld>
-  <p:clrMapOvr>
-    <a:masterClrMapping/>
-  </p:clrMapOvr>
-</p:notes>
-</file>
-
-<file path=ppt/notesSlides/notesSlide9.xml><?xml version="1.0" encoding="utf-8"?>
-<p:notes xmlns:a="http://schemas.openxmlformats.org/drawingml/2006/main" xmlns:r="http://schemas.openxmlformats.org/officeDocument/2006/relationships" xmlns:p="http://schemas.openxmlformats.org/presentationml/2006/main" showMasterSp="0" showMasterPhAnim="0">
-  <p:cSld>
-    <p:spTree>
-      <p:nvGrpSpPr>
-        <p:cNvPr id="1" name="Shape 104"/>
-        <p:cNvGrpSpPr/>
-        <p:nvPr/>
-      </p:nvGrpSpPr>
-      <p:grpSpPr>
-        <a:xfrm>
-          <a:off x="0" y="0"/>
-          <a:ext cx="0" cy="0"/>
-          <a:chOff x="0" y="0"/>
-          <a:chExt cx="0" cy="0"/>
-        </a:xfrm>
-      </p:grpSpPr>
-      <p:sp>
-        <p:nvSpPr>
-          <p:cNvPr id="105" name="Google Shape;105;g3f76eb00e2a_0_67:notes"/>
-          <p:cNvSpPr>
-            <a:spLocks noGrp="1" noRot="1" noChangeAspect="1"/>
-          </p:cNvSpPr>
-          <p:nvPr>
-            <p:ph type="sldImg" idx="2"/>
-          </p:nvPr>
-        </p:nvSpPr>
-        <p:spPr>
-          <a:xfrm>
-            <a:off x="381000" y="685800"/>
-            <a:ext cx="6096000" cy="3429000"/>
-          </a:xfrm>
-          <a:custGeom>
-            <a:avLst/>
-            <a:gdLst/>
-            <a:ahLst/>
-            <a:cxnLst/>
-            <a:rect l="l" t="t" r="r" b="b"/>
-            <a:pathLst>
-              <a:path w="120000" h="120000" extrusionOk="0">
-                <a:moveTo>
-                  <a:pt x="0" y="0"/>
-                </a:moveTo>
-                <a:lnTo>
-                  <a:pt x="120000" y="0"/>
-                </a:lnTo>
-                <a:lnTo>
-                  <a:pt x="120000" y="120000"/>
-                </a:lnTo>
-                <a:lnTo>
-                  <a:pt x="0" y="120000"/>
-                </a:lnTo>
-                <a:close/>
-              </a:path>
-            </a:pathLst>
-          </a:custGeom>
-        </p:spPr>
-      </p:sp>
-      <p:sp>
-        <p:nvSpPr>
-          <p:cNvPr id="106" name="Google Shape;106;g3f76eb00e2a_0_67:notes"/>
-          <p:cNvSpPr txBox="1">
-            <a:spLocks noGrp="1"/>
-          </p:cNvSpPr>
-          <p:nvPr>
-            <p:ph type="body" idx="1"/>
-          </p:nvPr>
-        </p:nvSpPr>
-        <p:spPr>
-          <a:xfrm>
-            <a:off x="685800" y="4343400"/>
-            <a:ext cx="5486400" cy="4114800"/>
-          </a:xfrm>
-          <a:prstGeom prst="rect">
-            <a:avLst/>
-          </a:prstGeom>
-        </p:spPr>
-        <p:txBody>
-          <a:bodyPr spcFirstLastPara="1" wrap="square" lIns="91425" tIns="91425" rIns="91425" bIns="91425" anchor="t" anchorCtr="0">
-            <a:noAutofit/>
-          </a:bodyPr>
-          <a:lstStyle/>
-          <a:p>
-            <a:pPr marL="0" lvl="0" indent="0" algn="l" rtl="0">
-              <a:spcBef>
-                <a:spcPts val="0"/>
-              </a:spcBef>
-              <a:spcAft>
-                <a:spcPts val="0"/>
-              </a:spcAft>
-              <a:buNone/>
-            </a:pPr>
-            <a:endParaRPr/>
-          </a:p>
-        </p:txBody>
-      </p:sp>
-    </p:spTree>
+    <p:extLst>
+      <p:ext uri="{BB962C8B-B14F-4D97-AF65-F5344CB8AC3E}">
+        <p14:creationId xmlns:p14="http://schemas.microsoft.com/office/powerpoint/2010/main" val="1607290205"/>
+      </p:ext>
+    </p:extLst>
   </p:cSld>
   <p:clrMapOvr>
     <a:masterClrMapping/>
@@ -7706,10 +6712,10 @@
               <a:buNone/>
             </a:pPr>
             <a:r>
-              <a:rPr lang="en" sz="4800" dirty="0"/>
+              <a:rPr lang="en" sz="4400" dirty="0"/>
               <a:t>Message Passing Interface</a:t>
             </a:r>
-            <a:endParaRPr sz="4800" dirty="0"/>
+            <a:endParaRPr sz="4400" dirty="0"/>
           </a:p>
         </p:txBody>
       </p:sp>
@@ -7768,7 +6774,7 @@
   <p:cSld>
     <p:spTree>
       <p:nvGrpSpPr>
-        <p:cNvPr id="1" name="Shape 114"/>
+        <p:cNvPr id="1" name="Shape 190"/>
         <p:cNvGrpSpPr/>
         <p:nvPr/>
       </p:nvGrpSpPr>
@@ -7782,30 +6788,30 @@
       </p:grpSpPr>
       <p:sp>
         <p:nvSpPr>
-          <p:cNvPr id="115" name="Google Shape;115;p22"/>
+          <p:cNvPr id="191" name="Google Shape;191;p33"/>
           <p:cNvSpPr txBox="1">
             <a:spLocks noGrp="1"/>
           </p:cNvSpPr>
           <p:nvPr>
-            <p:ph type="title"/>
+            <p:ph type="ctrTitle"/>
           </p:nvPr>
         </p:nvSpPr>
         <p:spPr>
           <a:xfrm>
-            <a:off x="311700" y="0"/>
-            <a:ext cx="8520600" cy="572700"/>
+            <a:off x="311708" y="744575"/>
+            <a:ext cx="8520600" cy="2052600"/>
           </a:xfrm>
           <a:prstGeom prst="rect">
             <a:avLst/>
           </a:prstGeom>
         </p:spPr>
         <p:txBody>
-          <a:bodyPr spcFirstLastPara="1" wrap="square" lIns="91425" tIns="91425" rIns="91425" bIns="91425" anchor="t" anchorCtr="0">
-            <a:normAutofit fontScale="90000"/>
+          <a:bodyPr spcFirstLastPara="1" wrap="square" lIns="91425" tIns="91425" rIns="91425" bIns="91425" anchor="b" anchorCtr="0">
+            <a:normAutofit/>
           </a:bodyPr>
           <a:lstStyle/>
           <a:p>
-            <a:pPr marL="0" lvl="0" indent="0" algn="l" rtl="0">
+            <a:pPr marL="0" lvl="0" indent="0" algn="ctr" rtl="0">
               <a:spcBef>
                 <a:spcPts val="0"/>
               </a:spcBef>
@@ -7816,7 +6822,7 @@
             </a:pPr>
             <a:r>
               <a:rPr lang="en"/>
-              <a:t>Task 2 POSIX Threads (main)</a:t>
+              <a:t>Q&amp;A</a:t>
             </a:r>
             <a:endParaRPr/>
           </a:p>
@@ -7824,18 +6830,18 @@
       </p:sp>
       <p:sp>
         <p:nvSpPr>
-          <p:cNvPr id="116" name="Google Shape;116;p22"/>
+          <p:cNvPr id="192" name="Google Shape;192;p33"/>
           <p:cNvSpPr txBox="1">
             <a:spLocks noGrp="1"/>
           </p:cNvSpPr>
           <p:nvPr>
-            <p:ph type="body" idx="1"/>
+            <p:ph type="subTitle" idx="1"/>
           </p:nvPr>
         </p:nvSpPr>
         <p:spPr>
           <a:xfrm>
-            <a:off x="5474425" y="835875"/>
-            <a:ext cx="3070500" cy="3745500"/>
+            <a:off x="311700" y="2834125"/>
+            <a:ext cx="8520600" cy="792600"/>
           </a:xfrm>
           <a:prstGeom prst="rect">
             <a:avLst/>
@@ -7847,51 +6853,23 @@
           </a:bodyPr>
           <a:lstStyle/>
           <a:p>
-            <a:pPr marL="0" lvl="0" indent="0" algn="l" rtl="0">
-              <a:spcBef>
-                <a:spcPts val="0"/>
-              </a:spcBef>
-              <a:spcAft>
-                <a:spcPts val="1200"/>
+            <a:pPr marL="0" lvl="0" indent="0" algn="ctr" rtl="0">
+              <a:spcBef>
+                <a:spcPts val="0"/>
+              </a:spcBef>
+              <a:spcAft>
+                <a:spcPts val="0"/>
               </a:spcAft>
               <a:buNone/>
             </a:pPr>
             <a:r>
               <a:rPr lang="en"/>
-              <a:t>Basic loops to fork the process into multiple threads and joining back the results.</a:t>
+              <a:t>Thank you for your attention</a:t>
             </a:r>
             <a:endParaRPr/>
           </a:p>
         </p:txBody>
       </p:sp>
-      <p:pic>
-        <p:nvPicPr>
-          <p:cNvPr id="117" name="Google Shape;117;p22"/>
-          <p:cNvPicPr preferRelativeResize="0"/>
-          <p:nvPr/>
-        </p:nvPicPr>
-        <p:blipFill>
-          <a:blip r:embed="rId3">
-            <a:alphaModFix/>
-          </a:blip>
-          <a:stretch>
-            <a:fillRect/>
-          </a:stretch>
-        </p:blipFill>
-        <p:spPr>
-          <a:xfrm>
-            <a:off x="311700" y="879101"/>
-            <a:ext cx="4717726" cy="2508150"/>
-          </a:xfrm>
-          <a:prstGeom prst="rect">
-            <a:avLst/>
-          </a:prstGeom>
-          <a:noFill/>
-          <a:ln>
-            <a:noFill/>
-          </a:ln>
-        </p:spPr>
-      </p:pic>
     </p:spTree>
   </p:cSld>
   <p:clrMapOvr>
@@ -7900,12 +6878,18 @@
 </p:sld>
 </file>
 
-<file path=ppt/slides/slide11.xml><?xml version="1.0" encoding="utf-8"?>
+<file path=ppt/slides/slide2.xml><?xml version="1.0" encoding="utf-8"?>
 <p:sld xmlns:a="http://schemas.openxmlformats.org/drawingml/2006/main" xmlns:r="http://schemas.openxmlformats.org/officeDocument/2006/relationships" xmlns:p="http://schemas.openxmlformats.org/presentationml/2006/main">
   <p:cSld>
     <p:spTree>
       <p:nvGrpSpPr>
-        <p:cNvPr id="1" name="Shape 121"/>
+        <p:cNvPr id="1" name="Shape 53">
+          <a:extLst>
+            <a:ext uri="{FF2B5EF4-FFF2-40B4-BE49-F238E27FC236}">
+              <a16:creationId xmlns:a16="http://schemas.microsoft.com/office/drawing/2014/main" id="{5E5476AE-847A-CD5A-3861-EB6571B53B55}"/>
+            </a:ext>
+          </a:extLst>
+        </p:cNvPr>
         <p:cNvGrpSpPr/>
         <p:nvPr/>
       </p:nvGrpSpPr>
@@ -7919,60 +6903,64 @@
       </p:grpSpPr>
       <p:sp>
         <p:nvSpPr>
-          <p:cNvPr id="122" name="Google Shape;122;p23"/>
+          <p:cNvPr id="54" name="Google Shape;54;p13">
+            <a:extLst>
+              <a:ext uri="{FF2B5EF4-FFF2-40B4-BE49-F238E27FC236}">
+                <a16:creationId xmlns:a16="http://schemas.microsoft.com/office/drawing/2014/main" id="{5BCCD65F-C043-C25F-A812-5B943552EA2F}"/>
+              </a:ext>
+            </a:extLst>
+          </p:cNvPr>
           <p:cNvSpPr txBox="1">
             <a:spLocks noGrp="1"/>
           </p:cNvSpPr>
           <p:nvPr>
-            <p:ph type="title"/>
+            <p:ph type="ctrTitle"/>
           </p:nvPr>
         </p:nvSpPr>
         <p:spPr>
           <a:xfrm>
-            <a:off x="311700" y="0"/>
-            <a:ext cx="8520600" cy="572700"/>
+            <a:off x="311708" y="744575"/>
+            <a:ext cx="8520600" cy="2052600"/>
           </a:xfrm>
           <a:prstGeom prst="rect">
             <a:avLst/>
           </a:prstGeom>
         </p:spPr>
         <p:txBody>
-          <a:bodyPr spcFirstLastPara="1" wrap="square" lIns="91425" tIns="91425" rIns="91425" bIns="91425" anchor="t" anchorCtr="0">
-            <a:normAutofit fontScale="90000"/>
+          <a:bodyPr spcFirstLastPara="1" wrap="square" lIns="91425" tIns="91425" rIns="91425" bIns="91425" anchor="b" anchorCtr="0">
+            <a:normAutofit/>
           </a:bodyPr>
           <a:lstStyle/>
           <a:p>
-            <a:pPr marL="0" lvl="0" indent="0" algn="l" rtl="0">
-              <a:spcBef>
-                <a:spcPts val="0"/>
-              </a:spcBef>
-              <a:spcAft>
-                <a:spcPts val="0"/>
-              </a:spcAft>
-              <a:buNone/>
-            </a:pPr>
+            <a:pPr lvl="0"/>
             <a:r>
-              <a:rPr lang="en"/>
-              <a:t>Task 2 POSIX Threads (graph 1)</a:t>
+              <a:rPr lang="en" sz="4400" dirty="0"/>
+              <a:t>Task 1 Open MPI Code</a:t>
             </a:r>
-            <a:endParaRPr/>
+            <a:endParaRPr sz="4400" dirty="0"/>
           </a:p>
         </p:txBody>
       </p:sp>
       <p:sp>
         <p:nvSpPr>
-          <p:cNvPr id="123" name="Google Shape;123;p23"/>
+          <p:cNvPr id="55" name="Google Shape;55;p13">
+            <a:extLst>
+              <a:ext uri="{FF2B5EF4-FFF2-40B4-BE49-F238E27FC236}">
+                <a16:creationId xmlns:a16="http://schemas.microsoft.com/office/drawing/2014/main" id="{5ABEF92F-7BE5-1DA9-9C47-D31F389BB7ED}"/>
+              </a:ext>
+            </a:extLst>
+          </p:cNvPr>
           <p:cNvSpPr txBox="1">
             <a:spLocks noGrp="1"/>
           </p:cNvSpPr>
           <p:nvPr>
-            <p:ph type="body" idx="1"/>
+            <p:ph type="subTitle" idx="1"/>
           </p:nvPr>
         </p:nvSpPr>
         <p:spPr>
           <a:xfrm>
-            <a:off x="5599775" y="1182175"/>
-            <a:ext cx="3360000" cy="3399300"/>
+            <a:off x="311700" y="2834125"/>
+            <a:ext cx="8520600" cy="792600"/>
           </a:xfrm>
           <a:prstGeom prst="rect">
             <a:avLst/>
@@ -7984,7 +6972,7 @@
           </a:bodyPr>
           <a:lstStyle/>
           <a:p>
-            <a:pPr marL="0" lvl="0" indent="0" algn="l" rtl="0">
+            <a:pPr marL="0" lvl="0" indent="0" algn="ctr" rtl="0">
               <a:spcBef>
                 <a:spcPts val="0"/>
               </a:spcBef>
@@ -7994,58 +6982,19 @@
               <a:buNone/>
             </a:pPr>
             <a:r>
-              <a:rPr lang="en"/>
-              <a:t>Task 2 was run with 2 threads for this graph comparison.</a:t>
+              <a:rPr lang="en" dirty="0"/>
+              <a:t>Finding Prime Numbers</a:t>
             </a:r>
-            <a:endParaRPr/>
-          </a:p>
-          <a:p>
-            <a:pPr marL="0" lvl="0" indent="0" algn="l" rtl="0">
-              <a:spcBef>
-                <a:spcPts val="1200"/>
-              </a:spcBef>
-              <a:spcAft>
-                <a:spcPts val="1200"/>
-              </a:spcAft>
-              <a:buNone/>
-            </a:pPr>
-            <a:r>
-              <a:rPr lang="en"/>
-              <a:t>Task 1 is serial (runs on 1 thread).</a:t>
-            </a:r>
-            <a:endParaRPr/>
+            <a:endParaRPr dirty="0"/>
           </a:p>
         </p:txBody>
       </p:sp>
-      <p:pic>
-        <p:nvPicPr>
-          <p:cNvPr id="124" name="Google Shape;124;p23"/>
-          <p:cNvPicPr preferRelativeResize="0"/>
-          <p:nvPr/>
-        </p:nvPicPr>
-        <p:blipFill>
-          <a:blip r:embed="rId3">
-            <a:alphaModFix/>
-          </a:blip>
-          <a:stretch>
-            <a:fillRect/>
-          </a:stretch>
-        </p:blipFill>
-        <p:spPr>
-          <a:xfrm>
-            <a:off x="311700" y="790875"/>
-            <a:ext cx="5104626" cy="3148749"/>
-          </a:xfrm>
-          <a:prstGeom prst="rect">
-            <a:avLst/>
-          </a:prstGeom>
-          <a:noFill/>
-          <a:ln>
-            <a:noFill/>
-          </a:ln>
-        </p:spPr>
-      </p:pic>
     </p:spTree>
+    <p:extLst>
+      <p:ext uri="{BB962C8B-B14F-4D97-AF65-F5344CB8AC3E}">
+        <p14:creationId xmlns:p14="http://schemas.microsoft.com/office/powerpoint/2010/main" val="652663879"/>
+      </p:ext>
+    </p:extLst>
   </p:cSld>
   <p:clrMapOvr>
     <a:masterClrMapping/>
@@ -8053,1236 +7002,7 @@
 </p:sld>
 </file>
 
-<file path=ppt/slides/slide12.xml><?xml version="1.0" encoding="utf-8"?>
-<p:sld xmlns:a="http://schemas.openxmlformats.org/drawingml/2006/main" xmlns:r="http://schemas.openxmlformats.org/officeDocument/2006/relationships" xmlns:p="http://schemas.openxmlformats.org/presentationml/2006/main">
-  <p:cSld>
-    <p:spTree>
-      <p:nvGrpSpPr>
-        <p:cNvPr id="1" name="Shape 128"/>
-        <p:cNvGrpSpPr/>
-        <p:nvPr/>
-      </p:nvGrpSpPr>
-      <p:grpSpPr>
-        <a:xfrm>
-          <a:off x="0" y="0"/>
-          <a:ext cx="0" cy="0"/>
-          <a:chOff x="0" y="0"/>
-          <a:chExt cx="0" cy="0"/>
-        </a:xfrm>
-      </p:grpSpPr>
-      <p:sp>
-        <p:nvSpPr>
-          <p:cNvPr id="129" name="Google Shape;129;p24"/>
-          <p:cNvSpPr txBox="1">
-            <a:spLocks noGrp="1"/>
-          </p:cNvSpPr>
-          <p:nvPr>
-            <p:ph type="title"/>
-          </p:nvPr>
-        </p:nvSpPr>
-        <p:spPr>
-          <a:xfrm>
-            <a:off x="311700" y="0"/>
-            <a:ext cx="8520600" cy="572700"/>
-          </a:xfrm>
-          <a:prstGeom prst="rect">
-            <a:avLst/>
-          </a:prstGeom>
-        </p:spPr>
-        <p:txBody>
-          <a:bodyPr spcFirstLastPara="1" wrap="square" lIns="91425" tIns="91425" rIns="91425" bIns="91425" anchor="t" anchorCtr="0">
-            <a:normAutofit fontScale="90000"/>
-          </a:bodyPr>
-          <a:lstStyle/>
-          <a:p>
-            <a:pPr marL="0" lvl="0" indent="0" algn="l" rtl="0">
-              <a:spcBef>
-                <a:spcPts val="0"/>
-              </a:spcBef>
-              <a:spcAft>
-                <a:spcPts val="0"/>
-              </a:spcAft>
-              <a:buNone/>
-            </a:pPr>
-            <a:r>
-              <a:rPr lang="en"/>
-              <a:t>Task 2 POSIX Threads (graph 2)</a:t>
-            </a:r>
-            <a:endParaRPr/>
-          </a:p>
-        </p:txBody>
-      </p:sp>
-      <p:sp>
-        <p:nvSpPr>
-          <p:cNvPr id="130" name="Google Shape;130;p24"/>
-          <p:cNvSpPr txBox="1">
-            <a:spLocks noGrp="1"/>
-          </p:cNvSpPr>
-          <p:nvPr>
-            <p:ph type="body" idx="1"/>
-          </p:nvPr>
-        </p:nvSpPr>
-        <p:spPr>
-          <a:xfrm>
-            <a:off x="5599775" y="1182175"/>
-            <a:ext cx="3232500" cy="3399300"/>
-          </a:xfrm>
-          <a:prstGeom prst="rect">
-            <a:avLst/>
-          </a:prstGeom>
-        </p:spPr>
-        <p:txBody>
-          <a:bodyPr spcFirstLastPara="1" wrap="square" lIns="91425" tIns="91425" rIns="91425" bIns="91425" anchor="t" anchorCtr="0">
-            <a:normAutofit/>
-          </a:bodyPr>
-          <a:lstStyle/>
-          <a:p>
-            <a:pPr marL="0" lvl="0" indent="0" algn="l" rtl="0">
-              <a:spcBef>
-                <a:spcPts val="0"/>
-              </a:spcBef>
-              <a:spcAft>
-                <a:spcPts val="0"/>
-              </a:spcAft>
-              <a:buNone/>
-            </a:pPr>
-            <a:r>
-              <a:rPr lang="en"/>
-              <a:t>Task 2 was run with 2 threads for this graph comparison.</a:t>
-            </a:r>
-            <a:endParaRPr/>
-          </a:p>
-          <a:p>
-            <a:pPr marL="0" lvl="0" indent="0" algn="l" rtl="0">
-              <a:spcBef>
-                <a:spcPts val="1200"/>
-              </a:spcBef>
-              <a:spcAft>
-                <a:spcPts val="0"/>
-              </a:spcAft>
-              <a:buNone/>
-            </a:pPr>
-            <a:r>
-              <a:rPr lang="en"/>
-              <a:t>The speedup was calculated with the formula of base time at 10,000,000 n divided by the time at the current n.</a:t>
-            </a:r>
-            <a:endParaRPr/>
-          </a:p>
-          <a:p>
-            <a:pPr marL="0" lvl="0" indent="0" algn="l" rtl="0">
-              <a:spcBef>
-                <a:spcPts val="1200"/>
-              </a:spcBef>
-              <a:spcAft>
-                <a:spcPts val="1200"/>
-              </a:spcAft>
-              <a:buNone/>
-            </a:pPr>
-            <a:r>
-              <a:rPr lang="en"/>
-              <a:t>(base time / current time)</a:t>
-            </a:r>
-            <a:endParaRPr/>
-          </a:p>
-        </p:txBody>
-      </p:sp>
-      <p:pic>
-        <p:nvPicPr>
-          <p:cNvPr id="131" name="Google Shape;131;p24"/>
-          <p:cNvPicPr preferRelativeResize="0"/>
-          <p:nvPr/>
-        </p:nvPicPr>
-        <p:blipFill>
-          <a:blip r:embed="rId3">
-            <a:alphaModFix/>
-          </a:blip>
-          <a:stretch>
-            <a:fillRect/>
-          </a:stretch>
-        </p:blipFill>
-        <p:spPr>
-          <a:xfrm>
-            <a:off x="311700" y="991475"/>
-            <a:ext cx="5146701" cy="3160551"/>
-          </a:xfrm>
-          <a:prstGeom prst="rect">
-            <a:avLst/>
-          </a:prstGeom>
-          <a:noFill/>
-          <a:ln>
-            <a:noFill/>
-          </a:ln>
-        </p:spPr>
-      </p:pic>
-    </p:spTree>
-  </p:cSld>
-  <p:clrMapOvr>
-    <a:masterClrMapping/>
-  </p:clrMapOvr>
-</p:sld>
-</file>
-
-<file path=ppt/slides/slide13.xml><?xml version="1.0" encoding="utf-8"?>
-<p:sld xmlns:a="http://schemas.openxmlformats.org/drawingml/2006/main" xmlns:r="http://schemas.openxmlformats.org/officeDocument/2006/relationships" xmlns:p="http://schemas.openxmlformats.org/presentationml/2006/main">
-  <p:cSld>
-    <p:spTree>
-      <p:nvGrpSpPr>
-        <p:cNvPr id="1" name="Shape 135"/>
-        <p:cNvGrpSpPr/>
-        <p:nvPr/>
-      </p:nvGrpSpPr>
-      <p:grpSpPr>
-        <a:xfrm>
-          <a:off x="0" y="0"/>
-          <a:ext cx="0" cy="0"/>
-          <a:chOff x="0" y="0"/>
-          <a:chExt cx="0" cy="0"/>
-        </a:xfrm>
-      </p:grpSpPr>
-      <p:sp>
-        <p:nvSpPr>
-          <p:cNvPr id="136" name="Google Shape;136;p25"/>
-          <p:cNvSpPr txBox="1">
-            <a:spLocks noGrp="1"/>
-          </p:cNvSpPr>
-          <p:nvPr>
-            <p:ph type="title"/>
-          </p:nvPr>
-        </p:nvSpPr>
-        <p:spPr>
-          <a:xfrm>
-            <a:off x="311700" y="0"/>
-            <a:ext cx="8520600" cy="572700"/>
-          </a:xfrm>
-          <a:prstGeom prst="rect">
-            <a:avLst/>
-          </a:prstGeom>
-        </p:spPr>
-        <p:txBody>
-          <a:bodyPr spcFirstLastPara="1" wrap="square" lIns="91425" tIns="91425" rIns="91425" bIns="91425" anchor="t" anchorCtr="0">
-            <a:normAutofit fontScale="90000"/>
-          </a:bodyPr>
-          <a:lstStyle/>
-          <a:p>
-            <a:pPr marL="0" lvl="0" indent="0" algn="l" rtl="0">
-              <a:spcBef>
-                <a:spcPts val="0"/>
-              </a:spcBef>
-              <a:spcAft>
-                <a:spcPts val="0"/>
-              </a:spcAft>
-              <a:buNone/>
-            </a:pPr>
-            <a:r>
-              <a:rPr lang="en"/>
-              <a:t>Task 2 POSIX Threads (graph 3)</a:t>
-            </a:r>
-            <a:endParaRPr/>
-          </a:p>
-        </p:txBody>
-      </p:sp>
-      <p:sp>
-        <p:nvSpPr>
-          <p:cNvPr id="137" name="Google Shape;137;p25"/>
-          <p:cNvSpPr txBox="1">
-            <a:spLocks noGrp="1"/>
-          </p:cNvSpPr>
-          <p:nvPr>
-            <p:ph type="body" idx="1"/>
-          </p:nvPr>
-        </p:nvSpPr>
-        <p:spPr>
-          <a:xfrm>
-            <a:off x="5599775" y="1182175"/>
-            <a:ext cx="3328800" cy="3399300"/>
-          </a:xfrm>
-          <a:prstGeom prst="rect">
-            <a:avLst/>
-          </a:prstGeom>
-        </p:spPr>
-        <p:txBody>
-          <a:bodyPr spcFirstLastPara="1" wrap="square" lIns="91425" tIns="91425" rIns="91425" bIns="91425" anchor="t" anchorCtr="0">
-            <a:normAutofit/>
-          </a:bodyPr>
-          <a:lstStyle/>
-          <a:p>
-            <a:pPr marL="0" lvl="0" indent="0" algn="l" rtl="0">
-              <a:spcBef>
-                <a:spcPts val="0"/>
-              </a:spcBef>
-              <a:spcAft>
-                <a:spcPts val="0"/>
-              </a:spcAft>
-              <a:buClr>
-                <a:schemeClr val="dk1"/>
-              </a:buClr>
-              <a:buSzPts val="1100"/>
-              <a:buFont typeface="Arial"/>
-              <a:buNone/>
-            </a:pPr>
-            <a:r>
-              <a:rPr lang="en"/>
-              <a:t>Task 1 is serial (runs on 1 thread).</a:t>
-            </a:r>
-            <a:endParaRPr/>
-          </a:p>
-          <a:p>
-            <a:pPr marL="0" lvl="0" indent="0" algn="l" rtl="0">
-              <a:spcBef>
-                <a:spcPts val="1200"/>
-              </a:spcBef>
-              <a:spcAft>
-                <a:spcPts val="0"/>
-              </a:spcAft>
-              <a:buNone/>
-            </a:pPr>
-            <a:r>
-              <a:rPr lang="en"/>
-              <a:t>Task 2 was run with increasing threads.</a:t>
-            </a:r>
-            <a:endParaRPr/>
-          </a:p>
-          <a:p>
-            <a:pPr marL="0" lvl="0" indent="0" algn="l" rtl="0">
-              <a:spcBef>
-                <a:spcPts val="1200"/>
-              </a:spcBef>
-              <a:spcAft>
-                <a:spcPts val="1200"/>
-              </a:spcAft>
-              <a:buNone/>
-            </a:pPr>
-            <a:r>
-              <a:rPr lang="en"/>
-              <a:t>n was set at 50,000,000 for this graph comparison.</a:t>
-            </a:r>
-            <a:endParaRPr/>
-          </a:p>
-        </p:txBody>
-      </p:sp>
-      <p:pic>
-        <p:nvPicPr>
-          <p:cNvPr id="138" name="Google Shape;138;p25"/>
-          <p:cNvPicPr preferRelativeResize="0"/>
-          <p:nvPr/>
-        </p:nvPicPr>
-        <p:blipFill>
-          <a:blip r:embed="rId3">
-            <a:alphaModFix/>
-          </a:blip>
-          <a:stretch>
-            <a:fillRect/>
-          </a:stretch>
-        </p:blipFill>
-        <p:spPr>
-          <a:xfrm>
-            <a:off x="311700" y="854351"/>
-            <a:ext cx="4737775" cy="2918625"/>
-          </a:xfrm>
-          <a:prstGeom prst="rect">
-            <a:avLst/>
-          </a:prstGeom>
-          <a:noFill/>
-          <a:ln>
-            <a:noFill/>
-          </a:ln>
-        </p:spPr>
-      </p:pic>
-    </p:spTree>
-  </p:cSld>
-  <p:clrMapOvr>
-    <a:masterClrMapping/>
-  </p:clrMapOvr>
-</p:sld>
-</file>
-
-<file path=ppt/slides/slide14.xml><?xml version="1.0" encoding="utf-8"?>
-<p:sld xmlns:a="http://schemas.openxmlformats.org/drawingml/2006/main" xmlns:r="http://schemas.openxmlformats.org/officeDocument/2006/relationships" xmlns:p="http://schemas.openxmlformats.org/presentationml/2006/main">
-  <p:cSld>
-    <p:spTree>
-      <p:nvGrpSpPr>
-        <p:cNvPr id="1" name="Shape 142"/>
-        <p:cNvGrpSpPr/>
-        <p:nvPr/>
-      </p:nvGrpSpPr>
-      <p:grpSpPr>
-        <a:xfrm>
-          <a:off x="0" y="0"/>
-          <a:ext cx="0" cy="0"/>
-          <a:chOff x="0" y="0"/>
-          <a:chExt cx="0" cy="0"/>
-        </a:xfrm>
-      </p:grpSpPr>
-      <p:sp>
-        <p:nvSpPr>
-          <p:cNvPr id="143" name="Google Shape;143;p26"/>
-          <p:cNvSpPr txBox="1">
-            <a:spLocks noGrp="1"/>
-          </p:cNvSpPr>
-          <p:nvPr>
-            <p:ph type="title"/>
-          </p:nvPr>
-        </p:nvSpPr>
-        <p:spPr>
-          <a:xfrm>
-            <a:off x="311700" y="0"/>
-            <a:ext cx="8520600" cy="572700"/>
-          </a:xfrm>
-          <a:prstGeom prst="rect">
-            <a:avLst/>
-          </a:prstGeom>
-        </p:spPr>
-        <p:txBody>
-          <a:bodyPr spcFirstLastPara="1" wrap="square" lIns="91425" tIns="91425" rIns="91425" bIns="91425" anchor="t" anchorCtr="0">
-            <a:normAutofit fontScale="90000"/>
-          </a:bodyPr>
-          <a:lstStyle/>
-          <a:p>
-            <a:pPr marL="0" lvl="0" indent="0" algn="l" rtl="0">
-              <a:spcBef>
-                <a:spcPts val="0"/>
-              </a:spcBef>
-              <a:spcAft>
-                <a:spcPts val="0"/>
-              </a:spcAft>
-              <a:buNone/>
-            </a:pPr>
-            <a:r>
-              <a:rPr lang="en"/>
-              <a:t>Task 2 POSIX Threads (graph 4)</a:t>
-            </a:r>
-            <a:endParaRPr/>
-          </a:p>
-        </p:txBody>
-      </p:sp>
-      <p:sp>
-        <p:nvSpPr>
-          <p:cNvPr id="144" name="Google Shape;144;p26"/>
-          <p:cNvSpPr txBox="1">
-            <a:spLocks noGrp="1"/>
-          </p:cNvSpPr>
-          <p:nvPr>
-            <p:ph type="body" idx="1"/>
-          </p:nvPr>
-        </p:nvSpPr>
-        <p:spPr>
-          <a:xfrm>
-            <a:off x="5599775" y="1182175"/>
-            <a:ext cx="3328800" cy="3399300"/>
-          </a:xfrm>
-          <a:prstGeom prst="rect">
-            <a:avLst/>
-          </a:prstGeom>
-        </p:spPr>
-        <p:txBody>
-          <a:bodyPr spcFirstLastPara="1" wrap="square" lIns="91425" tIns="91425" rIns="91425" bIns="91425" anchor="t" anchorCtr="0">
-            <a:normAutofit/>
-          </a:bodyPr>
-          <a:lstStyle/>
-          <a:p>
-            <a:pPr marL="0" lvl="0" indent="0" algn="l" rtl="0">
-              <a:spcBef>
-                <a:spcPts val="0"/>
-              </a:spcBef>
-              <a:spcAft>
-                <a:spcPts val="1200"/>
-              </a:spcAft>
-              <a:buNone/>
-            </a:pPr>
-            <a:r>
-              <a:rPr lang="en"/>
-              <a:t>n was set at 50,000,000 for this graph comparison.</a:t>
-            </a:r>
-            <a:endParaRPr/>
-          </a:p>
-        </p:txBody>
-      </p:sp>
-      <p:pic>
-        <p:nvPicPr>
-          <p:cNvPr id="145" name="Google Shape;145;p26"/>
-          <p:cNvPicPr preferRelativeResize="0"/>
-          <p:nvPr/>
-        </p:nvPicPr>
-        <p:blipFill>
-          <a:blip r:embed="rId3">
-            <a:alphaModFix/>
-          </a:blip>
-          <a:stretch>
-            <a:fillRect/>
-          </a:stretch>
-        </p:blipFill>
-        <p:spPr>
-          <a:xfrm>
-            <a:off x="311700" y="948674"/>
-            <a:ext cx="5049399" cy="3095601"/>
-          </a:xfrm>
-          <a:prstGeom prst="rect">
-            <a:avLst/>
-          </a:prstGeom>
-          <a:noFill/>
-          <a:ln>
-            <a:noFill/>
-          </a:ln>
-        </p:spPr>
-      </p:pic>
-    </p:spTree>
-  </p:cSld>
-  <p:clrMapOvr>
-    <a:masterClrMapping/>
-  </p:clrMapOvr>
-</p:sld>
-</file>
-
-<file path=ppt/slides/slide15.xml><?xml version="1.0" encoding="utf-8"?>
-<p:sld xmlns:a="http://schemas.openxmlformats.org/drawingml/2006/main" xmlns:r="http://schemas.openxmlformats.org/officeDocument/2006/relationships" xmlns:p="http://schemas.openxmlformats.org/presentationml/2006/main">
-  <p:cSld>
-    <p:spTree>
-      <p:nvGrpSpPr>
-        <p:cNvPr id="1" name="Shape 149"/>
-        <p:cNvGrpSpPr/>
-        <p:nvPr/>
-      </p:nvGrpSpPr>
-      <p:grpSpPr>
-        <a:xfrm>
-          <a:off x="0" y="0"/>
-          <a:ext cx="0" cy="0"/>
-          <a:chOff x="0" y="0"/>
-          <a:chExt cx="0" cy="0"/>
-        </a:xfrm>
-      </p:grpSpPr>
-      <p:sp>
-        <p:nvSpPr>
-          <p:cNvPr id="150" name="Google Shape;150;p27"/>
-          <p:cNvSpPr txBox="1">
-            <a:spLocks noGrp="1"/>
-          </p:cNvSpPr>
-          <p:nvPr>
-            <p:ph type="title"/>
-          </p:nvPr>
-        </p:nvSpPr>
-        <p:spPr>
-          <a:xfrm>
-            <a:off x="311700" y="0"/>
-            <a:ext cx="8520600" cy="572700"/>
-          </a:xfrm>
-          <a:prstGeom prst="rect">
-            <a:avLst/>
-          </a:prstGeom>
-        </p:spPr>
-        <p:txBody>
-          <a:bodyPr spcFirstLastPara="1" wrap="square" lIns="91425" tIns="91425" rIns="91425" bIns="91425" anchor="t" anchorCtr="0">
-            <a:normAutofit fontScale="90000"/>
-          </a:bodyPr>
-          <a:lstStyle/>
-          <a:p>
-            <a:pPr marL="0" lvl="0" indent="0" algn="l" rtl="0">
-              <a:spcBef>
-                <a:spcPts val="0"/>
-              </a:spcBef>
-              <a:spcAft>
-                <a:spcPts val="0"/>
-              </a:spcAft>
-              <a:buNone/>
-            </a:pPr>
-            <a:r>
-              <a:rPr lang="en"/>
-              <a:t>Task 3 OpenMP (main)</a:t>
-            </a:r>
-            <a:endParaRPr/>
-          </a:p>
-        </p:txBody>
-      </p:sp>
-      <p:sp>
-        <p:nvSpPr>
-          <p:cNvPr id="151" name="Google Shape;151;p27"/>
-          <p:cNvSpPr txBox="1">
-            <a:spLocks noGrp="1"/>
-          </p:cNvSpPr>
-          <p:nvPr>
-            <p:ph type="body" idx="1"/>
-          </p:nvPr>
-        </p:nvSpPr>
-        <p:spPr>
-          <a:xfrm>
-            <a:off x="5807175" y="835875"/>
-            <a:ext cx="2737800" cy="3745500"/>
-          </a:xfrm>
-          <a:prstGeom prst="rect">
-            <a:avLst/>
-          </a:prstGeom>
-        </p:spPr>
-        <p:txBody>
-          <a:bodyPr spcFirstLastPara="1" wrap="square" lIns="91425" tIns="91425" rIns="91425" bIns="91425" anchor="t" anchorCtr="0">
-            <a:normAutofit/>
-          </a:bodyPr>
-          <a:lstStyle/>
-          <a:p>
-            <a:pPr marL="0" lvl="0" indent="0" algn="l" rtl="0">
-              <a:spcBef>
-                <a:spcPts val="0"/>
-              </a:spcBef>
-              <a:spcAft>
-                <a:spcPts val="0"/>
-              </a:spcAft>
-              <a:buNone/>
-            </a:pPr>
-            <a:r>
-              <a:rPr lang="en"/>
-              <a:t>Essentially the same as task 1 apart from the pragma omp parallel call to utilise OpenMP parallelization.</a:t>
-            </a:r>
-            <a:endParaRPr/>
-          </a:p>
-          <a:p>
-            <a:pPr marL="0" lvl="0" indent="0" algn="l" rtl="0">
-              <a:spcBef>
-                <a:spcPts val="1200"/>
-              </a:spcBef>
-              <a:spcAft>
-                <a:spcPts val="1200"/>
-              </a:spcAft>
-              <a:buNone/>
-            </a:pPr>
-            <a:r>
-              <a:rPr lang="en"/>
-              <a:t>Guided partition scheme is used as prime finding has an uneven workload which guided is best at.</a:t>
-            </a:r>
-            <a:endParaRPr/>
-          </a:p>
-        </p:txBody>
-      </p:sp>
-      <p:pic>
-        <p:nvPicPr>
-          <p:cNvPr id="152" name="Google Shape;152;p27"/>
-          <p:cNvPicPr preferRelativeResize="0"/>
-          <p:nvPr/>
-        </p:nvPicPr>
-        <p:blipFill>
-          <a:blip r:embed="rId3">
-            <a:alphaModFix/>
-          </a:blip>
-          <a:stretch>
-            <a:fillRect/>
-          </a:stretch>
-        </p:blipFill>
-        <p:spPr>
-          <a:xfrm>
-            <a:off x="311700" y="835875"/>
-            <a:ext cx="5162725" cy="1696629"/>
-          </a:xfrm>
-          <a:prstGeom prst="rect">
-            <a:avLst/>
-          </a:prstGeom>
-          <a:noFill/>
-          <a:ln>
-            <a:noFill/>
-          </a:ln>
-        </p:spPr>
-      </p:pic>
-    </p:spTree>
-  </p:cSld>
-  <p:clrMapOvr>
-    <a:masterClrMapping/>
-  </p:clrMapOvr>
-</p:sld>
-</file>
-
-<file path=ppt/slides/slide16.xml><?xml version="1.0" encoding="utf-8"?>
-<p:sld xmlns:a="http://schemas.openxmlformats.org/drawingml/2006/main" xmlns:r="http://schemas.openxmlformats.org/officeDocument/2006/relationships" xmlns:p="http://schemas.openxmlformats.org/presentationml/2006/main">
-  <p:cSld>
-    <p:spTree>
-      <p:nvGrpSpPr>
-        <p:cNvPr id="1" name="Shape 156"/>
-        <p:cNvGrpSpPr/>
-        <p:nvPr/>
-      </p:nvGrpSpPr>
-      <p:grpSpPr>
-        <a:xfrm>
-          <a:off x="0" y="0"/>
-          <a:ext cx="0" cy="0"/>
-          <a:chOff x="0" y="0"/>
-          <a:chExt cx="0" cy="0"/>
-        </a:xfrm>
-      </p:grpSpPr>
-      <p:sp>
-        <p:nvSpPr>
-          <p:cNvPr id="157" name="Google Shape;157;p28"/>
-          <p:cNvSpPr txBox="1">
-            <a:spLocks noGrp="1"/>
-          </p:cNvSpPr>
-          <p:nvPr>
-            <p:ph type="title"/>
-          </p:nvPr>
-        </p:nvSpPr>
-        <p:spPr>
-          <a:xfrm>
-            <a:off x="311700" y="0"/>
-            <a:ext cx="8520600" cy="572700"/>
-          </a:xfrm>
-          <a:prstGeom prst="rect">
-            <a:avLst/>
-          </a:prstGeom>
-        </p:spPr>
-        <p:txBody>
-          <a:bodyPr spcFirstLastPara="1" wrap="square" lIns="91425" tIns="91425" rIns="91425" bIns="91425" anchor="t" anchorCtr="0">
-            <a:normAutofit fontScale="90000"/>
-          </a:bodyPr>
-          <a:lstStyle/>
-          <a:p>
-            <a:pPr marL="0" lvl="0" indent="0" algn="l" rtl="0">
-              <a:spcBef>
-                <a:spcPts val="0"/>
-              </a:spcBef>
-              <a:spcAft>
-                <a:spcPts val="0"/>
-              </a:spcAft>
-              <a:buNone/>
-            </a:pPr>
-            <a:r>
-              <a:rPr lang="en"/>
-              <a:t>Task 3 OpenMP (graph 1)</a:t>
-            </a:r>
-            <a:endParaRPr/>
-          </a:p>
-        </p:txBody>
-      </p:sp>
-      <p:sp>
-        <p:nvSpPr>
-          <p:cNvPr id="158" name="Google Shape;158;p28"/>
-          <p:cNvSpPr txBox="1">
-            <a:spLocks noGrp="1"/>
-          </p:cNvSpPr>
-          <p:nvPr>
-            <p:ph type="body" idx="1"/>
-          </p:nvPr>
-        </p:nvSpPr>
-        <p:spPr>
-          <a:xfrm>
-            <a:off x="5599775" y="1182175"/>
-            <a:ext cx="3360000" cy="3399300"/>
-          </a:xfrm>
-          <a:prstGeom prst="rect">
-            <a:avLst/>
-          </a:prstGeom>
-        </p:spPr>
-        <p:txBody>
-          <a:bodyPr spcFirstLastPara="1" wrap="square" lIns="91425" tIns="91425" rIns="91425" bIns="91425" anchor="t" anchorCtr="0">
-            <a:normAutofit/>
-          </a:bodyPr>
-          <a:lstStyle/>
-          <a:p>
-            <a:pPr marL="0" lvl="0" indent="0" algn="l" rtl="0">
-              <a:spcBef>
-                <a:spcPts val="0"/>
-              </a:spcBef>
-              <a:spcAft>
-                <a:spcPts val="0"/>
-              </a:spcAft>
-              <a:buNone/>
-            </a:pPr>
-            <a:r>
-              <a:rPr lang="en"/>
-              <a:t>Task 3 was run with 2 threads for this graph comparison.</a:t>
-            </a:r>
-            <a:endParaRPr/>
-          </a:p>
-          <a:p>
-            <a:pPr marL="0" lvl="0" indent="0" algn="l" rtl="0">
-              <a:spcBef>
-                <a:spcPts val="1200"/>
-              </a:spcBef>
-              <a:spcAft>
-                <a:spcPts val="1200"/>
-              </a:spcAft>
-              <a:buNone/>
-            </a:pPr>
-            <a:r>
-              <a:rPr lang="en"/>
-              <a:t>Task 1 is serial (runs on 1 thread).</a:t>
-            </a:r>
-            <a:endParaRPr/>
-          </a:p>
-        </p:txBody>
-      </p:sp>
-      <p:pic>
-        <p:nvPicPr>
-          <p:cNvPr id="159" name="Google Shape;159;p28"/>
-          <p:cNvPicPr preferRelativeResize="0"/>
-          <p:nvPr/>
-        </p:nvPicPr>
-        <p:blipFill>
-          <a:blip r:embed="rId3">
-            <a:alphaModFix/>
-          </a:blip>
-          <a:stretch>
-            <a:fillRect/>
-          </a:stretch>
-        </p:blipFill>
-        <p:spPr>
-          <a:xfrm>
-            <a:off x="311700" y="825925"/>
-            <a:ext cx="5082476" cy="3117826"/>
-          </a:xfrm>
-          <a:prstGeom prst="rect">
-            <a:avLst/>
-          </a:prstGeom>
-          <a:noFill/>
-          <a:ln>
-            <a:noFill/>
-          </a:ln>
-        </p:spPr>
-      </p:pic>
-    </p:spTree>
-  </p:cSld>
-  <p:clrMapOvr>
-    <a:masterClrMapping/>
-  </p:clrMapOvr>
-</p:sld>
-</file>
-
-<file path=ppt/slides/slide17.xml><?xml version="1.0" encoding="utf-8"?>
-<p:sld xmlns:a="http://schemas.openxmlformats.org/drawingml/2006/main" xmlns:r="http://schemas.openxmlformats.org/officeDocument/2006/relationships" xmlns:p="http://schemas.openxmlformats.org/presentationml/2006/main">
-  <p:cSld>
-    <p:spTree>
-      <p:nvGrpSpPr>
-        <p:cNvPr id="1" name="Shape 163"/>
-        <p:cNvGrpSpPr/>
-        <p:nvPr/>
-      </p:nvGrpSpPr>
-      <p:grpSpPr>
-        <a:xfrm>
-          <a:off x="0" y="0"/>
-          <a:ext cx="0" cy="0"/>
-          <a:chOff x="0" y="0"/>
-          <a:chExt cx="0" cy="0"/>
-        </a:xfrm>
-      </p:grpSpPr>
-      <p:sp>
-        <p:nvSpPr>
-          <p:cNvPr id="164" name="Google Shape;164;p29"/>
-          <p:cNvSpPr txBox="1">
-            <a:spLocks noGrp="1"/>
-          </p:cNvSpPr>
-          <p:nvPr>
-            <p:ph type="title"/>
-          </p:nvPr>
-        </p:nvSpPr>
-        <p:spPr>
-          <a:xfrm>
-            <a:off x="311700" y="0"/>
-            <a:ext cx="8520600" cy="572700"/>
-          </a:xfrm>
-          <a:prstGeom prst="rect">
-            <a:avLst/>
-          </a:prstGeom>
-        </p:spPr>
-        <p:txBody>
-          <a:bodyPr spcFirstLastPara="1" wrap="square" lIns="91425" tIns="91425" rIns="91425" bIns="91425" anchor="t" anchorCtr="0">
-            <a:normAutofit fontScale="90000"/>
-          </a:bodyPr>
-          <a:lstStyle/>
-          <a:p>
-            <a:pPr marL="0" lvl="0" indent="0" algn="l" rtl="0">
-              <a:spcBef>
-                <a:spcPts val="0"/>
-              </a:spcBef>
-              <a:spcAft>
-                <a:spcPts val="0"/>
-              </a:spcAft>
-              <a:buNone/>
-            </a:pPr>
-            <a:r>
-              <a:rPr lang="en"/>
-              <a:t>Task 3 OpenMP (graph 2)</a:t>
-            </a:r>
-            <a:endParaRPr/>
-          </a:p>
-        </p:txBody>
-      </p:sp>
-      <p:sp>
-        <p:nvSpPr>
-          <p:cNvPr id="165" name="Google Shape;165;p29"/>
-          <p:cNvSpPr txBox="1">
-            <a:spLocks noGrp="1"/>
-          </p:cNvSpPr>
-          <p:nvPr>
-            <p:ph type="body" idx="1"/>
-          </p:nvPr>
-        </p:nvSpPr>
-        <p:spPr>
-          <a:xfrm>
-            <a:off x="5599775" y="1182175"/>
-            <a:ext cx="3232500" cy="3399300"/>
-          </a:xfrm>
-          <a:prstGeom prst="rect">
-            <a:avLst/>
-          </a:prstGeom>
-        </p:spPr>
-        <p:txBody>
-          <a:bodyPr spcFirstLastPara="1" wrap="square" lIns="91425" tIns="91425" rIns="91425" bIns="91425" anchor="t" anchorCtr="0">
-            <a:normAutofit/>
-          </a:bodyPr>
-          <a:lstStyle/>
-          <a:p>
-            <a:pPr marL="0" lvl="0" indent="0" algn="l" rtl="0">
-              <a:spcBef>
-                <a:spcPts val="0"/>
-              </a:spcBef>
-              <a:spcAft>
-                <a:spcPts val="0"/>
-              </a:spcAft>
-              <a:buNone/>
-            </a:pPr>
-            <a:r>
-              <a:rPr lang="en"/>
-              <a:t>Task 3 was run with 2 threads for this graph comparison.</a:t>
-            </a:r>
-            <a:endParaRPr/>
-          </a:p>
-          <a:p>
-            <a:pPr marL="0" lvl="0" indent="0" algn="l" rtl="0">
-              <a:spcBef>
-                <a:spcPts val="1200"/>
-              </a:spcBef>
-              <a:spcAft>
-                <a:spcPts val="0"/>
-              </a:spcAft>
-              <a:buNone/>
-            </a:pPr>
-            <a:r>
-              <a:rPr lang="en"/>
-              <a:t>The speedup was calculated with the formula of base time at 10,000,000 n divided by the time at the current n.</a:t>
-            </a:r>
-            <a:endParaRPr/>
-          </a:p>
-          <a:p>
-            <a:pPr marL="0" lvl="0" indent="0" algn="l" rtl="0">
-              <a:spcBef>
-                <a:spcPts val="1200"/>
-              </a:spcBef>
-              <a:spcAft>
-                <a:spcPts val="1200"/>
-              </a:spcAft>
-              <a:buNone/>
-            </a:pPr>
-            <a:r>
-              <a:rPr lang="en"/>
-              <a:t>(base time / current time)</a:t>
-            </a:r>
-            <a:endParaRPr/>
-          </a:p>
-        </p:txBody>
-      </p:sp>
-      <p:pic>
-        <p:nvPicPr>
-          <p:cNvPr id="166" name="Google Shape;166;p29"/>
-          <p:cNvPicPr preferRelativeResize="0"/>
-          <p:nvPr/>
-        </p:nvPicPr>
-        <p:blipFill>
-          <a:blip r:embed="rId3">
-            <a:alphaModFix/>
-          </a:blip>
-          <a:stretch>
-            <a:fillRect/>
-          </a:stretch>
-        </p:blipFill>
-        <p:spPr>
-          <a:xfrm>
-            <a:off x="311700" y="946025"/>
-            <a:ext cx="5152152" cy="3178074"/>
-          </a:xfrm>
-          <a:prstGeom prst="rect">
-            <a:avLst/>
-          </a:prstGeom>
-          <a:noFill/>
-          <a:ln>
-            <a:noFill/>
-          </a:ln>
-        </p:spPr>
-      </p:pic>
-    </p:spTree>
-  </p:cSld>
-  <p:clrMapOvr>
-    <a:masterClrMapping/>
-  </p:clrMapOvr>
-</p:sld>
-</file>
-
-<file path=ppt/slides/slide18.xml><?xml version="1.0" encoding="utf-8"?>
-<p:sld xmlns:a="http://schemas.openxmlformats.org/drawingml/2006/main" xmlns:r="http://schemas.openxmlformats.org/officeDocument/2006/relationships" xmlns:p="http://schemas.openxmlformats.org/presentationml/2006/main">
-  <p:cSld>
-    <p:spTree>
-      <p:nvGrpSpPr>
-        <p:cNvPr id="1" name="Shape 170"/>
-        <p:cNvGrpSpPr/>
-        <p:nvPr/>
-      </p:nvGrpSpPr>
-      <p:grpSpPr>
-        <a:xfrm>
-          <a:off x="0" y="0"/>
-          <a:ext cx="0" cy="0"/>
-          <a:chOff x="0" y="0"/>
-          <a:chExt cx="0" cy="0"/>
-        </a:xfrm>
-      </p:grpSpPr>
-      <p:sp>
-        <p:nvSpPr>
-          <p:cNvPr id="171" name="Google Shape;171;p30"/>
-          <p:cNvSpPr txBox="1">
-            <a:spLocks noGrp="1"/>
-          </p:cNvSpPr>
-          <p:nvPr>
-            <p:ph type="title"/>
-          </p:nvPr>
-        </p:nvSpPr>
-        <p:spPr>
-          <a:xfrm>
-            <a:off x="311700" y="0"/>
-            <a:ext cx="8520600" cy="572700"/>
-          </a:xfrm>
-          <a:prstGeom prst="rect">
-            <a:avLst/>
-          </a:prstGeom>
-        </p:spPr>
-        <p:txBody>
-          <a:bodyPr spcFirstLastPara="1" wrap="square" lIns="91425" tIns="91425" rIns="91425" bIns="91425" anchor="t" anchorCtr="0">
-            <a:normAutofit fontScale="90000"/>
-          </a:bodyPr>
-          <a:lstStyle/>
-          <a:p>
-            <a:pPr marL="0" lvl="0" indent="0" algn="l" rtl="0">
-              <a:spcBef>
-                <a:spcPts val="0"/>
-              </a:spcBef>
-              <a:spcAft>
-                <a:spcPts val="0"/>
-              </a:spcAft>
-              <a:buNone/>
-            </a:pPr>
-            <a:r>
-              <a:rPr lang="en"/>
-              <a:t>Task 3 OpenMP (graph 3)</a:t>
-            </a:r>
-            <a:endParaRPr/>
-          </a:p>
-        </p:txBody>
-      </p:sp>
-      <p:sp>
-        <p:nvSpPr>
-          <p:cNvPr id="172" name="Google Shape;172;p30"/>
-          <p:cNvSpPr txBox="1">
-            <a:spLocks noGrp="1"/>
-          </p:cNvSpPr>
-          <p:nvPr>
-            <p:ph type="body" idx="1"/>
-          </p:nvPr>
-        </p:nvSpPr>
-        <p:spPr>
-          <a:xfrm>
-            <a:off x="5599775" y="1182175"/>
-            <a:ext cx="3103500" cy="3399300"/>
-          </a:xfrm>
-          <a:prstGeom prst="rect">
-            <a:avLst/>
-          </a:prstGeom>
-        </p:spPr>
-        <p:txBody>
-          <a:bodyPr spcFirstLastPara="1" wrap="square" lIns="91425" tIns="91425" rIns="91425" bIns="91425" anchor="t" anchorCtr="0">
-            <a:normAutofit/>
-          </a:bodyPr>
-          <a:lstStyle/>
-          <a:p>
-            <a:pPr marL="0" lvl="0" indent="0" algn="l" rtl="0">
-              <a:spcBef>
-                <a:spcPts val="0"/>
-              </a:spcBef>
-              <a:spcAft>
-                <a:spcPts val="1200"/>
-              </a:spcAft>
-              <a:buNone/>
-            </a:pPr>
-            <a:r>
-              <a:rPr lang="en"/>
-              <a:t>Both task 2 and task 3 was run with 2 threads for this graph comparison.</a:t>
-            </a:r>
-            <a:endParaRPr/>
-          </a:p>
-        </p:txBody>
-      </p:sp>
-      <p:pic>
-        <p:nvPicPr>
-          <p:cNvPr id="173" name="Google Shape;173;p30"/>
-          <p:cNvPicPr preferRelativeResize="0"/>
-          <p:nvPr/>
-        </p:nvPicPr>
-        <p:blipFill>
-          <a:blip r:embed="rId3">
-            <a:alphaModFix/>
-          </a:blip>
-          <a:stretch>
-            <a:fillRect/>
-          </a:stretch>
-        </p:blipFill>
-        <p:spPr>
-          <a:xfrm>
-            <a:off x="311700" y="743650"/>
-            <a:ext cx="5181174" cy="3195975"/>
-          </a:xfrm>
-          <a:prstGeom prst="rect">
-            <a:avLst/>
-          </a:prstGeom>
-          <a:noFill/>
-          <a:ln>
-            <a:noFill/>
-          </a:ln>
-        </p:spPr>
-      </p:pic>
-    </p:spTree>
-  </p:cSld>
-  <p:clrMapOvr>
-    <a:masterClrMapping/>
-  </p:clrMapOvr>
-</p:sld>
-</file>
-
-<file path=ppt/slides/slide19.xml><?xml version="1.0" encoding="utf-8"?>
-<p:sld xmlns:a="http://schemas.openxmlformats.org/drawingml/2006/main" xmlns:r="http://schemas.openxmlformats.org/officeDocument/2006/relationships" xmlns:p="http://schemas.openxmlformats.org/presentationml/2006/main">
-  <p:cSld>
-    <p:spTree>
-      <p:nvGrpSpPr>
-        <p:cNvPr id="1" name="Shape 177"/>
-        <p:cNvGrpSpPr/>
-        <p:nvPr/>
-      </p:nvGrpSpPr>
-      <p:grpSpPr>
-        <a:xfrm>
-          <a:off x="0" y="0"/>
-          <a:ext cx="0" cy="0"/>
-          <a:chOff x="0" y="0"/>
-          <a:chExt cx="0" cy="0"/>
-        </a:xfrm>
-      </p:grpSpPr>
-      <p:sp>
-        <p:nvSpPr>
-          <p:cNvPr id="178" name="Google Shape;178;p31"/>
-          <p:cNvSpPr txBox="1">
-            <a:spLocks noGrp="1"/>
-          </p:cNvSpPr>
-          <p:nvPr>
-            <p:ph type="title"/>
-          </p:nvPr>
-        </p:nvSpPr>
-        <p:spPr>
-          <a:xfrm>
-            <a:off x="311700" y="0"/>
-            <a:ext cx="8520600" cy="572700"/>
-          </a:xfrm>
-          <a:prstGeom prst="rect">
-            <a:avLst/>
-          </a:prstGeom>
-        </p:spPr>
-        <p:txBody>
-          <a:bodyPr spcFirstLastPara="1" wrap="square" lIns="91425" tIns="91425" rIns="91425" bIns="91425" anchor="t" anchorCtr="0">
-            <a:normAutofit fontScale="90000"/>
-          </a:bodyPr>
-          <a:lstStyle/>
-          <a:p>
-            <a:pPr marL="0" lvl="0" indent="0" algn="l" rtl="0">
-              <a:spcBef>
-                <a:spcPts val="0"/>
-              </a:spcBef>
-              <a:spcAft>
-                <a:spcPts val="0"/>
-              </a:spcAft>
-              <a:buNone/>
-            </a:pPr>
-            <a:r>
-              <a:rPr lang="en"/>
-              <a:t>Task 3 OpenMP (graph 4)</a:t>
-            </a:r>
-            <a:endParaRPr/>
-          </a:p>
-        </p:txBody>
-      </p:sp>
-      <p:sp>
-        <p:nvSpPr>
-          <p:cNvPr id="179" name="Google Shape;179;p31"/>
-          <p:cNvSpPr txBox="1">
-            <a:spLocks noGrp="1"/>
-          </p:cNvSpPr>
-          <p:nvPr>
-            <p:ph type="body" idx="1"/>
-          </p:nvPr>
-        </p:nvSpPr>
-        <p:spPr>
-          <a:xfrm>
-            <a:off x="5599775" y="1182175"/>
-            <a:ext cx="3328800" cy="3399300"/>
-          </a:xfrm>
-          <a:prstGeom prst="rect">
-            <a:avLst/>
-          </a:prstGeom>
-        </p:spPr>
-        <p:txBody>
-          <a:bodyPr spcFirstLastPara="1" wrap="square" lIns="91425" tIns="91425" rIns="91425" bIns="91425" anchor="t" anchorCtr="0">
-            <a:normAutofit/>
-          </a:bodyPr>
-          <a:lstStyle/>
-          <a:p>
-            <a:pPr marL="0" lvl="0" indent="0" algn="l" rtl="0">
-              <a:spcBef>
-                <a:spcPts val="0"/>
-              </a:spcBef>
-              <a:spcAft>
-                <a:spcPts val="1200"/>
-              </a:spcAft>
-              <a:buNone/>
-            </a:pPr>
-            <a:r>
-              <a:rPr lang="en"/>
-              <a:t>n was set at 50,000,000 for this graph comparison.</a:t>
-            </a:r>
-            <a:endParaRPr/>
-          </a:p>
-        </p:txBody>
-      </p:sp>
-      <p:pic>
-        <p:nvPicPr>
-          <p:cNvPr id="180" name="Google Shape;180;p31"/>
-          <p:cNvPicPr preferRelativeResize="0"/>
-          <p:nvPr/>
-        </p:nvPicPr>
-        <p:blipFill>
-          <a:blip r:embed="rId3">
-            <a:alphaModFix/>
-          </a:blip>
-          <a:stretch>
-            <a:fillRect/>
-          </a:stretch>
-        </p:blipFill>
-        <p:spPr>
-          <a:xfrm>
-            <a:off x="311700" y="897275"/>
-            <a:ext cx="4869449" cy="2997375"/>
-          </a:xfrm>
-          <a:prstGeom prst="rect">
-            <a:avLst/>
-          </a:prstGeom>
-          <a:noFill/>
-          <a:ln>
-            <a:noFill/>
-          </a:ln>
-        </p:spPr>
-      </p:pic>
-    </p:spTree>
-  </p:cSld>
-  <p:clrMapOvr>
-    <a:masterClrMapping/>
-  </p:clrMapOvr>
-</p:sld>
-</file>
-
-<file path=ppt/slides/slide2.xml><?xml version="1.0" encoding="utf-8"?>
+<file path=ppt/slides/slide3.xml><?xml version="1.0" encoding="utf-8"?>
 <p:sld xmlns:a="http://schemas.openxmlformats.org/drawingml/2006/main" xmlns:r="http://schemas.openxmlformats.org/officeDocument/2006/relationships" xmlns:p="http://schemas.openxmlformats.org/presentationml/2006/main">
   <p:cSld>
     <p:spTree>
@@ -9334,10 +7054,10 @@
               <a:buNone/>
             </a:pPr>
             <a:r>
-              <a:rPr lang="en"/>
-              <a:t>Task 1 Serial Code (printPrimes) pt. 1</a:t>
+              <a:rPr lang="en" dirty="0"/>
+              <a:t>Task 1 Open MPI Code Implementation</a:t>
             </a:r>
-            <a:endParaRPr/>
+            <a:endParaRPr dirty="0"/>
           </a:p>
         </p:txBody>
       </p:sp>
@@ -9353,8 +7073,8 @@
         </p:nvSpPr>
         <p:spPr>
           <a:xfrm>
-            <a:off x="6051300" y="841375"/>
-            <a:ext cx="2781000" cy="3745500"/>
+            <a:off x="311700" y="841375"/>
+            <a:ext cx="8520600" cy="3745500"/>
           </a:xfrm>
           <a:prstGeom prst="rect">
             <a:avLst/>
@@ -9362,7 +7082,7 @@
         </p:spPr>
         <p:txBody>
           <a:bodyPr spcFirstLastPara="1" wrap="square" lIns="91425" tIns="91425" rIns="91425" bIns="91425" anchor="t" anchorCtr="0">
-            <a:normAutofit/>
+            <a:normAutofit lnSpcReduction="10000"/>
           </a:bodyPr>
           <a:lstStyle/>
           <a:p>
@@ -9376,41 +7096,108 @@
               <a:buNone/>
             </a:pPr>
             <a:r>
-              <a:rPr lang="en"/>
-              <a:t>Print primes to console (standard output) if k is less than or equal to 100.</a:t>
+              <a:rPr lang="en-MY" sz="1600" dirty="0"/>
+              <a:t>Architectural Approach:</a:t>
             </a:r>
-            <a:endParaRPr/>
+          </a:p>
+          <a:p>
+            <a:pPr marL="0" lvl="0" indent="0" algn="l" rtl="0">
+              <a:spcBef>
+                <a:spcPts val="0"/>
+              </a:spcBef>
+              <a:spcAft>
+                <a:spcPts val="1200"/>
+              </a:spcAft>
+              <a:buNone/>
+            </a:pPr>
+            <a:r>
+              <a:rPr lang="en-MY" sz="1600" dirty="0"/>
+              <a:t>Broadcast Setup: The root process parses n and configuration settings, broadcasting them via </a:t>
+            </a:r>
+            <a:r>
+              <a:rPr lang="en-MY" sz="1600" dirty="0" err="1"/>
+              <a:t>MPI_Bcast</a:t>
+            </a:r>
+            <a:r>
+              <a:rPr lang="en-MY" sz="1600" dirty="0"/>
+              <a:t> to all ranks. </a:t>
+            </a:r>
+          </a:p>
+          <a:p>
+            <a:pPr marL="0" lvl="0" indent="0" algn="l" rtl="0">
+              <a:spcBef>
+                <a:spcPts val="0"/>
+              </a:spcBef>
+              <a:spcAft>
+                <a:spcPts val="1200"/>
+              </a:spcAft>
+              <a:buNone/>
+            </a:pPr>
+            <a:r>
+              <a:rPr lang="en-MY" sz="1600" dirty="0"/>
+              <a:t>Local Prime Table: Every rank independently computes a small prime table up to √𝑛using the Sieve of Eratosthenes to perform trial division efficiently. </a:t>
+            </a:r>
+          </a:p>
+          <a:p>
+            <a:pPr marL="0" lvl="0" indent="0" algn="l" rtl="0">
+              <a:spcBef>
+                <a:spcPts val="0"/>
+              </a:spcBef>
+              <a:spcAft>
+                <a:spcPts val="1200"/>
+              </a:spcAft>
+              <a:buNone/>
+            </a:pPr>
+            <a:r>
+              <a:rPr lang="en-MY" sz="1600" dirty="0"/>
+              <a:t>Independent Search: Ranks search assigned odd candidates (k = 3 + 2c) in parallel and accumulate results in local dynamic buffers. </a:t>
+            </a:r>
+          </a:p>
+          <a:p>
+            <a:pPr marL="0" lvl="0" indent="0" algn="l" rtl="0">
+              <a:spcBef>
+                <a:spcPts val="0"/>
+              </a:spcBef>
+              <a:spcAft>
+                <a:spcPts val="1200"/>
+              </a:spcAft>
+              <a:buNone/>
+            </a:pPr>
+            <a:r>
+              <a:rPr lang="en-MY" sz="1600" dirty="0"/>
+              <a:t>Gather &amp; Merge: Root uses </a:t>
+            </a:r>
+            <a:r>
+              <a:rPr lang="en-MY" sz="1600" dirty="0" err="1"/>
+              <a:t>MPI_Gather</a:t>
+            </a:r>
+            <a:r>
+              <a:rPr lang="en-MY" sz="1600" dirty="0"/>
+              <a:t> to collect buffer sizes, </a:t>
+            </a:r>
+            <a:r>
+              <a:rPr lang="en-MY" sz="1600" dirty="0" err="1"/>
+              <a:t>MPI_Gatherv</a:t>
+            </a:r>
+            <a:r>
+              <a:rPr lang="en-MY" sz="1600" dirty="0"/>
+              <a:t> to collect raw prime arrays, performs an m-way merge across pre-sorted segments, and writes the output file. </a:t>
+            </a:r>
+          </a:p>
+          <a:p>
+            <a:pPr marL="0" lvl="0" indent="0" algn="l" rtl="0">
+              <a:spcBef>
+                <a:spcPts val="0"/>
+              </a:spcBef>
+              <a:spcAft>
+                <a:spcPts val="1200"/>
+              </a:spcAft>
+              <a:buNone/>
+            </a:pPr>
+            <a:endParaRPr sz="1600" dirty="0"/>
           </a:p>
         </p:txBody>
       </p:sp>
-      <p:pic>
-        <p:nvPicPr>
-          <p:cNvPr id="62" name="Google Shape;62;p14"/>
-          <p:cNvPicPr preferRelativeResize="0"/>
-          <p:nvPr/>
-        </p:nvPicPr>
-        <p:blipFill>
-          <a:blip r:embed="rId3">
-            <a:alphaModFix/>
-          </a:blip>
-          <a:stretch>
-            <a:fillRect/>
-          </a:stretch>
-        </p:blipFill>
-        <p:spPr>
-          <a:xfrm>
-            <a:off x="311700" y="841375"/>
-            <a:ext cx="5547324" cy="3343249"/>
-          </a:xfrm>
-          <a:prstGeom prst="rect">
-            <a:avLst/>
-          </a:prstGeom>
-          <a:noFill/>
-          <a:ln>
-            <a:noFill/>
-          </a:ln>
-        </p:spPr>
-      </p:pic>
     </p:spTree>
   </p:cSld>
   <p:clrMapOvr>
@@ -9419,12 +7206,18 @@
 </p:sld>
 </file>
 
-<file path=ppt/slides/slide20.xml><?xml version="1.0" encoding="utf-8"?>
+<file path=ppt/slides/slide4.xml><?xml version="1.0" encoding="utf-8"?>
 <p:sld xmlns:a="http://schemas.openxmlformats.org/drawingml/2006/main" xmlns:r="http://schemas.openxmlformats.org/officeDocument/2006/relationships" xmlns:p="http://schemas.openxmlformats.org/presentationml/2006/main">
   <p:cSld>
     <p:spTree>
       <p:nvGrpSpPr>
-        <p:cNvPr id="1" name="Shape 184"/>
+        <p:cNvPr id="1" name="Shape 59">
+          <a:extLst>
+            <a:ext uri="{FF2B5EF4-FFF2-40B4-BE49-F238E27FC236}">
+              <a16:creationId xmlns:a16="http://schemas.microsoft.com/office/drawing/2014/main" id="{5066A58B-E5DB-AC15-D40F-2A31FF6C0504}"/>
+            </a:ext>
+          </a:extLst>
+        </p:cNvPr>
         <p:cNvGrpSpPr/>
         <p:nvPr/>
       </p:nvGrpSpPr>
@@ -9438,7 +7231,336 @@
       </p:grpSpPr>
       <p:sp>
         <p:nvSpPr>
-          <p:cNvPr id="185" name="Google Shape;185;p32"/>
+          <p:cNvPr id="60" name="Google Shape;60;p14">
+            <a:extLst>
+              <a:ext uri="{FF2B5EF4-FFF2-40B4-BE49-F238E27FC236}">
+                <a16:creationId xmlns:a16="http://schemas.microsoft.com/office/drawing/2014/main" id="{66BAF342-F2D6-5B6F-5CDE-650D481F0DF4}"/>
+              </a:ext>
+            </a:extLst>
+          </p:cNvPr>
+          <p:cNvSpPr txBox="1">
+            <a:spLocks noGrp="1"/>
+          </p:cNvSpPr>
+          <p:nvPr>
+            <p:ph type="title"/>
+          </p:nvPr>
+        </p:nvSpPr>
+        <p:spPr>
+          <a:xfrm>
+            <a:off x="311700" y="0"/>
+            <a:ext cx="8520600" cy="572700"/>
+          </a:xfrm>
+          <a:prstGeom prst="rect">
+            <a:avLst/>
+          </a:prstGeom>
+        </p:spPr>
+        <p:txBody>
+          <a:bodyPr spcFirstLastPara="1" wrap="square" lIns="91425" tIns="91425" rIns="91425" bIns="91425" anchor="t" anchorCtr="0">
+            <a:normAutofit fontScale="90000"/>
+          </a:bodyPr>
+          <a:lstStyle/>
+          <a:p>
+            <a:pPr lvl="0"/>
+            <a:r>
+              <a:rPr lang="en" dirty="0"/>
+              <a:t>Task 1 Open MPI Code </a:t>
+            </a:r>
+            <a:r>
+              <a:rPr lang="en-MY" dirty="0"/>
+              <a:t>Parallel Partitioning Schemes</a:t>
+            </a:r>
+            <a:endParaRPr dirty="0"/>
+          </a:p>
+        </p:txBody>
+      </p:sp>
+      <p:sp>
+        <p:nvSpPr>
+          <p:cNvPr id="61" name="Google Shape;61;p14">
+            <a:extLst>
+              <a:ext uri="{FF2B5EF4-FFF2-40B4-BE49-F238E27FC236}">
+                <a16:creationId xmlns:a16="http://schemas.microsoft.com/office/drawing/2014/main" id="{6DB46C5C-A537-7B4B-964D-99CA89B0366E}"/>
+              </a:ext>
+            </a:extLst>
+          </p:cNvPr>
+          <p:cNvSpPr txBox="1">
+            <a:spLocks noGrp="1"/>
+          </p:cNvSpPr>
+          <p:nvPr>
+            <p:ph type="body" idx="1"/>
+          </p:nvPr>
+        </p:nvSpPr>
+        <p:spPr>
+          <a:xfrm>
+            <a:off x="311700" y="841375"/>
+            <a:ext cx="8520600" cy="3745500"/>
+          </a:xfrm>
+          <a:prstGeom prst="rect">
+            <a:avLst/>
+          </a:prstGeom>
+        </p:spPr>
+        <p:txBody>
+          <a:bodyPr spcFirstLastPara="1" wrap="square" lIns="91425" tIns="91425" rIns="91425" bIns="91425" anchor="t" anchorCtr="0">
+            <a:normAutofit/>
+          </a:bodyPr>
+          <a:lstStyle/>
+          <a:p>
+            <a:pPr marL="0" lvl="0" indent="0">
+              <a:spcAft>
+                <a:spcPts val="1200"/>
+              </a:spcAft>
+              <a:buNone/>
+            </a:pPr>
+            <a:r>
+              <a:rPr lang="en-MY" sz="1600" dirty="0"/>
+              <a:t>To handle the increasing computational cost of trial division for larger numbers, three distribution schemes were evaluated:</a:t>
+            </a:r>
+            <a:br>
+              <a:rPr lang="en-MY" sz="1600" dirty="0"/>
+            </a:br>
+            <a:br>
+              <a:rPr lang="en-MY" sz="1600" dirty="0"/>
+            </a:br>
+            <a:r>
+              <a:rPr lang="en-MY" sz="1600" dirty="0"/>
+              <a:t>Block Partitioning (block): Splits candidates into equal chunks. Higher ranks process significantly larger numbers, leading to severe computational load imbalance and worker idling. </a:t>
+            </a:r>
+          </a:p>
+          <a:p>
+            <a:pPr marL="0" lvl="0" indent="0" algn="l" rtl="0">
+              <a:spcBef>
+                <a:spcPts val="0"/>
+              </a:spcBef>
+              <a:spcAft>
+                <a:spcPts val="1200"/>
+              </a:spcAft>
+              <a:buNone/>
+            </a:pPr>
+            <a:r>
+              <a:rPr lang="en-MY" sz="1600" dirty="0"/>
+              <a:t>Cyclic Partitioning (cyclic): Distributes individual odd candidates round-robin (c = r + </a:t>
+            </a:r>
+            <a:r>
+              <a:rPr lang="en-MY" sz="1600" dirty="0" err="1"/>
+              <a:t>i</a:t>
+            </a:r>
+            <a:r>
+              <a:rPr lang="en-MY" sz="1600" dirty="0"/>
+              <a:t> * p). Interleaves heavy and light workloads evenly, achieving near-optimal load balance across all processes. </a:t>
+            </a:r>
+          </a:p>
+          <a:p>
+            <a:pPr marL="0" lvl="0" indent="0" algn="l" rtl="0">
+              <a:spcBef>
+                <a:spcPts val="0"/>
+              </a:spcBef>
+              <a:spcAft>
+                <a:spcPts val="1200"/>
+              </a:spcAft>
+              <a:buNone/>
+            </a:pPr>
+            <a:r>
+              <a:rPr lang="en-MY" sz="1600" dirty="0"/>
+              <a:t>Block-Cyclic Partitioning (</a:t>
+            </a:r>
+            <a:r>
+              <a:rPr lang="en-MY" sz="1600" dirty="0" err="1"/>
+              <a:t>blockcyclic</a:t>
+            </a:r>
+            <a:r>
+              <a:rPr lang="en-MY" sz="1600" dirty="0"/>
+              <a:t>): Distributes configurable blocks of candidates</a:t>
+            </a:r>
+            <a:br>
+              <a:rPr lang="en-MY" sz="1600" dirty="0"/>
+            </a:br>
+            <a:r>
+              <a:rPr lang="en-MY" sz="1600" dirty="0"/>
+              <a:t>(e.g. s = 1024) round-robin. Balances execution time while maintaining cache locality. </a:t>
+            </a:r>
+          </a:p>
+          <a:p>
+            <a:pPr marL="0" lvl="0" indent="0" algn="l" rtl="0">
+              <a:spcBef>
+                <a:spcPts val="0"/>
+              </a:spcBef>
+              <a:spcAft>
+                <a:spcPts val="1200"/>
+              </a:spcAft>
+              <a:buNone/>
+            </a:pPr>
+            <a:endParaRPr sz="1600" dirty="0"/>
+          </a:p>
+        </p:txBody>
+      </p:sp>
+    </p:spTree>
+    <p:extLst>
+      <p:ext uri="{BB962C8B-B14F-4D97-AF65-F5344CB8AC3E}">
+        <p14:creationId xmlns:p14="http://schemas.microsoft.com/office/powerpoint/2010/main" val="1296556204"/>
+      </p:ext>
+    </p:extLst>
+  </p:cSld>
+  <p:clrMapOvr>
+    <a:masterClrMapping/>
+  </p:clrMapOvr>
+</p:sld>
+</file>
+
+<file path=ppt/slides/slide5.xml><?xml version="1.0" encoding="utf-8"?>
+<p:sld xmlns:a="http://schemas.openxmlformats.org/drawingml/2006/main" xmlns:r="http://schemas.openxmlformats.org/officeDocument/2006/relationships" xmlns:p="http://schemas.openxmlformats.org/presentationml/2006/main">
+  <p:cSld>
+    <p:spTree>
+      <p:nvGrpSpPr>
+        <p:cNvPr id="1" name="Shape 53">
+          <a:extLst>
+            <a:ext uri="{FF2B5EF4-FFF2-40B4-BE49-F238E27FC236}">
+              <a16:creationId xmlns:a16="http://schemas.microsoft.com/office/drawing/2014/main" id="{EB61BE3F-546E-6D15-15FE-603AA22422E2}"/>
+            </a:ext>
+          </a:extLst>
+        </p:cNvPr>
+        <p:cNvGrpSpPr/>
+        <p:nvPr/>
+      </p:nvGrpSpPr>
+      <p:grpSpPr>
+        <a:xfrm>
+          <a:off x="0" y="0"/>
+          <a:ext cx="0" cy="0"/>
+          <a:chOff x="0" y="0"/>
+          <a:chExt cx="0" cy="0"/>
+        </a:xfrm>
+      </p:grpSpPr>
+      <p:sp>
+        <p:nvSpPr>
+          <p:cNvPr id="54" name="Google Shape;54;p13">
+            <a:extLst>
+              <a:ext uri="{FF2B5EF4-FFF2-40B4-BE49-F238E27FC236}">
+                <a16:creationId xmlns:a16="http://schemas.microsoft.com/office/drawing/2014/main" id="{BD5DD2F7-994B-BB1C-B268-C6982B16BEFB}"/>
+              </a:ext>
+            </a:extLst>
+          </p:cNvPr>
+          <p:cNvSpPr txBox="1">
+            <a:spLocks noGrp="1"/>
+          </p:cNvSpPr>
+          <p:nvPr>
+            <p:ph type="ctrTitle"/>
+          </p:nvPr>
+        </p:nvSpPr>
+        <p:spPr>
+          <a:xfrm>
+            <a:off x="311708" y="744575"/>
+            <a:ext cx="8520600" cy="2052600"/>
+          </a:xfrm>
+          <a:prstGeom prst="rect">
+            <a:avLst/>
+          </a:prstGeom>
+        </p:spPr>
+        <p:txBody>
+          <a:bodyPr spcFirstLastPara="1" wrap="square" lIns="91425" tIns="91425" rIns="91425" bIns="91425" anchor="b" anchorCtr="0">
+            <a:normAutofit/>
+          </a:bodyPr>
+          <a:lstStyle/>
+          <a:p>
+            <a:pPr lvl="0"/>
+            <a:r>
+              <a:rPr lang="en" sz="3600" dirty="0"/>
+              <a:t>Task 2 Open MPI + Open MP Code</a:t>
+            </a:r>
+            <a:endParaRPr sz="3600" dirty="0"/>
+          </a:p>
+        </p:txBody>
+      </p:sp>
+      <p:sp>
+        <p:nvSpPr>
+          <p:cNvPr id="55" name="Google Shape;55;p13">
+            <a:extLst>
+              <a:ext uri="{FF2B5EF4-FFF2-40B4-BE49-F238E27FC236}">
+                <a16:creationId xmlns:a16="http://schemas.microsoft.com/office/drawing/2014/main" id="{D41EAD26-EAE2-C4F7-A0E8-10F25ADE1BB2}"/>
+              </a:ext>
+            </a:extLst>
+          </p:cNvPr>
+          <p:cNvSpPr txBox="1">
+            <a:spLocks noGrp="1"/>
+          </p:cNvSpPr>
+          <p:nvPr>
+            <p:ph type="subTitle" idx="1"/>
+          </p:nvPr>
+        </p:nvSpPr>
+        <p:spPr>
+          <a:xfrm>
+            <a:off x="311700" y="2834125"/>
+            <a:ext cx="8520600" cy="792600"/>
+          </a:xfrm>
+          <a:prstGeom prst="rect">
+            <a:avLst/>
+          </a:prstGeom>
+        </p:spPr>
+        <p:txBody>
+          <a:bodyPr spcFirstLastPara="1" wrap="square" lIns="91425" tIns="91425" rIns="91425" bIns="91425" anchor="t" anchorCtr="0">
+            <a:normAutofit/>
+          </a:bodyPr>
+          <a:lstStyle/>
+          <a:p>
+            <a:pPr marL="0" lvl="0" indent="0" algn="ctr" rtl="0">
+              <a:spcBef>
+                <a:spcPts val="0"/>
+              </a:spcBef>
+              <a:spcAft>
+                <a:spcPts val="0"/>
+              </a:spcAft>
+              <a:buNone/>
+            </a:pPr>
+            <a:r>
+              <a:rPr lang="en" dirty="0"/>
+              <a:t>Finding Prime Numbers</a:t>
+            </a:r>
+            <a:endParaRPr dirty="0"/>
+          </a:p>
+        </p:txBody>
+      </p:sp>
+    </p:spTree>
+    <p:extLst>
+      <p:ext uri="{BB962C8B-B14F-4D97-AF65-F5344CB8AC3E}">
+        <p14:creationId xmlns:p14="http://schemas.microsoft.com/office/powerpoint/2010/main" val="1738334692"/>
+      </p:ext>
+    </p:extLst>
+  </p:cSld>
+  <p:clrMapOvr>
+    <a:masterClrMapping/>
+  </p:clrMapOvr>
+</p:sld>
+</file>
+
+<file path=ppt/slides/slide6.xml><?xml version="1.0" encoding="utf-8"?>
+<p:sld xmlns:a="http://schemas.openxmlformats.org/drawingml/2006/main" xmlns:r="http://schemas.openxmlformats.org/officeDocument/2006/relationships" xmlns:p="http://schemas.openxmlformats.org/presentationml/2006/main">
+  <p:cSld>
+    <p:spTree>
+      <p:nvGrpSpPr>
+        <p:cNvPr id="1" name="Shape 59">
+          <a:extLst>
+            <a:ext uri="{FF2B5EF4-FFF2-40B4-BE49-F238E27FC236}">
+              <a16:creationId xmlns:a16="http://schemas.microsoft.com/office/drawing/2014/main" id="{D2429A99-C831-08E8-6DC2-D0164332AB1C}"/>
+            </a:ext>
+          </a:extLst>
+        </p:cNvPr>
+        <p:cNvGrpSpPr/>
+        <p:nvPr/>
+      </p:nvGrpSpPr>
+      <p:grpSpPr>
+        <a:xfrm>
+          <a:off x="0" y="0"/>
+          <a:ext cx="0" cy="0"/>
+          <a:chOff x="0" y="0"/>
+          <a:chExt cx="0" cy="0"/>
+        </a:xfrm>
+      </p:grpSpPr>
+      <p:sp>
+        <p:nvSpPr>
+          <p:cNvPr id="60" name="Google Shape;60;p14">
+            <a:extLst>
+              <a:ext uri="{FF2B5EF4-FFF2-40B4-BE49-F238E27FC236}">
+                <a16:creationId xmlns:a16="http://schemas.microsoft.com/office/drawing/2014/main" id="{384B8830-BC87-CBFC-94C9-4AFA94EDDE76}"/>
+              </a:ext>
+            </a:extLst>
+          </p:cNvPr>
           <p:cNvSpPr txBox="1">
             <a:spLocks noGrp="1"/>
           </p:cNvSpPr>
@@ -9471,16 +7593,22 @@
               <a:buNone/>
             </a:pPr>
             <a:r>
-              <a:rPr lang="en"/>
-              <a:t>Conclusion and Recommendations</a:t>
+              <a:rPr lang="en" dirty="0"/>
+              <a:t>Task 2 Open MPI + Open MP Code Implementation</a:t>
             </a:r>
-            <a:endParaRPr/>
+            <a:endParaRPr dirty="0"/>
           </a:p>
         </p:txBody>
       </p:sp>
       <p:sp>
         <p:nvSpPr>
-          <p:cNvPr id="186" name="Google Shape;186;p32"/>
+          <p:cNvPr id="61" name="Google Shape;61;p14">
+            <a:extLst>
+              <a:ext uri="{FF2B5EF4-FFF2-40B4-BE49-F238E27FC236}">
+                <a16:creationId xmlns:a16="http://schemas.microsoft.com/office/drawing/2014/main" id="{953D9D2E-95E6-5D6D-4966-1AE21A1AD729}"/>
+              </a:ext>
+            </a:extLst>
+          </p:cNvPr>
           <p:cNvSpPr txBox="1">
             <a:spLocks noGrp="1"/>
           </p:cNvSpPr>
@@ -9490,8 +7618,8 @@
         </p:nvSpPr>
         <p:spPr>
           <a:xfrm>
-            <a:off x="311700" y="835875"/>
-            <a:ext cx="8233200" cy="3745500"/>
+            <a:off x="311700" y="841375"/>
+            <a:ext cx="8520600" cy="3745500"/>
           </a:xfrm>
           <a:prstGeom prst="rect">
             <a:avLst/>
@@ -9499,61 +7627,66 @@
         </p:spPr>
         <p:txBody>
           <a:bodyPr spcFirstLastPara="1" wrap="square" lIns="91425" tIns="91425" rIns="91425" bIns="91425" anchor="t" anchorCtr="0">
-            <a:normAutofit/>
+            <a:normAutofit fontScale="92500" lnSpcReduction="20000"/>
           </a:bodyPr>
           <a:lstStyle/>
           <a:p>
-            <a:pPr marL="0" lvl="0" indent="0" algn="l" rtl="0">
-              <a:spcBef>
-                <a:spcPts val="0"/>
-              </a:spcBef>
-              <a:spcAft>
-                <a:spcPts val="0"/>
+            <a:pPr marL="0" lvl="0" indent="0" rtl="0">
+              <a:spcBef>
+                <a:spcPts val="0"/>
+              </a:spcBef>
+              <a:spcAft>
+                <a:spcPts val="1200"/>
               </a:spcAft>
               <a:buNone/>
             </a:pPr>
             <a:r>
-              <a:rPr lang="en"/>
-              <a:t>Parallelization is extremely useful to fully utilise your machine’s functions to speed up processes.</a:t>
+              <a:rPr lang="en-MY" sz="1600" dirty="0"/>
+              <a:t>Architectural Approach:</a:t>
             </a:r>
-            <a:endParaRPr/>
           </a:p>
           <a:p>
-            <a:pPr marL="0" lvl="0" indent="0" algn="l" rtl="0">
-              <a:spcBef>
+            <a:pPr marL="0" lvl="0" indent="0" rtl="0">
+              <a:spcBef>
+                <a:spcPts val="0"/>
+              </a:spcBef>
+              <a:spcAft>
                 <a:spcPts val="1200"/>
-              </a:spcBef>
-              <a:spcAft>
-                <a:spcPts val="0"/>
               </a:spcAft>
               <a:buNone/>
             </a:pPr>
             <a:r>
-              <a:rPr lang="en"/>
-              <a:t>Use POSIX threads (pthreads) for parallelization if more control over parallelization is wanted.</a:t>
+              <a:rPr lang="en-MY" sz="1600" dirty="0"/>
+              <a:t>Two-Level Parallelism: Combines distributed memory parallelism (MPI processes across nodes) with shared memory parallelism (OpenMP threads per process). </a:t>
             </a:r>
-            <a:endParaRPr/>
           </a:p>
           <a:p>
-            <a:pPr marL="0" lvl="0" indent="0" algn="l" rtl="0">
-              <a:spcBef>
+            <a:pPr marL="0" lvl="0" indent="0" rtl="0">
+              <a:spcBef>
+                <a:spcPts val="0"/>
+              </a:spcBef>
+              <a:spcAft>
                 <a:spcPts val="1200"/>
-              </a:spcBef>
-              <a:spcAft>
-                <a:spcPts val="0"/>
               </a:spcAft>
               <a:buNone/>
             </a:pPr>
             <a:r>
-              <a:rPr lang="en"/>
-              <a:t>Use OpenMP (omp) for parallelization if convenience is wanted as there are more inbuilt functions that are useful.</a:t>
+              <a:rPr lang="en-MY" sz="1600" dirty="0"/>
+              <a:t>Broadcast Setup: The root MPI process parses input parameters (n, distribution scheme, chunk size) and broadcasts them to all MPI ranks via </a:t>
             </a:r>
-            <a:endParaRPr/>
+            <a:r>
+              <a:rPr lang="en-MY" sz="1600" dirty="0" err="1"/>
+              <a:t>MPI_Bcast</a:t>
+            </a:r>
+            <a:r>
+              <a:rPr lang="en-MY" sz="1600" dirty="0"/>
+              <a:t>. </a:t>
+            </a:r>
           </a:p>
           <a:p>
-            <a:pPr marL="0" lvl="0" indent="0" algn="l" rtl="0">
-              <a:spcBef>
-                <a:spcPts val="1200"/>
+            <a:pPr marL="0" lvl="0" indent="0" rtl="0">
+              <a:spcBef>
+                <a:spcPts val="0"/>
               </a:spcBef>
               <a:spcAft>
                 <a:spcPts val="1200"/>
@@ -9561,14 +7694,76 @@
               <a:buNone/>
             </a:pPr>
             <a:r>
-              <a:rPr lang="en"/>
-              <a:t>Do not use more threads than the cores available on your machine as the process will slow down instead (context switching is used in this scenario).</a:t>
+              <a:rPr lang="en-MY" sz="1600" dirty="0"/>
+              <a:t>Shared Small Prime Table: Each MPI process allocates a shared lookup table of primes up to √n using the Sieve of Eratosthenes, accessible by all local OpenMP threads. </a:t>
             </a:r>
-            <a:endParaRPr/>
+          </a:p>
+          <a:p>
+            <a:pPr marL="0" lvl="0" indent="0" rtl="0">
+              <a:spcBef>
+                <a:spcPts val="0"/>
+              </a:spcBef>
+              <a:spcAft>
+                <a:spcPts val="1200"/>
+              </a:spcAft>
+              <a:buNone/>
+            </a:pPr>
+            <a:r>
+              <a:rPr lang="en-MY" sz="1600" dirty="0"/>
+              <a:t>Thread-Level Accumulation: Threads evaluate assigned candidates in parallel, store local findings in thread-private buffers, and combine them into the process-level array. </a:t>
+            </a:r>
+          </a:p>
+          <a:p>
+            <a:pPr marL="0" lvl="0" indent="0" rtl="0">
+              <a:spcBef>
+                <a:spcPts val="0"/>
+              </a:spcBef>
+              <a:spcAft>
+                <a:spcPts val="1200"/>
+              </a:spcAft>
+              <a:buNone/>
+            </a:pPr>
+            <a:r>
+              <a:rPr lang="en-MY" sz="1600" dirty="0"/>
+              <a:t>Inter-Node Gather &amp; Write: </a:t>
+            </a:r>
+            <a:r>
+              <a:rPr lang="en-MY" sz="1600" dirty="0" err="1"/>
+              <a:t>MPI_Gather</a:t>
+            </a:r>
+            <a:r>
+              <a:rPr lang="en-MY" sz="1600" dirty="0"/>
+              <a:t> and </a:t>
+            </a:r>
+            <a:r>
+              <a:rPr lang="en-MY" sz="1600" dirty="0" err="1"/>
+              <a:t>MPI_Gatherv</a:t>
+            </a:r>
+            <a:r>
+              <a:rPr lang="en-MY" sz="1600" dirty="0"/>
+              <a:t> aggregate results from all MPI processes to the root process, which merges pre-sorted segments and writes the final output to disk. </a:t>
+            </a:r>
+          </a:p>
+          <a:p>
+            <a:pPr marL="0" lvl="0" indent="0" rtl="0">
+              <a:spcBef>
+                <a:spcPts val="0"/>
+              </a:spcBef>
+              <a:spcAft>
+                <a:spcPts val="1200"/>
+              </a:spcAft>
+              <a:buNone/>
+            </a:pPr>
+            <a:endParaRPr sz="1600" dirty="0"/>
           </a:p>
         </p:txBody>
       </p:sp>
     </p:spTree>
+    <p:extLst>
+      <p:ext uri="{BB962C8B-B14F-4D97-AF65-F5344CB8AC3E}">
+        <p14:creationId xmlns:p14="http://schemas.microsoft.com/office/powerpoint/2010/main" val="1376272356"/>
+      </p:ext>
+    </p:extLst>
   </p:cSld>
   <p:clrMapOvr>
     <a:masterClrMapping/>
@@ -9576,12 +7771,18 @@
 </p:sld>
 </file>
 
-<file path=ppt/slides/slide21.xml><?xml version="1.0" encoding="utf-8"?>
+<file path=ppt/slides/slide7.xml><?xml version="1.0" encoding="utf-8"?>
 <p:sld xmlns:a="http://schemas.openxmlformats.org/drawingml/2006/main" xmlns:r="http://schemas.openxmlformats.org/officeDocument/2006/relationships" xmlns:p="http://schemas.openxmlformats.org/presentationml/2006/main">
   <p:cSld>
     <p:spTree>
       <p:nvGrpSpPr>
-        <p:cNvPr id="1" name="Shape 190"/>
+        <p:cNvPr id="1" name="Shape 59">
+          <a:extLst>
+            <a:ext uri="{FF2B5EF4-FFF2-40B4-BE49-F238E27FC236}">
+              <a16:creationId xmlns:a16="http://schemas.microsoft.com/office/drawing/2014/main" id="{42F24529-CFE0-5FA9-FB54-43F03632233F}"/>
+            </a:ext>
+          </a:extLst>
+        </p:cNvPr>
         <p:cNvGrpSpPr/>
         <p:nvPr/>
       </p:nvGrpSpPr>
@@ -9595,7 +7796,362 @@
       </p:grpSpPr>
       <p:sp>
         <p:nvSpPr>
-          <p:cNvPr id="191" name="Google Shape;191;p33"/>
+          <p:cNvPr id="60" name="Google Shape;60;p14">
+            <a:extLst>
+              <a:ext uri="{FF2B5EF4-FFF2-40B4-BE49-F238E27FC236}">
+                <a16:creationId xmlns:a16="http://schemas.microsoft.com/office/drawing/2014/main" id="{8D9EAC0E-527A-DAFF-F1FE-651C8F5C98B8}"/>
+              </a:ext>
+            </a:extLst>
+          </p:cNvPr>
+          <p:cNvSpPr txBox="1">
+            <a:spLocks noGrp="1"/>
+          </p:cNvSpPr>
+          <p:nvPr>
+            <p:ph type="title"/>
+          </p:nvPr>
+        </p:nvSpPr>
+        <p:spPr>
+          <a:xfrm>
+            <a:off x="311700" y="-1"/>
+            <a:ext cx="8520600" cy="812801"/>
+          </a:xfrm>
+          <a:prstGeom prst="rect">
+            <a:avLst/>
+          </a:prstGeom>
+        </p:spPr>
+        <p:txBody>
+          <a:bodyPr spcFirstLastPara="1" wrap="square" lIns="91425" tIns="91425" rIns="91425" bIns="91425" anchor="t" anchorCtr="0">
+            <a:noAutofit/>
+          </a:bodyPr>
+          <a:lstStyle/>
+          <a:p>
+            <a:pPr lvl="0"/>
+            <a:r>
+              <a:rPr lang="en" sz="2500" dirty="0"/>
+              <a:t>Task 2 Open MPI + Open MP Code </a:t>
+            </a:r>
+            <a:r>
+              <a:rPr lang="en-MY" sz="2500" dirty="0"/>
+              <a:t>Parallel Partitioning Schemes</a:t>
+            </a:r>
+            <a:endParaRPr sz="2500" dirty="0"/>
+          </a:p>
+        </p:txBody>
+      </p:sp>
+      <p:sp>
+        <p:nvSpPr>
+          <p:cNvPr id="61" name="Google Shape;61;p14">
+            <a:extLst>
+              <a:ext uri="{FF2B5EF4-FFF2-40B4-BE49-F238E27FC236}">
+                <a16:creationId xmlns:a16="http://schemas.microsoft.com/office/drawing/2014/main" id="{569C7C10-D39B-86AA-F7B8-36EB1C77C188}"/>
+              </a:ext>
+            </a:extLst>
+          </p:cNvPr>
+          <p:cNvSpPr txBox="1">
+            <a:spLocks noGrp="1"/>
+          </p:cNvSpPr>
+          <p:nvPr>
+            <p:ph type="body" idx="1"/>
+          </p:nvPr>
+        </p:nvSpPr>
+        <p:spPr>
+          <a:xfrm>
+            <a:off x="311700" y="1164492"/>
+            <a:ext cx="8520600" cy="3422382"/>
+          </a:xfrm>
+          <a:prstGeom prst="rect">
+            <a:avLst/>
+          </a:prstGeom>
+        </p:spPr>
+        <p:txBody>
+          <a:bodyPr spcFirstLastPara="1" wrap="square" lIns="91425" tIns="91425" rIns="91425" bIns="91425" anchor="t" anchorCtr="0">
+            <a:normAutofit/>
+          </a:bodyPr>
+          <a:lstStyle/>
+          <a:p>
+            <a:pPr marL="0" lvl="0" indent="0" algn="l" rtl="0">
+              <a:spcBef>
+                <a:spcPts val="0"/>
+              </a:spcBef>
+              <a:spcAft>
+                <a:spcPts val="1200"/>
+              </a:spcAft>
+              <a:buNone/>
+            </a:pPr>
+            <a:r>
+              <a:rPr lang="en-MY" sz="1600" dirty="0"/>
+              <a:t>Workload distribution operates across two distinct hierarchical layers to prevent thread idling and balance trial division workloads:</a:t>
+            </a:r>
+          </a:p>
+          <a:p>
+            <a:pPr marL="0" lvl="0" indent="0" algn="l" rtl="0">
+              <a:spcBef>
+                <a:spcPts val="0"/>
+              </a:spcBef>
+              <a:spcAft>
+                <a:spcPts val="1200"/>
+              </a:spcAft>
+              <a:buNone/>
+            </a:pPr>
+            <a:r>
+              <a:rPr lang="en-MY" sz="1600" dirty="0"/>
+              <a:t>Layer 1: Process-Level Distribution (Inter-Process / MPI)</a:t>
+            </a:r>
+          </a:p>
+          <a:p>
+            <a:pPr marL="0" lvl="0" indent="0" algn="l" rtl="0">
+              <a:spcBef>
+                <a:spcPts val="0"/>
+              </a:spcBef>
+              <a:spcAft>
+                <a:spcPts val="1200"/>
+              </a:spcAft>
+              <a:buNone/>
+            </a:pPr>
+            <a:r>
+              <a:rPr lang="en-MY" sz="1600" dirty="0"/>
+              <a:t>Block / Cyclic / Block-Cyclic Allocation: Candidates or candidate blocks are dealt round-robin among MPI processes based on their MPI rank r and process count P. </a:t>
+            </a:r>
+          </a:p>
+          <a:p>
+            <a:pPr marL="0" lvl="0" indent="0" algn="l" rtl="0">
+              <a:spcBef>
+                <a:spcPts val="0"/>
+              </a:spcBef>
+              <a:spcAft>
+                <a:spcPts val="1200"/>
+              </a:spcAft>
+              <a:buNone/>
+            </a:pPr>
+            <a:r>
+              <a:rPr lang="en-MY" sz="1600" dirty="0"/>
+              <a:t>Coarse Load Balancing: Ensures high-level compute balance across distinct machines or CPU sockets. </a:t>
+            </a:r>
+          </a:p>
+          <a:p>
+            <a:pPr marL="0" lvl="0" indent="0" algn="l" rtl="0">
+              <a:spcBef>
+                <a:spcPts val="0"/>
+              </a:spcBef>
+              <a:spcAft>
+                <a:spcPts val="1200"/>
+              </a:spcAft>
+              <a:buNone/>
+            </a:pPr>
+            <a:endParaRPr sz="1600" dirty="0"/>
+          </a:p>
+        </p:txBody>
+      </p:sp>
+    </p:spTree>
+    <p:extLst>
+      <p:ext uri="{BB962C8B-B14F-4D97-AF65-F5344CB8AC3E}">
+        <p14:creationId xmlns:p14="http://schemas.microsoft.com/office/powerpoint/2010/main" val="1889495280"/>
+      </p:ext>
+    </p:extLst>
+  </p:cSld>
+  <p:clrMapOvr>
+    <a:masterClrMapping/>
+  </p:clrMapOvr>
+</p:sld>
+</file>
+
+<file path=ppt/slides/slide8.xml><?xml version="1.0" encoding="utf-8"?>
+<p:sld xmlns:a="http://schemas.openxmlformats.org/drawingml/2006/main" xmlns:r="http://schemas.openxmlformats.org/officeDocument/2006/relationships" xmlns:p="http://schemas.openxmlformats.org/presentationml/2006/main">
+  <p:cSld>
+    <p:spTree>
+      <p:nvGrpSpPr>
+        <p:cNvPr id="1" name="Shape 59">
+          <a:extLst>
+            <a:ext uri="{FF2B5EF4-FFF2-40B4-BE49-F238E27FC236}">
+              <a16:creationId xmlns:a16="http://schemas.microsoft.com/office/drawing/2014/main" id="{EB5EFF8F-7746-192E-3B97-88FA9C0C4E82}"/>
+            </a:ext>
+          </a:extLst>
+        </p:cNvPr>
+        <p:cNvGrpSpPr/>
+        <p:nvPr/>
+      </p:nvGrpSpPr>
+      <p:grpSpPr>
+        <a:xfrm>
+          <a:off x="0" y="0"/>
+          <a:ext cx="0" cy="0"/>
+          <a:chOff x="0" y="0"/>
+          <a:chExt cx="0" cy="0"/>
+        </a:xfrm>
+      </p:grpSpPr>
+      <p:sp>
+        <p:nvSpPr>
+          <p:cNvPr id="60" name="Google Shape;60;p14">
+            <a:extLst>
+              <a:ext uri="{FF2B5EF4-FFF2-40B4-BE49-F238E27FC236}">
+                <a16:creationId xmlns:a16="http://schemas.microsoft.com/office/drawing/2014/main" id="{EB33225A-5173-8445-A969-FDF60F4161A9}"/>
+              </a:ext>
+            </a:extLst>
+          </p:cNvPr>
+          <p:cNvSpPr txBox="1">
+            <a:spLocks noGrp="1"/>
+          </p:cNvSpPr>
+          <p:nvPr>
+            <p:ph type="title"/>
+          </p:nvPr>
+        </p:nvSpPr>
+        <p:spPr>
+          <a:xfrm>
+            <a:off x="311700" y="-1"/>
+            <a:ext cx="8520600" cy="812801"/>
+          </a:xfrm>
+          <a:prstGeom prst="rect">
+            <a:avLst/>
+          </a:prstGeom>
+        </p:spPr>
+        <p:txBody>
+          <a:bodyPr spcFirstLastPara="1" wrap="square" lIns="91425" tIns="91425" rIns="91425" bIns="91425" anchor="t" anchorCtr="0">
+            <a:noAutofit/>
+          </a:bodyPr>
+          <a:lstStyle/>
+          <a:p>
+            <a:pPr lvl="0"/>
+            <a:r>
+              <a:rPr lang="en" sz="2500" dirty="0"/>
+              <a:t>Task 2 Open MPI + Open MP Code </a:t>
+            </a:r>
+            <a:r>
+              <a:rPr lang="en-MY" sz="2500" dirty="0"/>
+              <a:t>Parallel Partitioning Schemes</a:t>
+            </a:r>
+            <a:endParaRPr sz="2500" dirty="0"/>
+          </a:p>
+        </p:txBody>
+      </p:sp>
+      <p:sp>
+        <p:nvSpPr>
+          <p:cNvPr id="61" name="Google Shape;61;p14">
+            <a:extLst>
+              <a:ext uri="{FF2B5EF4-FFF2-40B4-BE49-F238E27FC236}">
+                <a16:creationId xmlns:a16="http://schemas.microsoft.com/office/drawing/2014/main" id="{55A918E6-4677-344F-8CA5-A01B651AAD9E}"/>
+              </a:ext>
+            </a:extLst>
+          </p:cNvPr>
+          <p:cNvSpPr txBox="1">
+            <a:spLocks noGrp="1"/>
+          </p:cNvSpPr>
+          <p:nvPr>
+            <p:ph type="body" idx="1"/>
+          </p:nvPr>
+        </p:nvSpPr>
+        <p:spPr>
+          <a:xfrm>
+            <a:off x="311700" y="1164492"/>
+            <a:ext cx="8520600" cy="3422382"/>
+          </a:xfrm>
+          <a:prstGeom prst="rect">
+            <a:avLst/>
+          </a:prstGeom>
+        </p:spPr>
+        <p:txBody>
+          <a:bodyPr spcFirstLastPara="1" wrap="square" lIns="91425" tIns="91425" rIns="91425" bIns="91425" anchor="t" anchorCtr="0">
+            <a:normAutofit/>
+          </a:bodyPr>
+          <a:lstStyle/>
+          <a:p>
+            <a:pPr marL="0" lvl="0" indent="0" algn="l" rtl="0">
+              <a:spcBef>
+                <a:spcPts val="0"/>
+              </a:spcBef>
+              <a:spcAft>
+                <a:spcPts val="1200"/>
+              </a:spcAft>
+              <a:buNone/>
+            </a:pPr>
+            <a:r>
+              <a:rPr lang="en-MY" sz="1600" dirty="0"/>
+              <a:t>Layer 2: Thread-Level Distribution (Intra-Process / OpenMP)</a:t>
+            </a:r>
+          </a:p>
+          <a:p>
+            <a:pPr marL="0" lvl="0" indent="0" algn="l" rtl="0">
+              <a:spcBef>
+                <a:spcPts val="0"/>
+              </a:spcBef>
+              <a:spcAft>
+                <a:spcPts val="1200"/>
+              </a:spcAft>
+              <a:buNone/>
+            </a:pPr>
+            <a:r>
+              <a:rPr lang="en-MY" sz="1600" dirty="0"/>
+              <a:t>Static / Dynamic / Guided Scheduling: OpenMP pragmas (#pragma </a:t>
+            </a:r>
+            <a:r>
+              <a:rPr lang="en-MY" sz="1600" dirty="0" err="1"/>
+              <a:t>omp</a:t>
+            </a:r>
+            <a:r>
+              <a:rPr lang="en-MY" sz="1600" dirty="0"/>
+              <a:t> parallel for schedule(...)) partition the process's assigned candidate chunk among local threads. </a:t>
+            </a:r>
+          </a:p>
+          <a:p>
+            <a:pPr marL="0" lvl="0" indent="0" algn="l" rtl="0">
+              <a:spcBef>
+                <a:spcPts val="0"/>
+              </a:spcBef>
+              <a:spcAft>
+                <a:spcPts val="1200"/>
+              </a:spcAft>
+              <a:buNone/>
+            </a:pPr>
+            <a:r>
+              <a:rPr lang="en-MY" sz="1600" dirty="0"/>
+              <a:t>Fine-Grained Load Balancing: Because higher candidate values require more trial division steps, dynamic or cyclic thread scheduling prevents thread starvation within the same shared-memory node. </a:t>
+            </a:r>
+          </a:p>
+        </p:txBody>
+      </p:sp>
+    </p:spTree>
+    <p:extLst>
+      <p:ext uri="{BB962C8B-B14F-4D97-AF65-F5344CB8AC3E}">
+        <p14:creationId xmlns:p14="http://schemas.microsoft.com/office/powerpoint/2010/main" val="1100287153"/>
+      </p:ext>
+    </p:extLst>
+  </p:cSld>
+  <p:clrMapOvr>
+    <a:masterClrMapping/>
+  </p:clrMapOvr>
+</p:sld>
+</file>
+
+<file path=ppt/slides/slide9.xml><?xml version="1.0" encoding="utf-8"?>
+<p:sld xmlns:a="http://schemas.openxmlformats.org/drawingml/2006/main" xmlns:r="http://schemas.openxmlformats.org/officeDocument/2006/relationships" xmlns:p="http://schemas.openxmlformats.org/presentationml/2006/main">
+  <p:cSld>
+    <p:spTree>
+      <p:nvGrpSpPr>
+        <p:cNvPr id="1" name="Shape 53">
+          <a:extLst>
+            <a:ext uri="{FF2B5EF4-FFF2-40B4-BE49-F238E27FC236}">
+              <a16:creationId xmlns:a16="http://schemas.microsoft.com/office/drawing/2014/main" id="{59E4D482-1C32-3BEA-C46A-87BD91DD2941}"/>
+            </a:ext>
+          </a:extLst>
+        </p:cNvPr>
+        <p:cNvGrpSpPr/>
+        <p:nvPr/>
+      </p:nvGrpSpPr>
+      <p:grpSpPr>
+        <a:xfrm>
+          <a:off x="0" y="0"/>
+          <a:ext cx="0" cy="0"/>
+          <a:chOff x="0" y="0"/>
+          <a:chExt cx="0" cy="0"/>
+        </a:xfrm>
+      </p:grpSpPr>
+      <p:sp>
+        <p:nvSpPr>
+          <p:cNvPr id="54" name="Google Shape;54;p13">
+            <a:extLst>
+              <a:ext uri="{FF2B5EF4-FFF2-40B4-BE49-F238E27FC236}">
+                <a16:creationId xmlns:a16="http://schemas.microsoft.com/office/drawing/2014/main" id="{A54B520D-853D-95DB-EC3F-C2B08891D3A8}"/>
+              </a:ext>
+            </a:extLst>
+          </p:cNvPr>
           <p:cNvSpPr txBox="1">
             <a:spLocks noGrp="1"/>
           </p:cNvSpPr>
@@ -9618,26 +8174,28 @@
           </a:bodyPr>
           <a:lstStyle/>
           <a:p>
-            <a:pPr marL="0" lvl="0" indent="0" algn="ctr" rtl="0">
-              <a:spcBef>
-                <a:spcPts val="0"/>
-              </a:spcBef>
-              <a:spcAft>
-                <a:spcPts val="0"/>
-              </a:spcAft>
-              <a:buNone/>
-            </a:pPr>
+            <a:pPr lvl="0"/>
             <a:r>
-              <a:rPr lang="en"/>
-              <a:t>Q&amp;A</a:t>
+              <a:rPr lang="en" sz="4000" dirty="0"/>
+              <a:t>Task 3 </a:t>
             </a:r>
-            <a:endParaRPr/>
+            <a:r>
+              <a:rPr lang="en-MY" sz="4000" dirty="0"/>
+              <a:t>Performance Evaluation</a:t>
+            </a:r>
+            <a:endParaRPr sz="4000" dirty="0"/>
           </a:p>
         </p:txBody>
       </p:sp>
       <p:sp>
         <p:nvSpPr>
-          <p:cNvPr id="192" name="Google Shape;192;p33"/>
+          <p:cNvPr id="55" name="Google Shape;55;p13">
+            <a:extLst>
+              <a:ext uri="{FF2B5EF4-FFF2-40B4-BE49-F238E27FC236}">
+                <a16:creationId xmlns:a16="http://schemas.microsoft.com/office/drawing/2014/main" id="{61633085-EB71-E833-635D-5311C4C2AC04}"/>
+              </a:ext>
+            </a:extLst>
+          </p:cNvPr>
           <p:cNvSpPr txBox="1">
             <a:spLocks noGrp="1"/>
           </p:cNvSpPr>
@@ -9670,1167 +8228,19 @@
               <a:buNone/>
             </a:pPr>
             <a:r>
-              <a:rPr lang="en"/>
-              <a:t>Thank you for your attention</a:t>
+              <a:rPr lang="en" dirty="0"/>
+              <a:t>Finding Prime Numbers</a:t>
             </a:r>
-            <a:endParaRPr/>
+            <a:endParaRPr dirty="0"/>
           </a:p>
         </p:txBody>
       </p:sp>
     </p:spTree>
-  </p:cSld>
-  <p:clrMapOvr>
-    <a:masterClrMapping/>
-  </p:clrMapOvr>
-</p:sld>
-</file>
-
-<file path=ppt/slides/slide3.xml><?xml version="1.0" encoding="utf-8"?>
-<p:sld xmlns:a="http://schemas.openxmlformats.org/drawingml/2006/main" xmlns:r="http://schemas.openxmlformats.org/officeDocument/2006/relationships" xmlns:p="http://schemas.openxmlformats.org/presentationml/2006/main">
-  <p:cSld>
-    <p:spTree>
-      <p:nvGrpSpPr>
-        <p:cNvPr id="1" name="Shape 66"/>
-        <p:cNvGrpSpPr/>
-        <p:nvPr/>
-      </p:nvGrpSpPr>
-      <p:grpSpPr>
-        <a:xfrm>
-          <a:off x="0" y="0"/>
-          <a:ext cx="0" cy="0"/>
-          <a:chOff x="0" y="0"/>
-          <a:chExt cx="0" cy="0"/>
-        </a:xfrm>
-      </p:grpSpPr>
-      <p:sp>
-        <p:nvSpPr>
-          <p:cNvPr id="67" name="Google Shape;67;p15"/>
-          <p:cNvSpPr txBox="1">
-            <a:spLocks noGrp="1"/>
-          </p:cNvSpPr>
-          <p:nvPr>
-            <p:ph type="title"/>
-          </p:nvPr>
-        </p:nvSpPr>
-        <p:spPr>
-          <a:xfrm>
-            <a:off x="311700" y="0"/>
-            <a:ext cx="8520600" cy="572700"/>
-          </a:xfrm>
-          <a:prstGeom prst="rect">
-            <a:avLst/>
-          </a:prstGeom>
-        </p:spPr>
-        <p:txBody>
-          <a:bodyPr spcFirstLastPara="1" wrap="square" lIns="91425" tIns="91425" rIns="91425" bIns="91425" anchor="t" anchorCtr="0">
-            <a:normAutofit fontScale="90000"/>
-          </a:bodyPr>
-          <a:lstStyle/>
-          <a:p>
-            <a:pPr marL="0" lvl="0" indent="0" algn="l" rtl="0">
-              <a:spcBef>
-                <a:spcPts val="0"/>
-              </a:spcBef>
-              <a:spcAft>
-                <a:spcPts val="0"/>
-              </a:spcAft>
-              <a:buNone/>
-            </a:pPr>
-            <a:r>
-              <a:rPr lang="en"/>
-              <a:t>Task 1 Serial Code (printPrimes) pt. 2</a:t>
-            </a:r>
-            <a:endParaRPr/>
-          </a:p>
-        </p:txBody>
-      </p:sp>
-      <p:sp>
-        <p:nvSpPr>
-          <p:cNvPr id="68" name="Google Shape;68;p15"/>
-          <p:cNvSpPr txBox="1">
-            <a:spLocks noGrp="1"/>
-          </p:cNvSpPr>
-          <p:nvPr>
-            <p:ph type="body" idx="1"/>
-          </p:nvPr>
-        </p:nvSpPr>
-        <p:spPr>
-          <a:xfrm>
-            <a:off x="5278300" y="862115"/>
-            <a:ext cx="3170400" cy="3745500"/>
-          </a:xfrm>
-          <a:prstGeom prst="rect">
-            <a:avLst/>
-          </a:prstGeom>
-        </p:spPr>
-        <p:txBody>
-          <a:bodyPr spcFirstLastPara="1" wrap="square" lIns="91425" tIns="91425" rIns="91425" bIns="91425" anchor="t" anchorCtr="0">
-            <a:normAutofit/>
-          </a:bodyPr>
-          <a:lstStyle/>
-          <a:p>
-            <a:pPr marL="0" lvl="0" indent="0" algn="l" rtl="0">
-              <a:spcBef>
-                <a:spcPts val="0"/>
-              </a:spcBef>
-              <a:spcAft>
-                <a:spcPts val="1200"/>
-              </a:spcAft>
-              <a:buNone/>
-            </a:pPr>
-            <a:r>
-              <a:rPr lang="en"/>
-              <a:t>Outputs primes to a text file (.txt) if k is more than 100.</a:t>
-            </a:r>
-            <a:endParaRPr/>
-          </a:p>
-        </p:txBody>
-      </p:sp>
-      <p:pic>
-        <p:nvPicPr>
-          <p:cNvPr id="69" name="Google Shape;69;p15"/>
-          <p:cNvPicPr preferRelativeResize="0"/>
-          <p:nvPr/>
-        </p:nvPicPr>
-        <p:blipFill>
-          <a:blip r:embed="rId3">
-            <a:alphaModFix/>
-          </a:blip>
-          <a:stretch>
-            <a:fillRect/>
-          </a:stretch>
-        </p:blipFill>
-        <p:spPr>
-          <a:xfrm>
-            <a:off x="705750" y="841375"/>
-            <a:ext cx="4044274" cy="3878724"/>
-          </a:xfrm>
-          <a:prstGeom prst="rect">
-            <a:avLst/>
-          </a:prstGeom>
-          <a:noFill/>
-          <a:ln>
-            <a:noFill/>
-          </a:ln>
-        </p:spPr>
-      </p:pic>
-    </p:spTree>
-  </p:cSld>
-  <p:clrMapOvr>
-    <a:masterClrMapping/>
-  </p:clrMapOvr>
-</p:sld>
-</file>
-
-<file path=ppt/slides/slide4.xml><?xml version="1.0" encoding="utf-8"?>
-<p:sld xmlns:a="http://schemas.openxmlformats.org/drawingml/2006/main" xmlns:r="http://schemas.openxmlformats.org/officeDocument/2006/relationships" xmlns:p="http://schemas.openxmlformats.org/presentationml/2006/main">
-  <p:cSld>
-    <p:spTree>
-      <p:nvGrpSpPr>
-        <p:cNvPr id="1" name="Shape 73"/>
-        <p:cNvGrpSpPr/>
-        <p:nvPr/>
-      </p:nvGrpSpPr>
-      <p:grpSpPr>
-        <a:xfrm>
-          <a:off x="0" y="0"/>
-          <a:ext cx="0" cy="0"/>
-          <a:chOff x="0" y="0"/>
-          <a:chExt cx="0" cy="0"/>
-        </a:xfrm>
-      </p:grpSpPr>
-      <p:sp>
-        <p:nvSpPr>
-          <p:cNvPr id="74" name="Google Shape;74;p16"/>
-          <p:cNvSpPr txBox="1">
-            <a:spLocks noGrp="1"/>
-          </p:cNvSpPr>
-          <p:nvPr>
-            <p:ph type="title"/>
-          </p:nvPr>
-        </p:nvSpPr>
-        <p:spPr>
-          <a:xfrm>
-            <a:off x="311700" y="0"/>
-            <a:ext cx="8520600" cy="572700"/>
-          </a:xfrm>
-          <a:prstGeom prst="rect">
-            <a:avLst/>
-          </a:prstGeom>
-        </p:spPr>
-        <p:txBody>
-          <a:bodyPr spcFirstLastPara="1" wrap="square" lIns="91425" tIns="91425" rIns="91425" bIns="91425" anchor="t" anchorCtr="0">
-            <a:normAutofit fontScale="90000"/>
-          </a:bodyPr>
-          <a:lstStyle/>
-          <a:p>
-            <a:pPr marL="0" lvl="0" indent="0" algn="l" rtl="0">
-              <a:spcBef>
-                <a:spcPts val="0"/>
-              </a:spcBef>
-              <a:spcAft>
-                <a:spcPts val="0"/>
-              </a:spcAft>
-              <a:buNone/>
-            </a:pPr>
-            <a:r>
-              <a:rPr lang="en"/>
-              <a:t>Task 1 Serial Code (isPrime)</a:t>
-            </a:r>
-            <a:endParaRPr/>
-          </a:p>
-        </p:txBody>
-      </p:sp>
-      <p:sp>
-        <p:nvSpPr>
-          <p:cNvPr id="75" name="Google Shape;75;p16"/>
-          <p:cNvSpPr txBox="1">
-            <a:spLocks noGrp="1"/>
-          </p:cNvSpPr>
-          <p:nvPr>
-            <p:ph type="body" idx="1"/>
-          </p:nvPr>
-        </p:nvSpPr>
-        <p:spPr>
-          <a:xfrm>
-            <a:off x="6051300" y="841375"/>
-            <a:ext cx="2781000" cy="3745500"/>
-          </a:xfrm>
-          <a:prstGeom prst="rect">
-            <a:avLst/>
-          </a:prstGeom>
-        </p:spPr>
-        <p:txBody>
-          <a:bodyPr spcFirstLastPara="1" wrap="square" lIns="91425" tIns="91425" rIns="91425" bIns="91425" anchor="t" anchorCtr="0">
-            <a:normAutofit/>
-          </a:bodyPr>
-          <a:lstStyle/>
-          <a:p>
-            <a:pPr marL="0" lvl="0" indent="0" algn="l" rtl="0">
-              <a:spcBef>
-                <a:spcPts val="0"/>
-              </a:spcBef>
-              <a:spcAft>
-                <a:spcPts val="0"/>
-              </a:spcAft>
-              <a:buNone/>
-            </a:pPr>
-            <a:r>
-              <a:rPr lang="en"/>
-              <a:t>Coded instant return values for 0, 1, 2, and even numbers.</a:t>
-            </a:r>
-            <a:endParaRPr/>
-          </a:p>
-          <a:p>
-            <a:pPr marL="0" lvl="0" indent="0" algn="l" rtl="0">
-              <a:spcBef>
-                <a:spcPts val="1200"/>
-              </a:spcBef>
-              <a:spcAft>
-                <a:spcPts val="0"/>
-              </a:spcAft>
-              <a:buNone/>
-            </a:pPr>
-            <a:r>
-              <a:rPr lang="en"/>
-              <a:t>Starts from 3 in the loop equivalently up to the square root of k.</a:t>
-            </a:r>
-            <a:endParaRPr/>
-          </a:p>
-          <a:p>
-            <a:pPr marL="0" lvl="0" indent="0" algn="l" rtl="0">
-              <a:spcBef>
-                <a:spcPts val="1200"/>
-              </a:spcBef>
-              <a:spcAft>
-                <a:spcPts val="1200"/>
-              </a:spcAft>
-              <a:buNone/>
-            </a:pPr>
-            <a:r>
-              <a:rPr lang="en"/>
-              <a:t>Increments by 2 to skip even numbers.</a:t>
-            </a:r>
-            <a:endParaRPr/>
-          </a:p>
-        </p:txBody>
-      </p:sp>
-      <p:pic>
-        <p:nvPicPr>
-          <p:cNvPr id="76" name="Google Shape;76;p16"/>
-          <p:cNvPicPr preferRelativeResize="0"/>
-          <p:nvPr/>
-        </p:nvPicPr>
-        <p:blipFill>
-          <a:blip r:embed="rId3">
-            <a:alphaModFix/>
-          </a:blip>
-          <a:stretch>
-            <a:fillRect/>
-          </a:stretch>
-        </p:blipFill>
-        <p:spPr>
-          <a:xfrm>
-            <a:off x="311700" y="841312"/>
-            <a:ext cx="5503201" cy="3745624"/>
-          </a:xfrm>
-          <a:prstGeom prst="rect">
-            <a:avLst/>
-          </a:prstGeom>
-          <a:noFill/>
-          <a:ln>
-            <a:noFill/>
-          </a:ln>
-        </p:spPr>
-      </p:pic>
-    </p:spTree>
-  </p:cSld>
-  <p:clrMapOvr>
-    <a:masterClrMapping/>
-  </p:clrMapOvr>
-</p:sld>
-</file>
-
-<file path=ppt/slides/slide5.xml><?xml version="1.0" encoding="utf-8"?>
-<p:sld xmlns:a="http://schemas.openxmlformats.org/drawingml/2006/main" xmlns:r="http://schemas.openxmlformats.org/officeDocument/2006/relationships" xmlns:p="http://schemas.openxmlformats.org/presentationml/2006/main">
-  <p:cSld>
-    <p:spTree>
-      <p:nvGrpSpPr>
-        <p:cNvPr id="1" name="Shape 80"/>
-        <p:cNvGrpSpPr/>
-        <p:nvPr/>
-      </p:nvGrpSpPr>
-      <p:grpSpPr>
-        <a:xfrm>
-          <a:off x="0" y="0"/>
-          <a:ext cx="0" cy="0"/>
-          <a:chOff x="0" y="0"/>
-          <a:chExt cx="0" cy="0"/>
-        </a:xfrm>
-      </p:grpSpPr>
-      <p:sp>
-        <p:nvSpPr>
-          <p:cNvPr id="81" name="Google Shape;81;p17"/>
-          <p:cNvSpPr txBox="1">
-            <a:spLocks noGrp="1"/>
-          </p:cNvSpPr>
-          <p:nvPr>
-            <p:ph type="title"/>
-          </p:nvPr>
-        </p:nvSpPr>
-        <p:spPr>
-          <a:xfrm>
-            <a:off x="311700" y="0"/>
-            <a:ext cx="8520600" cy="572700"/>
-          </a:xfrm>
-          <a:prstGeom prst="rect">
-            <a:avLst/>
-          </a:prstGeom>
-        </p:spPr>
-        <p:txBody>
-          <a:bodyPr spcFirstLastPara="1" wrap="square" lIns="91425" tIns="91425" rIns="91425" bIns="91425" anchor="t" anchorCtr="0">
-            <a:normAutofit fontScale="90000"/>
-          </a:bodyPr>
-          <a:lstStyle/>
-          <a:p>
-            <a:pPr marL="0" lvl="0" indent="0" algn="l" rtl="0">
-              <a:spcBef>
-                <a:spcPts val="0"/>
-              </a:spcBef>
-              <a:spcAft>
-                <a:spcPts val="0"/>
-              </a:spcAft>
-              <a:buNone/>
-            </a:pPr>
-            <a:r>
-              <a:rPr lang="en"/>
-              <a:t>Task 1 Serial Code (main) pt. 1</a:t>
-            </a:r>
-            <a:endParaRPr/>
-          </a:p>
-        </p:txBody>
-      </p:sp>
-      <p:sp>
-        <p:nvSpPr>
-          <p:cNvPr id="82" name="Google Shape;82;p17"/>
-          <p:cNvSpPr txBox="1">
-            <a:spLocks noGrp="1"/>
-          </p:cNvSpPr>
-          <p:nvPr>
-            <p:ph type="body" idx="1"/>
-          </p:nvPr>
-        </p:nvSpPr>
-        <p:spPr>
-          <a:xfrm>
-            <a:off x="5408350" y="794350"/>
-            <a:ext cx="2781000" cy="3745500"/>
-          </a:xfrm>
-          <a:prstGeom prst="rect">
-            <a:avLst/>
-          </a:prstGeom>
-        </p:spPr>
-        <p:txBody>
-          <a:bodyPr spcFirstLastPara="1" wrap="square" lIns="91425" tIns="91425" rIns="91425" bIns="91425" anchor="t" anchorCtr="0">
-            <a:normAutofit/>
-          </a:bodyPr>
-          <a:lstStyle/>
-          <a:p>
-            <a:pPr marL="0" lvl="0" indent="0" algn="l" rtl="0">
-              <a:spcBef>
-                <a:spcPts val="0"/>
-              </a:spcBef>
-              <a:spcAft>
-                <a:spcPts val="0"/>
-              </a:spcAft>
-              <a:buNone/>
-            </a:pPr>
-            <a:r>
-              <a:rPr lang="en"/>
-              <a:t>Scans user input, returns early if the input is 2 or less.</a:t>
-            </a:r>
-            <a:endParaRPr/>
-          </a:p>
-          <a:p>
-            <a:pPr marL="0" lvl="0" indent="0" algn="l" rtl="0">
-              <a:spcBef>
-                <a:spcPts val="1200"/>
-              </a:spcBef>
-              <a:spcAft>
-                <a:spcPts val="0"/>
-              </a:spcAft>
-              <a:buNone/>
-            </a:pPr>
-            <a:r>
-              <a:rPr lang="en"/>
-              <a:t>Uses calloc to store primes.</a:t>
-            </a:r>
-            <a:endParaRPr/>
-          </a:p>
-          <a:p>
-            <a:pPr marL="0" lvl="0" indent="0" algn="l" rtl="0">
-              <a:spcBef>
-                <a:spcPts val="1200"/>
-              </a:spcBef>
-              <a:spcAft>
-                <a:spcPts val="1200"/>
-              </a:spcAft>
-              <a:buNone/>
-            </a:pPr>
-            <a:r>
-              <a:rPr lang="en"/>
-              <a:t>Initialises the default value for is_prime array.</a:t>
-            </a:r>
-            <a:endParaRPr/>
-          </a:p>
-        </p:txBody>
-      </p:sp>
-      <p:pic>
-        <p:nvPicPr>
-          <p:cNvPr id="83" name="Google Shape;83;p17"/>
-          <p:cNvPicPr preferRelativeResize="0"/>
-          <p:nvPr/>
-        </p:nvPicPr>
-        <p:blipFill>
-          <a:blip r:embed="rId3">
-            <a:alphaModFix/>
-          </a:blip>
-          <a:stretch>
-            <a:fillRect/>
-          </a:stretch>
-        </p:blipFill>
-        <p:spPr>
-          <a:xfrm>
-            <a:off x="311700" y="794350"/>
-            <a:ext cx="4582924" cy="4044351"/>
-          </a:xfrm>
-          <a:prstGeom prst="rect">
-            <a:avLst/>
-          </a:prstGeom>
-          <a:noFill/>
-          <a:ln>
-            <a:noFill/>
-          </a:ln>
-        </p:spPr>
-      </p:pic>
-    </p:spTree>
-  </p:cSld>
-  <p:clrMapOvr>
-    <a:masterClrMapping/>
-  </p:clrMapOvr>
-</p:sld>
-</file>
-
-<file path=ppt/slides/slide6.xml><?xml version="1.0" encoding="utf-8"?>
-<p:sld xmlns:a="http://schemas.openxmlformats.org/drawingml/2006/main" xmlns:r="http://schemas.openxmlformats.org/officeDocument/2006/relationships" xmlns:p="http://schemas.openxmlformats.org/presentationml/2006/main">
-  <p:cSld>
-    <p:spTree>
-      <p:nvGrpSpPr>
-        <p:cNvPr id="1" name="Shape 87"/>
-        <p:cNvGrpSpPr/>
-        <p:nvPr/>
-      </p:nvGrpSpPr>
-      <p:grpSpPr>
-        <a:xfrm>
-          <a:off x="0" y="0"/>
-          <a:ext cx="0" cy="0"/>
-          <a:chOff x="0" y="0"/>
-          <a:chExt cx="0" cy="0"/>
-        </a:xfrm>
-      </p:grpSpPr>
-      <p:sp>
-        <p:nvSpPr>
-          <p:cNvPr id="88" name="Google Shape;88;p18"/>
-          <p:cNvSpPr txBox="1">
-            <a:spLocks noGrp="1"/>
-          </p:cNvSpPr>
-          <p:nvPr>
-            <p:ph type="title"/>
-          </p:nvPr>
-        </p:nvSpPr>
-        <p:spPr>
-          <a:xfrm>
-            <a:off x="311700" y="0"/>
-            <a:ext cx="8520600" cy="572700"/>
-          </a:xfrm>
-          <a:prstGeom prst="rect">
-            <a:avLst/>
-          </a:prstGeom>
-        </p:spPr>
-        <p:txBody>
-          <a:bodyPr spcFirstLastPara="1" wrap="square" lIns="91425" tIns="91425" rIns="91425" bIns="91425" anchor="t" anchorCtr="0">
-            <a:normAutofit fontScale="90000"/>
-          </a:bodyPr>
-          <a:lstStyle/>
-          <a:p>
-            <a:pPr marL="0" lvl="0" indent="0" algn="l" rtl="0">
-              <a:spcBef>
-                <a:spcPts val="0"/>
-              </a:spcBef>
-              <a:spcAft>
-                <a:spcPts val="0"/>
-              </a:spcAft>
-              <a:buNone/>
-            </a:pPr>
-            <a:r>
-              <a:rPr lang="en"/>
-              <a:t>Task 1 Serial Code (main) pt. 2</a:t>
-            </a:r>
-            <a:endParaRPr/>
-          </a:p>
-        </p:txBody>
-      </p:sp>
-      <p:sp>
-        <p:nvSpPr>
-          <p:cNvPr id="89" name="Google Shape;89;p18"/>
-          <p:cNvSpPr txBox="1">
-            <a:spLocks noGrp="1"/>
-          </p:cNvSpPr>
-          <p:nvPr>
-            <p:ph type="body" idx="1"/>
-          </p:nvPr>
-        </p:nvSpPr>
-        <p:spPr>
-          <a:xfrm>
-            <a:off x="5812775" y="835875"/>
-            <a:ext cx="2781000" cy="3745500"/>
-          </a:xfrm>
-          <a:prstGeom prst="rect">
-            <a:avLst/>
-          </a:prstGeom>
-        </p:spPr>
-        <p:txBody>
-          <a:bodyPr spcFirstLastPara="1" wrap="square" lIns="91425" tIns="91425" rIns="91425" bIns="91425" anchor="t" anchorCtr="0">
-            <a:normAutofit/>
-          </a:bodyPr>
-          <a:lstStyle/>
-          <a:p>
-            <a:pPr marL="0" lvl="0" indent="0" algn="l" rtl="0">
-              <a:spcBef>
-                <a:spcPts val="0"/>
-              </a:spcBef>
-              <a:spcAft>
-                <a:spcPts val="0"/>
-              </a:spcAft>
-              <a:buNone/>
-            </a:pPr>
-            <a:r>
-              <a:rPr lang="en"/>
-              <a:t>Gets time before and after the computation to get the most accurate computational time.</a:t>
-            </a:r>
-            <a:endParaRPr/>
-          </a:p>
-          <a:p>
-            <a:pPr marL="0" lvl="0" indent="0" algn="l" rtl="0">
-              <a:spcBef>
-                <a:spcPts val="1200"/>
-              </a:spcBef>
-              <a:spcAft>
-                <a:spcPts val="0"/>
-              </a:spcAft>
-              <a:buClr>
-                <a:schemeClr val="dk1"/>
-              </a:buClr>
-              <a:buSzPts val="1100"/>
-              <a:buFont typeface="Arial"/>
-              <a:buNone/>
-            </a:pPr>
-            <a:r>
-              <a:rPr lang="en"/>
-              <a:t>Starts from 3 in the loop up to k.</a:t>
-            </a:r>
-            <a:endParaRPr/>
-          </a:p>
-          <a:p>
-            <a:pPr marL="0" lvl="0" indent="0" algn="l" rtl="0">
-              <a:spcBef>
-                <a:spcPts val="1200"/>
-              </a:spcBef>
-              <a:spcAft>
-                <a:spcPts val="0"/>
-              </a:spcAft>
-              <a:buClr>
-                <a:schemeClr val="dk1"/>
-              </a:buClr>
-              <a:buSzPts val="1100"/>
-              <a:buFont typeface="Arial"/>
-              <a:buNone/>
-            </a:pPr>
-            <a:r>
-              <a:rPr lang="en"/>
-              <a:t>Increments by 2 to skip even numbers.</a:t>
-            </a:r>
-            <a:endParaRPr/>
-          </a:p>
-          <a:p>
-            <a:pPr marL="0" lvl="0" indent="0" algn="l" rtl="0">
-              <a:spcBef>
-                <a:spcPts val="1200"/>
-              </a:spcBef>
-              <a:spcAft>
-                <a:spcPts val="1200"/>
-              </a:spcAft>
-              <a:buNone/>
-            </a:pPr>
-            <a:endParaRPr/>
-          </a:p>
-        </p:txBody>
-      </p:sp>
-      <p:pic>
-        <p:nvPicPr>
-          <p:cNvPr id="90" name="Google Shape;90;p18"/>
-          <p:cNvPicPr preferRelativeResize="0"/>
-          <p:nvPr/>
-        </p:nvPicPr>
-        <p:blipFill>
-          <a:blip r:embed="rId3">
-            <a:alphaModFix/>
-          </a:blip>
-          <a:stretch>
-            <a:fillRect/>
-          </a:stretch>
-        </p:blipFill>
-        <p:spPr>
-          <a:xfrm>
-            <a:off x="311700" y="835875"/>
-            <a:ext cx="5281799" cy="3471750"/>
-          </a:xfrm>
-          <a:prstGeom prst="rect">
-            <a:avLst/>
-          </a:prstGeom>
-          <a:noFill/>
-          <a:ln>
-            <a:noFill/>
-          </a:ln>
-        </p:spPr>
-      </p:pic>
-    </p:spTree>
-  </p:cSld>
-  <p:clrMapOvr>
-    <a:masterClrMapping/>
-  </p:clrMapOvr>
-</p:sld>
-</file>
-
-<file path=ppt/slides/slide7.xml><?xml version="1.0" encoding="utf-8"?>
-<p:sld xmlns:a="http://schemas.openxmlformats.org/drawingml/2006/main" xmlns:r="http://schemas.openxmlformats.org/officeDocument/2006/relationships" xmlns:p="http://schemas.openxmlformats.org/presentationml/2006/main">
-  <p:cSld>
-    <p:spTree>
-      <p:nvGrpSpPr>
-        <p:cNvPr id="1" name="Shape 94"/>
-        <p:cNvGrpSpPr/>
-        <p:nvPr/>
-      </p:nvGrpSpPr>
-      <p:grpSpPr>
-        <a:xfrm>
-          <a:off x="0" y="0"/>
-          <a:ext cx="0" cy="0"/>
-          <a:chOff x="0" y="0"/>
-          <a:chExt cx="0" cy="0"/>
-        </a:xfrm>
-      </p:grpSpPr>
-      <p:sp>
-        <p:nvSpPr>
-          <p:cNvPr id="95" name="Google Shape;95;p19"/>
-          <p:cNvSpPr txBox="1">
-            <a:spLocks noGrp="1"/>
-          </p:cNvSpPr>
-          <p:nvPr>
-            <p:ph type="title"/>
-          </p:nvPr>
-        </p:nvSpPr>
-        <p:spPr>
-          <a:xfrm>
-            <a:off x="311700" y="0"/>
-            <a:ext cx="8520600" cy="572700"/>
-          </a:xfrm>
-          <a:prstGeom prst="rect">
-            <a:avLst/>
-          </a:prstGeom>
-        </p:spPr>
-        <p:txBody>
-          <a:bodyPr spcFirstLastPara="1" wrap="square" lIns="91425" tIns="91425" rIns="91425" bIns="91425" anchor="t" anchorCtr="0">
-            <a:normAutofit fontScale="90000"/>
-          </a:bodyPr>
-          <a:lstStyle/>
-          <a:p>
-            <a:pPr marL="0" lvl="0" indent="0" algn="l" rtl="0">
-              <a:spcBef>
-                <a:spcPts val="0"/>
-              </a:spcBef>
-              <a:spcAft>
-                <a:spcPts val="0"/>
-              </a:spcAft>
-              <a:buNone/>
-            </a:pPr>
-            <a:r>
-              <a:rPr lang="en"/>
-              <a:t>Task 2 and 3 Basic info </a:t>
-            </a:r>
-            <a:endParaRPr/>
-          </a:p>
-        </p:txBody>
-      </p:sp>
-      <p:sp>
-        <p:nvSpPr>
-          <p:cNvPr id="96" name="Google Shape;96;p19"/>
-          <p:cNvSpPr txBox="1">
-            <a:spLocks noGrp="1"/>
-          </p:cNvSpPr>
-          <p:nvPr>
-            <p:ph type="body" idx="1"/>
-          </p:nvPr>
-        </p:nvSpPr>
-        <p:spPr>
-          <a:xfrm>
-            <a:off x="311700" y="835875"/>
-            <a:ext cx="7941600" cy="3745500"/>
-          </a:xfrm>
-          <a:prstGeom prst="rect">
-            <a:avLst/>
-          </a:prstGeom>
-        </p:spPr>
-        <p:txBody>
-          <a:bodyPr spcFirstLastPara="1" wrap="square" lIns="91425" tIns="91425" rIns="91425" bIns="91425" anchor="t" anchorCtr="0">
-            <a:normAutofit/>
-          </a:bodyPr>
-          <a:lstStyle/>
-          <a:p>
-            <a:pPr marL="0" lvl="0" indent="0" algn="l" rtl="0">
-              <a:spcBef>
-                <a:spcPts val="0"/>
-              </a:spcBef>
-              <a:spcAft>
-                <a:spcPts val="0"/>
-              </a:spcAft>
-              <a:buNone/>
-            </a:pPr>
-            <a:r>
-              <a:rPr lang="en"/>
-              <a:t>Majority of the code is the same as task 1 for both task 2 and task 3.</a:t>
-            </a:r>
-            <a:endParaRPr/>
-          </a:p>
-          <a:p>
-            <a:pPr marL="0" lvl="0" indent="0" algn="l" rtl="0">
-              <a:spcBef>
-                <a:spcPts val="1200"/>
-              </a:spcBef>
-              <a:spcAft>
-                <a:spcPts val="0"/>
-              </a:spcAft>
-              <a:buNone/>
-            </a:pPr>
-            <a:r>
-              <a:rPr lang="en"/>
-              <a:t>Additional functions will be mentioned.</a:t>
-            </a:r>
-            <a:endParaRPr/>
-          </a:p>
-          <a:p>
-            <a:pPr marL="0" lvl="0" indent="0" algn="l" rtl="0">
-              <a:spcBef>
-                <a:spcPts val="1200"/>
-              </a:spcBef>
-              <a:spcAft>
-                <a:spcPts val="0"/>
-              </a:spcAft>
-              <a:buNone/>
-            </a:pPr>
-            <a:r>
-              <a:rPr lang="en"/>
-              <a:t>Prime storing and printing logic is the same.</a:t>
-            </a:r>
-            <a:endParaRPr/>
-          </a:p>
-          <a:p>
-            <a:pPr marL="0" lvl="0" indent="0" algn="l" rtl="0">
-              <a:spcBef>
-                <a:spcPts val="1200"/>
-              </a:spcBef>
-              <a:spcAft>
-                <a:spcPts val="0"/>
-              </a:spcAft>
-              <a:buNone/>
-            </a:pPr>
-            <a:r>
-              <a:rPr lang="en"/>
-              <a:t>Only difference is the computational logic so that measurements and testing will be more consistent (more constant variables as to not affect outcome).</a:t>
-            </a:r>
-            <a:endParaRPr/>
-          </a:p>
-          <a:p>
-            <a:pPr marL="0" lvl="0" indent="0" algn="l" rtl="0">
-              <a:spcBef>
-                <a:spcPts val="1200"/>
-              </a:spcBef>
-              <a:spcAft>
-                <a:spcPts val="0"/>
-              </a:spcAft>
-              <a:buNone/>
-            </a:pPr>
-            <a:r>
-              <a:rPr lang="en"/>
-              <a:t>Code is assumed to be the same if not mentioned.</a:t>
-            </a:r>
-            <a:endParaRPr/>
-          </a:p>
-          <a:p>
-            <a:pPr marL="0" lvl="0" indent="0" algn="l" rtl="0">
-              <a:spcBef>
-                <a:spcPts val="1200"/>
-              </a:spcBef>
-              <a:spcAft>
-                <a:spcPts val="1200"/>
-              </a:spcAft>
-              <a:buNone/>
-            </a:pPr>
-            <a:endParaRPr/>
-          </a:p>
-        </p:txBody>
-      </p:sp>
-    </p:spTree>
-  </p:cSld>
-  <p:clrMapOvr>
-    <a:masterClrMapping/>
-  </p:clrMapOvr>
-</p:sld>
-</file>
-
-<file path=ppt/slides/slide8.xml><?xml version="1.0" encoding="utf-8"?>
-<p:sld xmlns:a="http://schemas.openxmlformats.org/drawingml/2006/main" xmlns:r="http://schemas.openxmlformats.org/officeDocument/2006/relationships" xmlns:p="http://schemas.openxmlformats.org/presentationml/2006/main">
-  <p:cSld>
-    <p:spTree>
-      <p:nvGrpSpPr>
-        <p:cNvPr id="1" name="Shape 100"/>
-        <p:cNvGrpSpPr/>
-        <p:nvPr/>
-      </p:nvGrpSpPr>
-      <p:grpSpPr>
-        <a:xfrm>
-          <a:off x="0" y="0"/>
-          <a:ext cx="0" cy="0"/>
-          <a:chOff x="0" y="0"/>
-          <a:chExt cx="0" cy="0"/>
-        </a:xfrm>
-      </p:grpSpPr>
-      <p:sp>
-        <p:nvSpPr>
-          <p:cNvPr id="101" name="Google Shape;101;p20"/>
-          <p:cNvSpPr txBox="1">
-            <a:spLocks noGrp="1"/>
-          </p:cNvSpPr>
-          <p:nvPr>
-            <p:ph type="title"/>
-          </p:nvPr>
-        </p:nvSpPr>
-        <p:spPr>
-          <a:xfrm>
-            <a:off x="311700" y="9455"/>
-            <a:ext cx="8520600" cy="572700"/>
-          </a:xfrm>
-          <a:prstGeom prst="rect">
-            <a:avLst/>
-          </a:prstGeom>
-        </p:spPr>
-        <p:txBody>
-          <a:bodyPr spcFirstLastPara="1" wrap="square" lIns="91425" tIns="91425" rIns="91425" bIns="91425" anchor="t" anchorCtr="0">
-            <a:normAutofit fontScale="90000"/>
-          </a:bodyPr>
-          <a:lstStyle/>
-          <a:p>
-            <a:pPr marL="0" lvl="0" indent="0" algn="l" rtl="0">
-              <a:spcBef>
-                <a:spcPts val="0"/>
-              </a:spcBef>
-              <a:spcAft>
-                <a:spcPts val="0"/>
-              </a:spcAft>
-              <a:buNone/>
-            </a:pPr>
-            <a:r>
-              <a:rPr lang="en"/>
-              <a:t>Task 2 POSIX Threads (ThreadData struct)</a:t>
-            </a:r>
-            <a:endParaRPr/>
-          </a:p>
-        </p:txBody>
-      </p:sp>
-      <p:sp>
-        <p:nvSpPr>
-          <p:cNvPr id="102" name="Google Shape;102;p20"/>
-          <p:cNvSpPr txBox="1">
-            <a:spLocks noGrp="1"/>
-          </p:cNvSpPr>
-          <p:nvPr>
-            <p:ph type="body" idx="1"/>
-          </p:nvPr>
-        </p:nvSpPr>
-        <p:spPr>
-          <a:xfrm>
-            <a:off x="5124600" y="835875"/>
-            <a:ext cx="3128700" cy="3745500"/>
-          </a:xfrm>
-          <a:prstGeom prst="rect">
-            <a:avLst/>
-          </a:prstGeom>
-        </p:spPr>
-        <p:txBody>
-          <a:bodyPr spcFirstLastPara="1" wrap="square" lIns="91425" tIns="91425" rIns="91425" bIns="91425" anchor="t" anchorCtr="0">
-            <a:normAutofit/>
-          </a:bodyPr>
-          <a:lstStyle/>
-          <a:p>
-            <a:pPr marL="0" lvl="0" indent="0" algn="l" rtl="0">
-              <a:spcBef>
-                <a:spcPts val="0"/>
-              </a:spcBef>
-              <a:spcAft>
-                <a:spcPts val="0"/>
-              </a:spcAft>
-              <a:buNone/>
-            </a:pPr>
-            <a:r>
-              <a:rPr lang="en"/>
-              <a:t>Structure to hold thread data</a:t>
-            </a:r>
-            <a:endParaRPr/>
-          </a:p>
-          <a:p>
-            <a:pPr marL="0" lvl="0" indent="0" algn="l" rtl="0">
-              <a:spcBef>
-                <a:spcPts val="1200"/>
-              </a:spcBef>
-              <a:spcAft>
-                <a:spcPts val="1200"/>
-              </a:spcAft>
-              <a:buNone/>
-            </a:pPr>
-            <a:endParaRPr/>
-          </a:p>
-        </p:txBody>
-      </p:sp>
-      <p:pic>
-        <p:nvPicPr>
-          <p:cNvPr id="103" name="Google Shape;103;p20"/>
-          <p:cNvPicPr preferRelativeResize="0"/>
-          <p:nvPr/>
-        </p:nvPicPr>
-        <p:blipFill>
-          <a:blip r:embed="rId3">
-            <a:alphaModFix/>
-          </a:blip>
-          <a:stretch>
-            <a:fillRect/>
-          </a:stretch>
-        </p:blipFill>
-        <p:spPr>
-          <a:xfrm>
-            <a:off x="311700" y="835875"/>
-            <a:ext cx="4343400" cy="2209800"/>
-          </a:xfrm>
-          <a:prstGeom prst="rect">
-            <a:avLst/>
-          </a:prstGeom>
-          <a:noFill/>
-          <a:ln>
-            <a:noFill/>
-          </a:ln>
-        </p:spPr>
-      </p:pic>
-    </p:spTree>
-  </p:cSld>
-  <p:clrMapOvr>
-    <a:masterClrMapping/>
-  </p:clrMapOvr>
-</p:sld>
-</file>
-
-<file path=ppt/slides/slide9.xml><?xml version="1.0" encoding="utf-8"?>
-<p:sld xmlns:a="http://schemas.openxmlformats.org/drawingml/2006/main" xmlns:r="http://schemas.openxmlformats.org/officeDocument/2006/relationships" xmlns:p="http://schemas.openxmlformats.org/presentationml/2006/main">
-  <p:cSld>
-    <p:spTree>
-      <p:nvGrpSpPr>
-        <p:cNvPr id="1" name="Shape 107"/>
-        <p:cNvGrpSpPr/>
-        <p:nvPr/>
-      </p:nvGrpSpPr>
-      <p:grpSpPr>
-        <a:xfrm>
-          <a:off x="0" y="0"/>
-          <a:ext cx="0" cy="0"/>
-          <a:chOff x="0" y="0"/>
-          <a:chExt cx="0" cy="0"/>
-        </a:xfrm>
-      </p:grpSpPr>
-      <p:sp>
-        <p:nvSpPr>
-          <p:cNvPr id="108" name="Google Shape;108;p21"/>
-          <p:cNvSpPr txBox="1">
-            <a:spLocks noGrp="1"/>
-          </p:cNvSpPr>
-          <p:nvPr>
-            <p:ph type="title"/>
-          </p:nvPr>
-        </p:nvSpPr>
-        <p:spPr>
-          <a:xfrm>
-            <a:off x="311700" y="0"/>
-            <a:ext cx="8520600" cy="572700"/>
-          </a:xfrm>
-          <a:prstGeom prst="rect">
-            <a:avLst/>
-          </a:prstGeom>
-        </p:spPr>
-        <p:txBody>
-          <a:bodyPr spcFirstLastPara="1" wrap="square" lIns="91425" tIns="91425" rIns="91425" bIns="91425" anchor="t" anchorCtr="0">
-            <a:normAutofit fontScale="90000"/>
-          </a:bodyPr>
-          <a:lstStyle/>
-          <a:p>
-            <a:pPr marL="0" lvl="0" indent="0" algn="l" rtl="0">
-              <a:spcBef>
-                <a:spcPts val="0"/>
-              </a:spcBef>
-              <a:spcAft>
-                <a:spcPts val="0"/>
-              </a:spcAft>
-              <a:buNone/>
-            </a:pPr>
-            <a:r>
-              <a:rPr lang="en"/>
-              <a:t>Task 2 POSIX Threads (ThreadFunc)</a:t>
-            </a:r>
-            <a:endParaRPr/>
-          </a:p>
-        </p:txBody>
-      </p:sp>
-      <p:sp>
-        <p:nvSpPr>
-          <p:cNvPr id="109" name="Google Shape;109;p21"/>
-          <p:cNvSpPr txBox="1">
-            <a:spLocks noGrp="1"/>
-          </p:cNvSpPr>
-          <p:nvPr>
-            <p:ph type="body" idx="1"/>
-          </p:nvPr>
-        </p:nvSpPr>
-        <p:spPr>
-          <a:xfrm>
-            <a:off x="5474425" y="835875"/>
-            <a:ext cx="3070500" cy="3745500"/>
-          </a:xfrm>
-          <a:prstGeom prst="rect">
-            <a:avLst/>
-          </a:prstGeom>
-        </p:spPr>
-        <p:txBody>
-          <a:bodyPr spcFirstLastPara="1" wrap="square" lIns="91425" tIns="91425" rIns="91425" bIns="91425" anchor="t" anchorCtr="0">
-            <a:normAutofit/>
-          </a:bodyPr>
-          <a:lstStyle/>
-          <a:p>
-            <a:pPr marL="0" lvl="0" indent="0" algn="l" rtl="0">
-              <a:spcBef>
-                <a:spcPts val="0"/>
-              </a:spcBef>
-              <a:spcAft>
-                <a:spcPts val="0"/>
-              </a:spcAft>
-              <a:buNone/>
-            </a:pPr>
-            <a:r>
-              <a:rPr lang="en"/>
-              <a:t>Thread function to check for prime numbers using the same logic as task 1.</a:t>
-            </a:r>
-            <a:endParaRPr/>
-          </a:p>
-          <a:p>
-            <a:pPr marL="0" lvl="0" indent="0" algn="l" rtl="0">
-              <a:spcBef>
-                <a:spcPts val="1200"/>
-              </a:spcBef>
-              <a:spcAft>
-                <a:spcPts val="1200"/>
-              </a:spcAft>
-              <a:buNone/>
-            </a:pPr>
-            <a:r>
-              <a:rPr lang="en"/>
-              <a:t>Calculates a distinct starting point 3 + (2 * thread_id) and stride 2 *NUM_THREADS to implement static partitioning.</a:t>
-            </a:r>
-            <a:endParaRPr/>
-          </a:p>
-        </p:txBody>
-      </p:sp>
-      <p:pic>
-        <p:nvPicPr>
-          <p:cNvPr id="110" name="Google Shape;110;p21"/>
-          <p:cNvPicPr preferRelativeResize="0"/>
-          <p:nvPr/>
-        </p:nvPicPr>
-        <p:blipFill>
-          <a:blip r:embed="rId3">
-            <a:alphaModFix/>
-          </a:blip>
-          <a:stretch>
-            <a:fillRect/>
-          </a:stretch>
-        </p:blipFill>
-        <p:spPr>
-          <a:xfrm>
-            <a:off x="311700" y="835875"/>
-            <a:ext cx="4819799" cy="2640412"/>
-          </a:xfrm>
-          <a:prstGeom prst="rect">
-            <a:avLst/>
-          </a:prstGeom>
-          <a:noFill/>
-          <a:ln>
-            <a:noFill/>
-          </a:ln>
-        </p:spPr>
-      </p:pic>
-    </p:spTree>
+    <p:extLst>
+      <p:ext uri="{BB962C8B-B14F-4D97-AF65-F5344CB8AC3E}">
+        <p14:creationId xmlns:p14="http://schemas.microsoft.com/office/powerpoint/2010/main" val="824480525"/>
+      </p:ext>
+    </p:extLst>
   </p:cSld>
   <p:clrMapOvr>
     <a:masterClrMapping/>

--- a/lab_2/FIT3143 Lab 2.pptx
+++ b/lab_2/FIT3143 Lab 2.pptx
@@ -5,19 +5,25 @@
     <p:sldMasterId id="2147483659" r:id="rId1"/>
   </p:sldMasterIdLst>
   <p:notesMasterIdLst>
-    <p:notesMasterId r:id="rId12"/>
+    <p:notesMasterId r:id="rId18"/>
   </p:notesMasterIdLst>
   <p:sldIdLst>
     <p:sldId id="256" r:id="rId2"/>
     <p:sldId id="282" r:id="rId3"/>
     <p:sldId id="257" r:id="rId4"/>
     <p:sldId id="277" r:id="rId5"/>
-    <p:sldId id="283" r:id="rId6"/>
-    <p:sldId id="280" r:id="rId7"/>
-    <p:sldId id="279" r:id="rId8"/>
-    <p:sldId id="281" r:id="rId9"/>
-    <p:sldId id="285" r:id="rId10"/>
-    <p:sldId id="276" r:id="rId11"/>
+    <p:sldId id="266" r:id="rId6"/>
+    <p:sldId id="293" r:id="rId7"/>
+    <p:sldId id="294" r:id="rId8"/>
+    <p:sldId id="283" r:id="rId9"/>
+    <p:sldId id="280" r:id="rId10"/>
+    <p:sldId id="279" r:id="rId11"/>
+    <p:sldId id="281" r:id="rId12"/>
+    <p:sldId id="288" r:id="rId13"/>
+    <p:sldId id="285" r:id="rId14"/>
+    <p:sldId id="290" r:id="rId15"/>
+    <p:sldId id="292" r:id="rId16"/>
+    <p:sldId id="276" r:id="rId17"/>
   </p:sldIdLst>
   <p:sldSz cx="9144000" cy="5143500" type="screen16x9"/>
   <p:notesSz cx="6858000" cy="9144000"/>
@@ -819,6 +825,768 @@
   <p:cSld>
     <p:spTree>
       <p:nvGrpSpPr>
+        <p:cNvPr id="1" name="Shape 56">
+          <a:extLst>
+            <a:ext uri="{FF2B5EF4-FFF2-40B4-BE49-F238E27FC236}">
+              <a16:creationId xmlns:a16="http://schemas.microsoft.com/office/drawing/2014/main" id="{154A3496-5B8C-FB09-CDE4-29EDA7464444}"/>
+            </a:ext>
+          </a:extLst>
+        </p:cNvPr>
+        <p:cNvGrpSpPr/>
+        <p:nvPr/>
+      </p:nvGrpSpPr>
+      <p:grpSpPr>
+        <a:xfrm>
+          <a:off x="0" y="0"/>
+          <a:ext cx="0" cy="0"/>
+          <a:chOff x="0" y="0"/>
+          <a:chExt cx="0" cy="0"/>
+        </a:xfrm>
+      </p:grpSpPr>
+      <p:sp>
+        <p:nvSpPr>
+          <p:cNvPr id="57" name="Google Shape;57;g3f76eb00e2a_0_0:notes">
+            <a:extLst>
+              <a:ext uri="{FF2B5EF4-FFF2-40B4-BE49-F238E27FC236}">
+                <a16:creationId xmlns:a16="http://schemas.microsoft.com/office/drawing/2014/main" id="{0FFB6AE4-A4C2-DC60-65B8-1BC98092FDE3}"/>
+              </a:ext>
+            </a:extLst>
+          </p:cNvPr>
+          <p:cNvSpPr>
+            <a:spLocks noGrp="1" noRot="1" noChangeAspect="1"/>
+          </p:cNvSpPr>
+          <p:nvPr>
+            <p:ph type="sldImg" idx="2"/>
+          </p:nvPr>
+        </p:nvSpPr>
+        <p:spPr>
+          <a:xfrm>
+            <a:off x="381000" y="685800"/>
+            <a:ext cx="6096000" cy="3429000"/>
+          </a:xfrm>
+          <a:custGeom>
+            <a:avLst/>
+            <a:gdLst/>
+            <a:ahLst/>
+            <a:cxnLst/>
+            <a:rect l="l" t="t" r="r" b="b"/>
+            <a:pathLst>
+              <a:path w="120000" h="120000" extrusionOk="0">
+                <a:moveTo>
+                  <a:pt x="0" y="0"/>
+                </a:moveTo>
+                <a:lnTo>
+                  <a:pt x="120000" y="0"/>
+                </a:lnTo>
+                <a:lnTo>
+                  <a:pt x="120000" y="120000"/>
+                </a:lnTo>
+                <a:lnTo>
+                  <a:pt x="0" y="120000"/>
+                </a:lnTo>
+                <a:close/>
+              </a:path>
+            </a:pathLst>
+          </a:custGeom>
+        </p:spPr>
+      </p:sp>
+      <p:sp>
+        <p:nvSpPr>
+          <p:cNvPr id="58" name="Google Shape;58;g3f76eb00e2a_0_0:notes">
+            <a:extLst>
+              <a:ext uri="{FF2B5EF4-FFF2-40B4-BE49-F238E27FC236}">
+                <a16:creationId xmlns:a16="http://schemas.microsoft.com/office/drawing/2014/main" id="{EE0D1C10-8A67-AB39-3C85-35A2CA98CFE1}"/>
+              </a:ext>
+            </a:extLst>
+          </p:cNvPr>
+          <p:cNvSpPr txBox="1">
+            <a:spLocks noGrp="1"/>
+          </p:cNvSpPr>
+          <p:nvPr>
+            <p:ph type="body" idx="1"/>
+          </p:nvPr>
+        </p:nvSpPr>
+        <p:spPr>
+          <a:xfrm>
+            <a:off x="685800" y="4343400"/>
+            <a:ext cx="5486400" cy="4114800"/>
+          </a:xfrm>
+          <a:prstGeom prst="rect">
+            <a:avLst/>
+          </a:prstGeom>
+        </p:spPr>
+        <p:txBody>
+          <a:bodyPr spcFirstLastPara="1" wrap="square" lIns="91425" tIns="91425" rIns="91425" bIns="91425" anchor="t" anchorCtr="0">
+            <a:noAutofit/>
+          </a:bodyPr>
+          <a:lstStyle/>
+          <a:p>
+            <a:pPr marL="0" lvl="0" indent="0" algn="l" rtl="0">
+              <a:spcBef>
+                <a:spcPts val="0"/>
+              </a:spcBef>
+              <a:spcAft>
+                <a:spcPts val="0"/>
+              </a:spcAft>
+              <a:buNone/>
+            </a:pPr>
+            <a:endParaRPr/>
+          </a:p>
+        </p:txBody>
+      </p:sp>
+    </p:spTree>
+    <p:extLst>
+      <p:ext uri="{BB962C8B-B14F-4D97-AF65-F5344CB8AC3E}">
+        <p14:creationId xmlns:p14="http://schemas.microsoft.com/office/powerpoint/2010/main" val="576551821"/>
+      </p:ext>
+    </p:extLst>
+  </p:cSld>
+  <p:clrMapOvr>
+    <a:masterClrMapping/>
+  </p:clrMapOvr>
+</p:notes>
+</file>
+
+<file path=ppt/notesSlides/notesSlide11.xml><?xml version="1.0" encoding="utf-8"?>
+<p:notes xmlns:a="http://schemas.openxmlformats.org/drawingml/2006/main" xmlns:r="http://schemas.openxmlformats.org/officeDocument/2006/relationships" xmlns:p="http://schemas.openxmlformats.org/presentationml/2006/main" showMasterSp="0" showMasterPhAnim="0">
+  <p:cSld>
+    <p:spTree>
+      <p:nvGrpSpPr>
+        <p:cNvPr id="1" name="Shape 56">
+          <a:extLst>
+            <a:ext uri="{FF2B5EF4-FFF2-40B4-BE49-F238E27FC236}">
+              <a16:creationId xmlns:a16="http://schemas.microsoft.com/office/drawing/2014/main" id="{2439F5EF-9434-D8C5-2A3B-2C25E6C8B724}"/>
+            </a:ext>
+          </a:extLst>
+        </p:cNvPr>
+        <p:cNvGrpSpPr/>
+        <p:nvPr/>
+      </p:nvGrpSpPr>
+      <p:grpSpPr>
+        <a:xfrm>
+          <a:off x="0" y="0"/>
+          <a:ext cx="0" cy="0"/>
+          <a:chOff x="0" y="0"/>
+          <a:chExt cx="0" cy="0"/>
+        </a:xfrm>
+      </p:grpSpPr>
+      <p:sp>
+        <p:nvSpPr>
+          <p:cNvPr id="57" name="Google Shape;57;g3f76eb00e2a_0_0:notes">
+            <a:extLst>
+              <a:ext uri="{FF2B5EF4-FFF2-40B4-BE49-F238E27FC236}">
+                <a16:creationId xmlns:a16="http://schemas.microsoft.com/office/drawing/2014/main" id="{7B5F7BE9-E0F6-4ADC-834B-E49A79D2590A}"/>
+              </a:ext>
+            </a:extLst>
+          </p:cNvPr>
+          <p:cNvSpPr>
+            <a:spLocks noGrp="1" noRot="1" noChangeAspect="1"/>
+          </p:cNvSpPr>
+          <p:nvPr>
+            <p:ph type="sldImg" idx="2"/>
+          </p:nvPr>
+        </p:nvSpPr>
+        <p:spPr>
+          <a:xfrm>
+            <a:off x="381000" y="685800"/>
+            <a:ext cx="6096000" cy="3429000"/>
+          </a:xfrm>
+          <a:custGeom>
+            <a:avLst/>
+            <a:gdLst/>
+            <a:ahLst/>
+            <a:cxnLst/>
+            <a:rect l="l" t="t" r="r" b="b"/>
+            <a:pathLst>
+              <a:path w="120000" h="120000" extrusionOk="0">
+                <a:moveTo>
+                  <a:pt x="0" y="0"/>
+                </a:moveTo>
+                <a:lnTo>
+                  <a:pt x="120000" y="0"/>
+                </a:lnTo>
+                <a:lnTo>
+                  <a:pt x="120000" y="120000"/>
+                </a:lnTo>
+                <a:lnTo>
+                  <a:pt x="0" y="120000"/>
+                </a:lnTo>
+                <a:close/>
+              </a:path>
+            </a:pathLst>
+          </a:custGeom>
+        </p:spPr>
+      </p:sp>
+      <p:sp>
+        <p:nvSpPr>
+          <p:cNvPr id="58" name="Google Shape;58;g3f76eb00e2a_0_0:notes">
+            <a:extLst>
+              <a:ext uri="{FF2B5EF4-FFF2-40B4-BE49-F238E27FC236}">
+                <a16:creationId xmlns:a16="http://schemas.microsoft.com/office/drawing/2014/main" id="{3B9E57AD-BE33-C309-330D-6EDFE739B77D}"/>
+              </a:ext>
+            </a:extLst>
+          </p:cNvPr>
+          <p:cNvSpPr txBox="1">
+            <a:spLocks noGrp="1"/>
+          </p:cNvSpPr>
+          <p:nvPr>
+            <p:ph type="body" idx="1"/>
+          </p:nvPr>
+        </p:nvSpPr>
+        <p:spPr>
+          <a:xfrm>
+            <a:off x="685800" y="4343400"/>
+            <a:ext cx="5486400" cy="4114800"/>
+          </a:xfrm>
+          <a:prstGeom prst="rect">
+            <a:avLst/>
+          </a:prstGeom>
+        </p:spPr>
+        <p:txBody>
+          <a:bodyPr spcFirstLastPara="1" wrap="square" lIns="91425" tIns="91425" rIns="91425" bIns="91425" anchor="t" anchorCtr="0">
+            <a:noAutofit/>
+          </a:bodyPr>
+          <a:lstStyle/>
+          <a:p>
+            <a:pPr marL="0" lvl="0" indent="0" algn="l" rtl="0">
+              <a:spcBef>
+                <a:spcPts val="0"/>
+              </a:spcBef>
+              <a:spcAft>
+                <a:spcPts val="0"/>
+              </a:spcAft>
+              <a:buNone/>
+            </a:pPr>
+            <a:endParaRPr/>
+          </a:p>
+        </p:txBody>
+      </p:sp>
+    </p:spTree>
+    <p:extLst>
+      <p:ext uri="{BB962C8B-B14F-4D97-AF65-F5344CB8AC3E}">
+        <p14:creationId xmlns:p14="http://schemas.microsoft.com/office/powerpoint/2010/main" val="3096274233"/>
+      </p:ext>
+    </p:extLst>
+  </p:cSld>
+  <p:clrMapOvr>
+    <a:masterClrMapping/>
+  </p:clrMapOvr>
+</p:notes>
+</file>
+
+<file path=ppt/notesSlides/notesSlide12.xml><?xml version="1.0" encoding="utf-8"?>
+<p:notes xmlns:a="http://schemas.openxmlformats.org/drawingml/2006/main" xmlns:r="http://schemas.openxmlformats.org/officeDocument/2006/relationships" xmlns:p="http://schemas.openxmlformats.org/presentationml/2006/main" showMasterSp="0" showMasterPhAnim="0">
+  <p:cSld>
+    <p:spTree>
+      <p:nvGrpSpPr>
+        <p:cNvPr id="1" name="Shape 118">
+          <a:extLst>
+            <a:ext uri="{FF2B5EF4-FFF2-40B4-BE49-F238E27FC236}">
+              <a16:creationId xmlns:a16="http://schemas.microsoft.com/office/drawing/2014/main" id="{B946E55F-9E1C-E3F2-9D49-0FE9675390CA}"/>
+            </a:ext>
+          </a:extLst>
+        </p:cNvPr>
+        <p:cNvGrpSpPr/>
+        <p:nvPr/>
+      </p:nvGrpSpPr>
+      <p:grpSpPr>
+        <a:xfrm>
+          <a:off x="0" y="0"/>
+          <a:ext cx="0" cy="0"/>
+          <a:chOff x="0" y="0"/>
+          <a:chExt cx="0" cy="0"/>
+        </a:xfrm>
+      </p:grpSpPr>
+      <p:sp>
+        <p:nvSpPr>
+          <p:cNvPr id="119" name="Google Shape;119;g3f76eb00e2a_0_105:notes">
+            <a:extLst>
+              <a:ext uri="{FF2B5EF4-FFF2-40B4-BE49-F238E27FC236}">
+                <a16:creationId xmlns:a16="http://schemas.microsoft.com/office/drawing/2014/main" id="{B916BD57-7FD2-9932-D630-5676E6F29D19}"/>
+              </a:ext>
+            </a:extLst>
+          </p:cNvPr>
+          <p:cNvSpPr>
+            <a:spLocks noGrp="1" noRot="1" noChangeAspect="1"/>
+          </p:cNvSpPr>
+          <p:nvPr>
+            <p:ph type="sldImg" idx="2"/>
+          </p:nvPr>
+        </p:nvSpPr>
+        <p:spPr>
+          <a:xfrm>
+            <a:off x="381000" y="685800"/>
+            <a:ext cx="6096000" cy="3429000"/>
+          </a:xfrm>
+          <a:custGeom>
+            <a:avLst/>
+            <a:gdLst/>
+            <a:ahLst/>
+            <a:cxnLst/>
+            <a:rect l="l" t="t" r="r" b="b"/>
+            <a:pathLst>
+              <a:path w="120000" h="120000" extrusionOk="0">
+                <a:moveTo>
+                  <a:pt x="0" y="0"/>
+                </a:moveTo>
+                <a:lnTo>
+                  <a:pt x="120000" y="0"/>
+                </a:lnTo>
+                <a:lnTo>
+                  <a:pt x="120000" y="120000"/>
+                </a:lnTo>
+                <a:lnTo>
+                  <a:pt x="0" y="120000"/>
+                </a:lnTo>
+                <a:close/>
+              </a:path>
+            </a:pathLst>
+          </a:custGeom>
+        </p:spPr>
+      </p:sp>
+      <p:sp>
+        <p:nvSpPr>
+          <p:cNvPr id="120" name="Google Shape;120;g3f76eb00e2a_0_105:notes">
+            <a:extLst>
+              <a:ext uri="{FF2B5EF4-FFF2-40B4-BE49-F238E27FC236}">
+                <a16:creationId xmlns:a16="http://schemas.microsoft.com/office/drawing/2014/main" id="{A716A296-160F-E338-5F0D-12013981E818}"/>
+              </a:ext>
+            </a:extLst>
+          </p:cNvPr>
+          <p:cNvSpPr txBox="1">
+            <a:spLocks noGrp="1"/>
+          </p:cNvSpPr>
+          <p:nvPr>
+            <p:ph type="body" idx="1"/>
+          </p:nvPr>
+        </p:nvSpPr>
+        <p:spPr>
+          <a:xfrm>
+            <a:off x="685800" y="4343400"/>
+            <a:ext cx="5486400" cy="4114800"/>
+          </a:xfrm>
+          <a:prstGeom prst="rect">
+            <a:avLst/>
+          </a:prstGeom>
+        </p:spPr>
+        <p:txBody>
+          <a:bodyPr spcFirstLastPara="1" wrap="square" lIns="91425" tIns="91425" rIns="91425" bIns="91425" anchor="t" anchorCtr="0">
+            <a:noAutofit/>
+          </a:bodyPr>
+          <a:lstStyle/>
+          <a:p>
+            <a:pPr marL="0" lvl="0" indent="0" algn="l" rtl="0">
+              <a:spcBef>
+                <a:spcPts val="0"/>
+              </a:spcBef>
+              <a:spcAft>
+                <a:spcPts val="0"/>
+              </a:spcAft>
+              <a:buNone/>
+            </a:pPr>
+            <a:endParaRPr/>
+          </a:p>
+        </p:txBody>
+      </p:sp>
+    </p:spTree>
+    <p:extLst>
+      <p:ext uri="{BB962C8B-B14F-4D97-AF65-F5344CB8AC3E}">
+        <p14:creationId xmlns:p14="http://schemas.microsoft.com/office/powerpoint/2010/main" val="3896152575"/>
+      </p:ext>
+    </p:extLst>
+  </p:cSld>
+  <p:clrMapOvr>
+    <a:masterClrMapping/>
+  </p:clrMapOvr>
+</p:notes>
+</file>
+
+<file path=ppt/notesSlides/notesSlide13.xml><?xml version="1.0" encoding="utf-8"?>
+<p:notes xmlns:a="http://schemas.openxmlformats.org/drawingml/2006/main" xmlns:r="http://schemas.openxmlformats.org/officeDocument/2006/relationships" xmlns:p="http://schemas.openxmlformats.org/presentationml/2006/main" showMasterSp="0" showMasterPhAnim="0">
+  <p:cSld>
+    <p:spTree>
+      <p:nvGrpSpPr>
+        <p:cNvPr id="1" name="Shape 50">
+          <a:extLst>
+            <a:ext uri="{FF2B5EF4-FFF2-40B4-BE49-F238E27FC236}">
+              <a16:creationId xmlns:a16="http://schemas.microsoft.com/office/drawing/2014/main" id="{0FD5EF7D-668E-00D1-060A-D2E1811195F2}"/>
+            </a:ext>
+          </a:extLst>
+        </p:cNvPr>
+        <p:cNvGrpSpPr/>
+        <p:nvPr/>
+      </p:nvGrpSpPr>
+      <p:grpSpPr>
+        <a:xfrm>
+          <a:off x="0" y="0"/>
+          <a:ext cx="0" cy="0"/>
+          <a:chOff x="0" y="0"/>
+          <a:chExt cx="0" cy="0"/>
+        </a:xfrm>
+      </p:grpSpPr>
+      <p:sp>
+        <p:nvSpPr>
+          <p:cNvPr id="51" name="Google Shape;51;p:notes">
+            <a:extLst>
+              <a:ext uri="{FF2B5EF4-FFF2-40B4-BE49-F238E27FC236}">
+                <a16:creationId xmlns:a16="http://schemas.microsoft.com/office/drawing/2014/main" id="{009DCA95-76EE-DE3F-CC98-65B9A72DD928}"/>
+              </a:ext>
+            </a:extLst>
+          </p:cNvPr>
+          <p:cNvSpPr>
+            <a:spLocks noGrp="1" noRot="1" noChangeAspect="1"/>
+          </p:cNvSpPr>
+          <p:nvPr>
+            <p:ph type="sldImg" idx="2"/>
+          </p:nvPr>
+        </p:nvSpPr>
+        <p:spPr>
+          <a:xfrm>
+            <a:off x="381000" y="685800"/>
+            <a:ext cx="6096000" cy="3429000"/>
+          </a:xfrm>
+          <a:custGeom>
+            <a:avLst/>
+            <a:gdLst/>
+            <a:ahLst/>
+            <a:cxnLst/>
+            <a:rect l="l" t="t" r="r" b="b"/>
+            <a:pathLst>
+              <a:path w="120000" h="120000" extrusionOk="0">
+                <a:moveTo>
+                  <a:pt x="0" y="0"/>
+                </a:moveTo>
+                <a:lnTo>
+                  <a:pt x="120000" y="0"/>
+                </a:lnTo>
+                <a:lnTo>
+                  <a:pt x="120000" y="120000"/>
+                </a:lnTo>
+                <a:lnTo>
+                  <a:pt x="0" y="120000"/>
+                </a:lnTo>
+                <a:close/>
+              </a:path>
+            </a:pathLst>
+          </a:custGeom>
+        </p:spPr>
+      </p:sp>
+      <p:sp>
+        <p:nvSpPr>
+          <p:cNvPr id="52" name="Google Shape;52;p:notes">
+            <a:extLst>
+              <a:ext uri="{FF2B5EF4-FFF2-40B4-BE49-F238E27FC236}">
+                <a16:creationId xmlns:a16="http://schemas.microsoft.com/office/drawing/2014/main" id="{D1F61234-7CA9-6258-8237-DA83987890E4}"/>
+              </a:ext>
+            </a:extLst>
+          </p:cNvPr>
+          <p:cNvSpPr txBox="1">
+            <a:spLocks noGrp="1"/>
+          </p:cNvSpPr>
+          <p:nvPr>
+            <p:ph type="body" idx="1"/>
+          </p:nvPr>
+        </p:nvSpPr>
+        <p:spPr>
+          <a:xfrm>
+            <a:off x="685800" y="4343400"/>
+            <a:ext cx="5486400" cy="4114800"/>
+          </a:xfrm>
+          <a:prstGeom prst="rect">
+            <a:avLst/>
+          </a:prstGeom>
+        </p:spPr>
+        <p:txBody>
+          <a:bodyPr spcFirstLastPara="1" wrap="square" lIns="91425" tIns="91425" rIns="91425" bIns="91425" anchor="t" anchorCtr="0">
+            <a:noAutofit/>
+          </a:bodyPr>
+          <a:lstStyle/>
+          <a:p>
+            <a:pPr marL="0" lvl="0" indent="0" algn="l" rtl="0">
+              <a:spcBef>
+                <a:spcPts val="0"/>
+              </a:spcBef>
+              <a:spcAft>
+                <a:spcPts val="0"/>
+              </a:spcAft>
+              <a:buNone/>
+            </a:pPr>
+            <a:endParaRPr/>
+          </a:p>
+        </p:txBody>
+      </p:sp>
+    </p:spTree>
+    <p:extLst>
+      <p:ext uri="{BB962C8B-B14F-4D97-AF65-F5344CB8AC3E}">
+        <p14:creationId xmlns:p14="http://schemas.microsoft.com/office/powerpoint/2010/main" val="1607290205"/>
+      </p:ext>
+    </p:extLst>
+  </p:cSld>
+  <p:clrMapOvr>
+    <a:masterClrMapping/>
+  </p:clrMapOvr>
+</p:notes>
+</file>
+
+<file path=ppt/notesSlides/notesSlide14.xml><?xml version="1.0" encoding="utf-8"?>
+<p:notes xmlns:a="http://schemas.openxmlformats.org/drawingml/2006/main" xmlns:r="http://schemas.openxmlformats.org/officeDocument/2006/relationships" xmlns:p="http://schemas.openxmlformats.org/presentationml/2006/main" showMasterSp="0" showMasterPhAnim="0">
+  <p:cSld>
+    <p:spTree>
+      <p:nvGrpSpPr>
+        <p:cNvPr id="1" name="Shape 56">
+          <a:extLst>
+            <a:ext uri="{FF2B5EF4-FFF2-40B4-BE49-F238E27FC236}">
+              <a16:creationId xmlns:a16="http://schemas.microsoft.com/office/drawing/2014/main" id="{B7B9EA31-6100-0A06-EB8C-E6A15042FB11}"/>
+            </a:ext>
+          </a:extLst>
+        </p:cNvPr>
+        <p:cNvGrpSpPr/>
+        <p:nvPr/>
+      </p:nvGrpSpPr>
+      <p:grpSpPr>
+        <a:xfrm>
+          <a:off x="0" y="0"/>
+          <a:ext cx="0" cy="0"/>
+          <a:chOff x="0" y="0"/>
+          <a:chExt cx="0" cy="0"/>
+        </a:xfrm>
+      </p:grpSpPr>
+      <p:sp>
+        <p:nvSpPr>
+          <p:cNvPr id="57" name="Google Shape;57;g3f76eb00e2a_0_0:notes">
+            <a:extLst>
+              <a:ext uri="{FF2B5EF4-FFF2-40B4-BE49-F238E27FC236}">
+                <a16:creationId xmlns:a16="http://schemas.microsoft.com/office/drawing/2014/main" id="{F7A6BE7F-9F96-6ADE-47BE-3D5A0FC1BC7A}"/>
+              </a:ext>
+            </a:extLst>
+          </p:cNvPr>
+          <p:cNvSpPr>
+            <a:spLocks noGrp="1" noRot="1" noChangeAspect="1"/>
+          </p:cNvSpPr>
+          <p:nvPr>
+            <p:ph type="sldImg" idx="2"/>
+          </p:nvPr>
+        </p:nvSpPr>
+        <p:spPr>
+          <a:xfrm>
+            <a:off x="381000" y="685800"/>
+            <a:ext cx="6096000" cy="3429000"/>
+          </a:xfrm>
+          <a:custGeom>
+            <a:avLst/>
+            <a:gdLst/>
+            <a:ahLst/>
+            <a:cxnLst/>
+            <a:rect l="l" t="t" r="r" b="b"/>
+            <a:pathLst>
+              <a:path w="120000" h="120000" extrusionOk="0">
+                <a:moveTo>
+                  <a:pt x="0" y="0"/>
+                </a:moveTo>
+                <a:lnTo>
+                  <a:pt x="120000" y="0"/>
+                </a:lnTo>
+                <a:lnTo>
+                  <a:pt x="120000" y="120000"/>
+                </a:lnTo>
+                <a:lnTo>
+                  <a:pt x="0" y="120000"/>
+                </a:lnTo>
+                <a:close/>
+              </a:path>
+            </a:pathLst>
+          </a:custGeom>
+        </p:spPr>
+      </p:sp>
+      <p:sp>
+        <p:nvSpPr>
+          <p:cNvPr id="58" name="Google Shape;58;g3f76eb00e2a_0_0:notes">
+            <a:extLst>
+              <a:ext uri="{FF2B5EF4-FFF2-40B4-BE49-F238E27FC236}">
+                <a16:creationId xmlns:a16="http://schemas.microsoft.com/office/drawing/2014/main" id="{081D2C62-CB6E-2D8D-C349-8EB82CD53911}"/>
+              </a:ext>
+            </a:extLst>
+          </p:cNvPr>
+          <p:cNvSpPr txBox="1">
+            <a:spLocks noGrp="1"/>
+          </p:cNvSpPr>
+          <p:nvPr>
+            <p:ph type="body" idx="1"/>
+          </p:nvPr>
+        </p:nvSpPr>
+        <p:spPr>
+          <a:xfrm>
+            <a:off x="685800" y="4343400"/>
+            <a:ext cx="5486400" cy="4114800"/>
+          </a:xfrm>
+          <a:prstGeom prst="rect">
+            <a:avLst/>
+          </a:prstGeom>
+        </p:spPr>
+        <p:txBody>
+          <a:bodyPr spcFirstLastPara="1" wrap="square" lIns="91425" tIns="91425" rIns="91425" bIns="91425" anchor="t" anchorCtr="0">
+            <a:noAutofit/>
+          </a:bodyPr>
+          <a:lstStyle/>
+          <a:p>
+            <a:pPr marL="0" lvl="0" indent="0" algn="l" rtl="0">
+              <a:spcBef>
+                <a:spcPts val="0"/>
+              </a:spcBef>
+              <a:spcAft>
+                <a:spcPts val="0"/>
+              </a:spcAft>
+              <a:buNone/>
+            </a:pPr>
+            <a:endParaRPr/>
+          </a:p>
+        </p:txBody>
+      </p:sp>
+    </p:spTree>
+    <p:extLst>
+      <p:ext uri="{BB962C8B-B14F-4D97-AF65-F5344CB8AC3E}">
+        <p14:creationId xmlns:p14="http://schemas.microsoft.com/office/powerpoint/2010/main" val="3068793606"/>
+      </p:ext>
+    </p:extLst>
+  </p:cSld>
+  <p:clrMapOvr>
+    <a:masterClrMapping/>
+  </p:clrMapOvr>
+</p:notes>
+</file>
+
+<file path=ppt/notesSlides/notesSlide15.xml><?xml version="1.0" encoding="utf-8"?>
+<p:notes xmlns:a="http://schemas.openxmlformats.org/drawingml/2006/main" xmlns:r="http://schemas.openxmlformats.org/officeDocument/2006/relationships" xmlns:p="http://schemas.openxmlformats.org/presentationml/2006/main" showMasterSp="0" showMasterPhAnim="0">
+  <p:cSld>
+    <p:spTree>
+      <p:nvGrpSpPr>
+        <p:cNvPr id="1" name="Shape 118">
+          <a:extLst>
+            <a:ext uri="{FF2B5EF4-FFF2-40B4-BE49-F238E27FC236}">
+              <a16:creationId xmlns:a16="http://schemas.microsoft.com/office/drawing/2014/main" id="{AAF9266B-BAB6-1E17-D3B5-DC484B377D7A}"/>
+            </a:ext>
+          </a:extLst>
+        </p:cNvPr>
+        <p:cNvGrpSpPr/>
+        <p:nvPr/>
+      </p:nvGrpSpPr>
+      <p:grpSpPr>
+        <a:xfrm>
+          <a:off x="0" y="0"/>
+          <a:ext cx="0" cy="0"/>
+          <a:chOff x="0" y="0"/>
+          <a:chExt cx="0" cy="0"/>
+        </a:xfrm>
+      </p:grpSpPr>
+      <p:sp>
+        <p:nvSpPr>
+          <p:cNvPr id="119" name="Google Shape;119;g3f76eb00e2a_0_105:notes">
+            <a:extLst>
+              <a:ext uri="{FF2B5EF4-FFF2-40B4-BE49-F238E27FC236}">
+                <a16:creationId xmlns:a16="http://schemas.microsoft.com/office/drawing/2014/main" id="{531A9C0E-2817-D272-0426-AF6632468C4D}"/>
+              </a:ext>
+            </a:extLst>
+          </p:cNvPr>
+          <p:cNvSpPr>
+            <a:spLocks noGrp="1" noRot="1" noChangeAspect="1"/>
+          </p:cNvSpPr>
+          <p:nvPr>
+            <p:ph type="sldImg" idx="2"/>
+          </p:nvPr>
+        </p:nvSpPr>
+        <p:spPr>
+          <a:xfrm>
+            <a:off x="381000" y="685800"/>
+            <a:ext cx="6096000" cy="3429000"/>
+          </a:xfrm>
+          <a:custGeom>
+            <a:avLst/>
+            <a:gdLst/>
+            <a:ahLst/>
+            <a:cxnLst/>
+            <a:rect l="l" t="t" r="r" b="b"/>
+            <a:pathLst>
+              <a:path w="120000" h="120000" extrusionOk="0">
+                <a:moveTo>
+                  <a:pt x="0" y="0"/>
+                </a:moveTo>
+                <a:lnTo>
+                  <a:pt x="120000" y="0"/>
+                </a:lnTo>
+                <a:lnTo>
+                  <a:pt x="120000" y="120000"/>
+                </a:lnTo>
+                <a:lnTo>
+                  <a:pt x="0" y="120000"/>
+                </a:lnTo>
+                <a:close/>
+              </a:path>
+            </a:pathLst>
+          </a:custGeom>
+        </p:spPr>
+      </p:sp>
+      <p:sp>
+        <p:nvSpPr>
+          <p:cNvPr id="120" name="Google Shape;120;g3f76eb00e2a_0_105:notes">
+            <a:extLst>
+              <a:ext uri="{FF2B5EF4-FFF2-40B4-BE49-F238E27FC236}">
+                <a16:creationId xmlns:a16="http://schemas.microsoft.com/office/drawing/2014/main" id="{A8CC0012-DD39-58C9-0DF3-3E110CEED0D7}"/>
+              </a:ext>
+            </a:extLst>
+          </p:cNvPr>
+          <p:cNvSpPr txBox="1">
+            <a:spLocks noGrp="1"/>
+          </p:cNvSpPr>
+          <p:nvPr>
+            <p:ph type="body" idx="1"/>
+          </p:nvPr>
+        </p:nvSpPr>
+        <p:spPr>
+          <a:xfrm>
+            <a:off x="685800" y="4343400"/>
+            <a:ext cx="5486400" cy="4114800"/>
+          </a:xfrm>
+          <a:prstGeom prst="rect">
+            <a:avLst/>
+          </a:prstGeom>
+        </p:spPr>
+        <p:txBody>
+          <a:bodyPr spcFirstLastPara="1" wrap="square" lIns="91425" tIns="91425" rIns="91425" bIns="91425" anchor="t" anchorCtr="0">
+            <a:noAutofit/>
+          </a:bodyPr>
+          <a:lstStyle/>
+          <a:p>
+            <a:pPr marL="0" lvl="0" indent="0" algn="l" rtl="0">
+              <a:spcBef>
+                <a:spcPts val="0"/>
+              </a:spcBef>
+              <a:spcAft>
+                <a:spcPts val="0"/>
+              </a:spcAft>
+              <a:buNone/>
+            </a:pPr>
+            <a:endParaRPr/>
+          </a:p>
+        </p:txBody>
+      </p:sp>
+    </p:spTree>
+    <p:extLst>
+      <p:ext uri="{BB962C8B-B14F-4D97-AF65-F5344CB8AC3E}">
+        <p14:creationId xmlns:p14="http://schemas.microsoft.com/office/powerpoint/2010/main" val="428467822"/>
+      </p:ext>
+    </p:extLst>
+  </p:cSld>
+  <p:clrMapOvr>
+    <a:masterClrMapping/>
+  </p:clrMapOvr>
+</p:notes>
+</file>
+
+<file path=ppt/notesSlides/notesSlide16.xml><?xml version="1.0" encoding="utf-8"?>
+<p:notes xmlns:a="http://schemas.openxmlformats.org/drawingml/2006/main" xmlns:r="http://schemas.openxmlformats.org/officeDocument/2006/relationships" xmlns:p="http://schemas.openxmlformats.org/presentationml/2006/main" showMasterSp="0" showMasterPhAnim="0">
+  <p:cSld>
+    <p:spTree>
+      <p:nvGrpSpPr>
         <p:cNvPr id="1" name="Shape 187"/>
         <p:cNvGrpSpPr/>
         <p:nvPr/>
@@ -1281,6 +2049,364 @@
   <p:cSld>
     <p:spTree>
       <p:nvGrpSpPr>
+        <p:cNvPr id="1" name="Shape 118"/>
+        <p:cNvGrpSpPr/>
+        <p:nvPr/>
+      </p:nvGrpSpPr>
+      <p:grpSpPr>
+        <a:xfrm>
+          <a:off x="0" y="0"/>
+          <a:ext cx="0" cy="0"/>
+          <a:chOff x="0" y="0"/>
+          <a:chExt cx="0" cy="0"/>
+        </a:xfrm>
+      </p:grpSpPr>
+      <p:sp>
+        <p:nvSpPr>
+          <p:cNvPr id="119" name="Google Shape;119;g3f76eb00e2a_0_105:notes"/>
+          <p:cNvSpPr>
+            <a:spLocks noGrp="1" noRot="1" noChangeAspect="1"/>
+          </p:cNvSpPr>
+          <p:nvPr>
+            <p:ph type="sldImg" idx="2"/>
+          </p:nvPr>
+        </p:nvSpPr>
+        <p:spPr>
+          <a:xfrm>
+            <a:off x="381000" y="685800"/>
+            <a:ext cx="6096000" cy="3429000"/>
+          </a:xfrm>
+          <a:custGeom>
+            <a:avLst/>
+            <a:gdLst/>
+            <a:ahLst/>
+            <a:cxnLst/>
+            <a:rect l="l" t="t" r="r" b="b"/>
+            <a:pathLst>
+              <a:path w="120000" h="120000" extrusionOk="0">
+                <a:moveTo>
+                  <a:pt x="0" y="0"/>
+                </a:moveTo>
+                <a:lnTo>
+                  <a:pt x="120000" y="0"/>
+                </a:lnTo>
+                <a:lnTo>
+                  <a:pt x="120000" y="120000"/>
+                </a:lnTo>
+                <a:lnTo>
+                  <a:pt x="0" y="120000"/>
+                </a:lnTo>
+                <a:close/>
+              </a:path>
+            </a:pathLst>
+          </a:custGeom>
+        </p:spPr>
+      </p:sp>
+      <p:sp>
+        <p:nvSpPr>
+          <p:cNvPr id="120" name="Google Shape;120;g3f76eb00e2a_0_105:notes"/>
+          <p:cNvSpPr txBox="1">
+            <a:spLocks noGrp="1"/>
+          </p:cNvSpPr>
+          <p:nvPr>
+            <p:ph type="body" idx="1"/>
+          </p:nvPr>
+        </p:nvSpPr>
+        <p:spPr>
+          <a:xfrm>
+            <a:off x="685800" y="4343400"/>
+            <a:ext cx="5486400" cy="4114800"/>
+          </a:xfrm>
+          <a:prstGeom prst="rect">
+            <a:avLst/>
+          </a:prstGeom>
+        </p:spPr>
+        <p:txBody>
+          <a:bodyPr spcFirstLastPara="1" wrap="square" lIns="91425" tIns="91425" rIns="91425" bIns="91425" anchor="t" anchorCtr="0">
+            <a:noAutofit/>
+          </a:bodyPr>
+          <a:lstStyle/>
+          <a:p>
+            <a:pPr marL="0" lvl="0" indent="0" algn="l" rtl="0">
+              <a:spcBef>
+                <a:spcPts val="0"/>
+              </a:spcBef>
+              <a:spcAft>
+                <a:spcPts val="0"/>
+              </a:spcAft>
+              <a:buNone/>
+            </a:pPr>
+            <a:endParaRPr/>
+          </a:p>
+        </p:txBody>
+      </p:sp>
+    </p:spTree>
+  </p:cSld>
+  <p:clrMapOvr>
+    <a:masterClrMapping/>
+  </p:clrMapOvr>
+</p:notes>
+</file>
+
+<file path=ppt/notesSlides/notesSlide6.xml><?xml version="1.0" encoding="utf-8"?>
+<p:notes xmlns:a="http://schemas.openxmlformats.org/drawingml/2006/main" xmlns:r="http://schemas.openxmlformats.org/officeDocument/2006/relationships" xmlns:p="http://schemas.openxmlformats.org/presentationml/2006/main" showMasterSp="0" showMasterPhAnim="0">
+  <p:cSld>
+    <p:spTree>
+      <p:nvGrpSpPr>
+        <p:cNvPr id="1" name="Shape 118">
+          <a:extLst>
+            <a:ext uri="{FF2B5EF4-FFF2-40B4-BE49-F238E27FC236}">
+              <a16:creationId xmlns:a16="http://schemas.microsoft.com/office/drawing/2014/main" id="{048870D9-5D59-63F8-6BC9-CAD5572CA5BC}"/>
+            </a:ext>
+          </a:extLst>
+        </p:cNvPr>
+        <p:cNvGrpSpPr/>
+        <p:nvPr/>
+      </p:nvGrpSpPr>
+      <p:grpSpPr>
+        <a:xfrm>
+          <a:off x="0" y="0"/>
+          <a:ext cx="0" cy="0"/>
+          <a:chOff x="0" y="0"/>
+          <a:chExt cx="0" cy="0"/>
+        </a:xfrm>
+      </p:grpSpPr>
+      <p:sp>
+        <p:nvSpPr>
+          <p:cNvPr id="119" name="Google Shape;119;g3f76eb00e2a_0_105:notes">
+            <a:extLst>
+              <a:ext uri="{FF2B5EF4-FFF2-40B4-BE49-F238E27FC236}">
+                <a16:creationId xmlns:a16="http://schemas.microsoft.com/office/drawing/2014/main" id="{EC54AD83-09B6-A1CE-E930-780F77EB5152}"/>
+              </a:ext>
+            </a:extLst>
+          </p:cNvPr>
+          <p:cNvSpPr>
+            <a:spLocks noGrp="1" noRot="1" noChangeAspect="1"/>
+          </p:cNvSpPr>
+          <p:nvPr>
+            <p:ph type="sldImg" idx="2"/>
+          </p:nvPr>
+        </p:nvSpPr>
+        <p:spPr>
+          <a:xfrm>
+            <a:off x="381000" y="685800"/>
+            <a:ext cx="6096000" cy="3429000"/>
+          </a:xfrm>
+          <a:custGeom>
+            <a:avLst/>
+            <a:gdLst/>
+            <a:ahLst/>
+            <a:cxnLst/>
+            <a:rect l="l" t="t" r="r" b="b"/>
+            <a:pathLst>
+              <a:path w="120000" h="120000" extrusionOk="0">
+                <a:moveTo>
+                  <a:pt x="0" y="0"/>
+                </a:moveTo>
+                <a:lnTo>
+                  <a:pt x="120000" y="0"/>
+                </a:lnTo>
+                <a:lnTo>
+                  <a:pt x="120000" y="120000"/>
+                </a:lnTo>
+                <a:lnTo>
+                  <a:pt x="0" y="120000"/>
+                </a:lnTo>
+                <a:close/>
+              </a:path>
+            </a:pathLst>
+          </a:custGeom>
+        </p:spPr>
+      </p:sp>
+      <p:sp>
+        <p:nvSpPr>
+          <p:cNvPr id="120" name="Google Shape;120;g3f76eb00e2a_0_105:notes">
+            <a:extLst>
+              <a:ext uri="{FF2B5EF4-FFF2-40B4-BE49-F238E27FC236}">
+                <a16:creationId xmlns:a16="http://schemas.microsoft.com/office/drawing/2014/main" id="{E8385518-D78C-32A0-2753-5A0660839C45}"/>
+              </a:ext>
+            </a:extLst>
+          </p:cNvPr>
+          <p:cNvSpPr txBox="1">
+            <a:spLocks noGrp="1"/>
+          </p:cNvSpPr>
+          <p:nvPr>
+            <p:ph type="body" idx="1"/>
+          </p:nvPr>
+        </p:nvSpPr>
+        <p:spPr>
+          <a:xfrm>
+            <a:off x="685800" y="4343400"/>
+            <a:ext cx="5486400" cy="4114800"/>
+          </a:xfrm>
+          <a:prstGeom prst="rect">
+            <a:avLst/>
+          </a:prstGeom>
+        </p:spPr>
+        <p:txBody>
+          <a:bodyPr spcFirstLastPara="1" wrap="square" lIns="91425" tIns="91425" rIns="91425" bIns="91425" anchor="t" anchorCtr="0">
+            <a:noAutofit/>
+          </a:bodyPr>
+          <a:lstStyle/>
+          <a:p>
+            <a:pPr marL="0" lvl="0" indent="0" algn="l" rtl="0">
+              <a:spcBef>
+                <a:spcPts val="0"/>
+              </a:spcBef>
+              <a:spcAft>
+                <a:spcPts val="0"/>
+              </a:spcAft>
+              <a:buNone/>
+            </a:pPr>
+            <a:endParaRPr/>
+          </a:p>
+        </p:txBody>
+      </p:sp>
+    </p:spTree>
+    <p:extLst>
+      <p:ext uri="{BB962C8B-B14F-4D97-AF65-F5344CB8AC3E}">
+        <p14:creationId xmlns:p14="http://schemas.microsoft.com/office/powerpoint/2010/main" val="2097013459"/>
+      </p:ext>
+    </p:extLst>
+  </p:cSld>
+  <p:clrMapOvr>
+    <a:masterClrMapping/>
+  </p:clrMapOvr>
+</p:notes>
+</file>
+
+<file path=ppt/notesSlides/notesSlide7.xml><?xml version="1.0" encoding="utf-8"?>
+<p:notes xmlns:a="http://schemas.openxmlformats.org/drawingml/2006/main" xmlns:r="http://schemas.openxmlformats.org/officeDocument/2006/relationships" xmlns:p="http://schemas.openxmlformats.org/presentationml/2006/main" showMasterSp="0" showMasterPhAnim="0">
+  <p:cSld>
+    <p:spTree>
+      <p:nvGrpSpPr>
+        <p:cNvPr id="1" name="Shape 118">
+          <a:extLst>
+            <a:ext uri="{FF2B5EF4-FFF2-40B4-BE49-F238E27FC236}">
+              <a16:creationId xmlns:a16="http://schemas.microsoft.com/office/drawing/2014/main" id="{FC2A6CB3-39FF-D095-FEAB-1C8EF367E657}"/>
+            </a:ext>
+          </a:extLst>
+        </p:cNvPr>
+        <p:cNvGrpSpPr/>
+        <p:nvPr/>
+      </p:nvGrpSpPr>
+      <p:grpSpPr>
+        <a:xfrm>
+          <a:off x="0" y="0"/>
+          <a:ext cx="0" cy="0"/>
+          <a:chOff x="0" y="0"/>
+          <a:chExt cx="0" cy="0"/>
+        </a:xfrm>
+      </p:grpSpPr>
+      <p:sp>
+        <p:nvSpPr>
+          <p:cNvPr id="119" name="Google Shape;119;g3f76eb00e2a_0_105:notes">
+            <a:extLst>
+              <a:ext uri="{FF2B5EF4-FFF2-40B4-BE49-F238E27FC236}">
+                <a16:creationId xmlns:a16="http://schemas.microsoft.com/office/drawing/2014/main" id="{E1B16BDA-2A22-B703-5736-4F1643B8E5A4}"/>
+              </a:ext>
+            </a:extLst>
+          </p:cNvPr>
+          <p:cNvSpPr>
+            <a:spLocks noGrp="1" noRot="1" noChangeAspect="1"/>
+          </p:cNvSpPr>
+          <p:nvPr>
+            <p:ph type="sldImg" idx="2"/>
+          </p:nvPr>
+        </p:nvSpPr>
+        <p:spPr>
+          <a:xfrm>
+            <a:off x="381000" y="685800"/>
+            <a:ext cx="6096000" cy="3429000"/>
+          </a:xfrm>
+          <a:custGeom>
+            <a:avLst/>
+            <a:gdLst/>
+            <a:ahLst/>
+            <a:cxnLst/>
+            <a:rect l="l" t="t" r="r" b="b"/>
+            <a:pathLst>
+              <a:path w="120000" h="120000" extrusionOk="0">
+                <a:moveTo>
+                  <a:pt x="0" y="0"/>
+                </a:moveTo>
+                <a:lnTo>
+                  <a:pt x="120000" y="0"/>
+                </a:lnTo>
+                <a:lnTo>
+                  <a:pt x="120000" y="120000"/>
+                </a:lnTo>
+                <a:lnTo>
+                  <a:pt x="0" y="120000"/>
+                </a:lnTo>
+                <a:close/>
+              </a:path>
+            </a:pathLst>
+          </a:custGeom>
+        </p:spPr>
+      </p:sp>
+      <p:sp>
+        <p:nvSpPr>
+          <p:cNvPr id="120" name="Google Shape;120;g3f76eb00e2a_0_105:notes">
+            <a:extLst>
+              <a:ext uri="{FF2B5EF4-FFF2-40B4-BE49-F238E27FC236}">
+                <a16:creationId xmlns:a16="http://schemas.microsoft.com/office/drawing/2014/main" id="{68E79A77-451F-A0B0-A517-E937DE13D34C}"/>
+              </a:ext>
+            </a:extLst>
+          </p:cNvPr>
+          <p:cNvSpPr txBox="1">
+            <a:spLocks noGrp="1"/>
+          </p:cNvSpPr>
+          <p:nvPr>
+            <p:ph type="body" idx="1"/>
+          </p:nvPr>
+        </p:nvSpPr>
+        <p:spPr>
+          <a:xfrm>
+            <a:off x="685800" y="4343400"/>
+            <a:ext cx="5486400" cy="4114800"/>
+          </a:xfrm>
+          <a:prstGeom prst="rect">
+            <a:avLst/>
+          </a:prstGeom>
+        </p:spPr>
+        <p:txBody>
+          <a:bodyPr spcFirstLastPara="1" wrap="square" lIns="91425" tIns="91425" rIns="91425" bIns="91425" anchor="t" anchorCtr="0">
+            <a:noAutofit/>
+          </a:bodyPr>
+          <a:lstStyle/>
+          <a:p>
+            <a:pPr marL="0" lvl="0" indent="0" algn="l" rtl="0">
+              <a:spcBef>
+                <a:spcPts val="0"/>
+              </a:spcBef>
+              <a:spcAft>
+                <a:spcPts val="0"/>
+              </a:spcAft>
+              <a:buNone/>
+            </a:pPr>
+            <a:endParaRPr/>
+          </a:p>
+        </p:txBody>
+      </p:sp>
+    </p:spTree>
+    <p:extLst>
+      <p:ext uri="{BB962C8B-B14F-4D97-AF65-F5344CB8AC3E}">
+        <p14:creationId xmlns:p14="http://schemas.microsoft.com/office/powerpoint/2010/main" val="523373122"/>
+      </p:ext>
+    </p:extLst>
+  </p:cSld>
+  <p:clrMapOvr>
+    <a:masterClrMapping/>
+  </p:clrMapOvr>
+</p:notes>
+</file>
+
+<file path=ppt/notesSlides/notesSlide8.xml><?xml version="1.0" encoding="utf-8"?>
+<p:notes xmlns:a="http://schemas.openxmlformats.org/drawingml/2006/main" xmlns:r="http://schemas.openxmlformats.org/officeDocument/2006/relationships" xmlns:p="http://schemas.openxmlformats.org/presentationml/2006/main" showMasterSp="0" showMasterPhAnim="0">
+  <p:cSld>
+    <p:spTree>
+      <p:nvGrpSpPr>
         <p:cNvPr id="1" name="Shape 50">
           <a:extLst>
             <a:ext uri="{FF2B5EF4-FFF2-40B4-BE49-F238E27FC236}">
@@ -1403,7 +2529,7 @@
 </p:notes>
 </file>
 
-<file path=ppt/notesSlides/notesSlide6.xml><?xml version="1.0" encoding="utf-8"?>
+<file path=ppt/notesSlides/notesSlide9.xml><?xml version="1.0" encoding="utf-8"?>
 <p:notes xmlns:a="http://schemas.openxmlformats.org/drawingml/2006/main" xmlns:r="http://schemas.openxmlformats.org/officeDocument/2006/relationships" xmlns:p="http://schemas.openxmlformats.org/presentationml/2006/main" showMasterSp="0" showMasterPhAnim="0">
   <p:cSld>
     <p:spTree>
@@ -1521,387 +2647,6 @@
     <p:extLst>
       <p:ext uri="{BB962C8B-B14F-4D97-AF65-F5344CB8AC3E}">
         <p14:creationId xmlns:p14="http://schemas.microsoft.com/office/powerpoint/2010/main" val="341271058"/>
-      </p:ext>
-    </p:extLst>
-  </p:cSld>
-  <p:clrMapOvr>
-    <a:masterClrMapping/>
-  </p:clrMapOvr>
-</p:notes>
-</file>
-
-<file path=ppt/notesSlides/notesSlide7.xml><?xml version="1.0" encoding="utf-8"?>
-<p:notes xmlns:a="http://schemas.openxmlformats.org/drawingml/2006/main" xmlns:r="http://schemas.openxmlformats.org/officeDocument/2006/relationships" xmlns:p="http://schemas.openxmlformats.org/presentationml/2006/main" showMasterSp="0" showMasterPhAnim="0">
-  <p:cSld>
-    <p:spTree>
-      <p:nvGrpSpPr>
-        <p:cNvPr id="1" name="Shape 56">
-          <a:extLst>
-            <a:ext uri="{FF2B5EF4-FFF2-40B4-BE49-F238E27FC236}">
-              <a16:creationId xmlns:a16="http://schemas.microsoft.com/office/drawing/2014/main" id="{154A3496-5B8C-FB09-CDE4-29EDA7464444}"/>
-            </a:ext>
-          </a:extLst>
-        </p:cNvPr>
-        <p:cNvGrpSpPr/>
-        <p:nvPr/>
-      </p:nvGrpSpPr>
-      <p:grpSpPr>
-        <a:xfrm>
-          <a:off x="0" y="0"/>
-          <a:ext cx="0" cy="0"/>
-          <a:chOff x="0" y="0"/>
-          <a:chExt cx="0" cy="0"/>
-        </a:xfrm>
-      </p:grpSpPr>
-      <p:sp>
-        <p:nvSpPr>
-          <p:cNvPr id="57" name="Google Shape;57;g3f76eb00e2a_0_0:notes">
-            <a:extLst>
-              <a:ext uri="{FF2B5EF4-FFF2-40B4-BE49-F238E27FC236}">
-                <a16:creationId xmlns:a16="http://schemas.microsoft.com/office/drawing/2014/main" id="{0FFB6AE4-A4C2-DC60-65B8-1BC98092FDE3}"/>
-              </a:ext>
-            </a:extLst>
-          </p:cNvPr>
-          <p:cNvSpPr>
-            <a:spLocks noGrp="1" noRot="1" noChangeAspect="1"/>
-          </p:cNvSpPr>
-          <p:nvPr>
-            <p:ph type="sldImg" idx="2"/>
-          </p:nvPr>
-        </p:nvSpPr>
-        <p:spPr>
-          <a:xfrm>
-            <a:off x="381000" y="685800"/>
-            <a:ext cx="6096000" cy="3429000"/>
-          </a:xfrm>
-          <a:custGeom>
-            <a:avLst/>
-            <a:gdLst/>
-            <a:ahLst/>
-            <a:cxnLst/>
-            <a:rect l="l" t="t" r="r" b="b"/>
-            <a:pathLst>
-              <a:path w="120000" h="120000" extrusionOk="0">
-                <a:moveTo>
-                  <a:pt x="0" y="0"/>
-                </a:moveTo>
-                <a:lnTo>
-                  <a:pt x="120000" y="0"/>
-                </a:lnTo>
-                <a:lnTo>
-                  <a:pt x="120000" y="120000"/>
-                </a:lnTo>
-                <a:lnTo>
-                  <a:pt x="0" y="120000"/>
-                </a:lnTo>
-                <a:close/>
-              </a:path>
-            </a:pathLst>
-          </a:custGeom>
-        </p:spPr>
-      </p:sp>
-      <p:sp>
-        <p:nvSpPr>
-          <p:cNvPr id="58" name="Google Shape;58;g3f76eb00e2a_0_0:notes">
-            <a:extLst>
-              <a:ext uri="{FF2B5EF4-FFF2-40B4-BE49-F238E27FC236}">
-                <a16:creationId xmlns:a16="http://schemas.microsoft.com/office/drawing/2014/main" id="{EE0D1C10-8A67-AB39-3C85-35A2CA98CFE1}"/>
-              </a:ext>
-            </a:extLst>
-          </p:cNvPr>
-          <p:cNvSpPr txBox="1">
-            <a:spLocks noGrp="1"/>
-          </p:cNvSpPr>
-          <p:nvPr>
-            <p:ph type="body" idx="1"/>
-          </p:nvPr>
-        </p:nvSpPr>
-        <p:spPr>
-          <a:xfrm>
-            <a:off x="685800" y="4343400"/>
-            <a:ext cx="5486400" cy="4114800"/>
-          </a:xfrm>
-          <a:prstGeom prst="rect">
-            <a:avLst/>
-          </a:prstGeom>
-        </p:spPr>
-        <p:txBody>
-          <a:bodyPr spcFirstLastPara="1" wrap="square" lIns="91425" tIns="91425" rIns="91425" bIns="91425" anchor="t" anchorCtr="0">
-            <a:noAutofit/>
-          </a:bodyPr>
-          <a:lstStyle/>
-          <a:p>
-            <a:pPr marL="0" lvl="0" indent="0" algn="l" rtl="0">
-              <a:spcBef>
-                <a:spcPts val="0"/>
-              </a:spcBef>
-              <a:spcAft>
-                <a:spcPts val="0"/>
-              </a:spcAft>
-              <a:buNone/>
-            </a:pPr>
-            <a:endParaRPr/>
-          </a:p>
-        </p:txBody>
-      </p:sp>
-    </p:spTree>
-    <p:extLst>
-      <p:ext uri="{BB962C8B-B14F-4D97-AF65-F5344CB8AC3E}">
-        <p14:creationId xmlns:p14="http://schemas.microsoft.com/office/powerpoint/2010/main" val="576551821"/>
-      </p:ext>
-    </p:extLst>
-  </p:cSld>
-  <p:clrMapOvr>
-    <a:masterClrMapping/>
-  </p:clrMapOvr>
-</p:notes>
-</file>
-
-<file path=ppt/notesSlides/notesSlide8.xml><?xml version="1.0" encoding="utf-8"?>
-<p:notes xmlns:a="http://schemas.openxmlformats.org/drawingml/2006/main" xmlns:r="http://schemas.openxmlformats.org/officeDocument/2006/relationships" xmlns:p="http://schemas.openxmlformats.org/presentationml/2006/main" showMasterSp="0" showMasterPhAnim="0">
-  <p:cSld>
-    <p:spTree>
-      <p:nvGrpSpPr>
-        <p:cNvPr id="1" name="Shape 56">
-          <a:extLst>
-            <a:ext uri="{FF2B5EF4-FFF2-40B4-BE49-F238E27FC236}">
-              <a16:creationId xmlns:a16="http://schemas.microsoft.com/office/drawing/2014/main" id="{2439F5EF-9434-D8C5-2A3B-2C25E6C8B724}"/>
-            </a:ext>
-          </a:extLst>
-        </p:cNvPr>
-        <p:cNvGrpSpPr/>
-        <p:nvPr/>
-      </p:nvGrpSpPr>
-      <p:grpSpPr>
-        <a:xfrm>
-          <a:off x="0" y="0"/>
-          <a:ext cx="0" cy="0"/>
-          <a:chOff x="0" y="0"/>
-          <a:chExt cx="0" cy="0"/>
-        </a:xfrm>
-      </p:grpSpPr>
-      <p:sp>
-        <p:nvSpPr>
-          <p:cNvPr id="57" name="Google Shape;57;g3f76eb00e2a_0_0:notes">
-            <a:extLst>
-              <a:ext uri="{FF2B5EF4-FFF2-40B4-BE49-F238E27FC236}">
-                <a16:creationId xmlns:a16="http://schemas.microsoft.com/office/drawing/2014/main" id="{7B5F7BE9-E0F6-4ADC-834B-E49A79D2590A}"/>
-              </a:ext>
-            </a:extLst>
-          </p:cNvPr>
-          <p:cNvSpPr>
-            <a:spLocks noGrp="1" noRot="1" noChangeAspect="1"/>
-          </p:cNvSpPr>
-          <p:nvPr>
-            <p:ph type="sldImg" idx="2"/>
-          </p:nvPr>
-        </p:nvSpPr>
-        <p:spPr>
-          <a:xfrm>
-            <a:off x="381000" y="685800"/>
-            <a:ext cx="6096000" cy="3429000"/>
-          </a:xfrm>
-          <a:custGeom>
-            <a:avLst/>
-            <a:gdLst/>
-            <a:ahLst/>
-            <a:cxnLst/>
-            <a:rect l="l" t="t" r="r" b="b"/>
-            <a:pathLst>
-              <a:path w="120000" h="120000" extrusionOk="0">
-                <a:moveTo>
-                  <a:pt x="0" y="0"/>
-                </a:moveTo>
-                <a:lnTo>
-                  <a:pt x="120000" y="0"/>
-                </a:lnTo>
-                <a:lnTo>
-                  <a:pt x="120000" y="120000"/>
-                </a:lnTo>
-                <a:lnTo>
-                  <a:pt x="0" y="120000"/>
-                </a:lnTo>
-                <a:close/>
-              </a:path>
-            </a:pathLst>
-          </a:custGeom>
-        </p:spPr>
-      </p:sp>
-      <p:sp>
-        <p:nvSpPr>
-          <p:cNvPr id="58" name="Google Shape;58;g3f76eb00e2a_0_0:notes">
-            <a:extLst>
-              <a:ext uri="{FF2B5EF4-FFF2-40B4-BE49-F238E27FC236}">
-                <a16:creationId xmlns:a16="http://schemas.microsoft.com/office/drawing/2014/main" id="{3B9E57AD-BE33-C309-330D-6EDFE739B77D}"/>
-              </a:ext>
-            </a:extLst>
-          </p:cNvPr>
-          <p:cNvSpPr txBox="1">
-            <a:spLocks noGrp="1"/>
-          </p:cNvSpPr>
-          <p:nvPr>
-            <p:ph type="body" idx="1"/>
-          </p:nvPr>
-        </p:nvSpPr>
-        <p:spPr>
-          <a:xfrm>
-            <a:off x="685800" y="4343400"/>
-            <a:ext cx="5486400" cy="4114800"/>
-          </a:xfrm>
-          <a:prstGeom prst="rect">
-            <a:avLst/>
-          </a:prstGeom>
-        </p:spPr>
-        <p:txBody>
-          <a:bodyPr spcFirstLastPara="1" wrap="square" lIns="91425" tIns="91425" rIns="91425" bIns="91425" anchor="t" anchorCtr="0">
-            <a:noAutofit/>
-          </a:bodyPr>
-          <a:lstStyle/>
-          <a:p>
-            <a:pPr marL="0" lvl="0" indent="0" algn="l" rtl="0">
-              <a:spcBef>
-                <a:spcPts val="0"/>
-              </a:spcBef>
-              <a:spcAft>
-                <a:spcPts val="0"/>
-              </a:spcAft>
-              <a:buNone/>
-            </a:pPr>
-            <a:endParaRPr/>
-          </a:p>
-        </p:txBody>
-      </p:sp>
-    </p:spTree>
-    <p:extLst>
-      <p:ext uri="{BB962C8B-B14F-4D97-AF65-F5344CB8AC3E}">
-        <p14:creationId xmlns:p14="http://schemas.microsoft.com/office/powerpoint/2010/main" val="3096274233"/>
-      </p:ext>
-    </p:extLst>
-  </p:cSld>
-  <p:clrMapOvr>
-    <a:masterClrMapping/>
-  </p:clrMapOvr>
-</p:notes>
-</file>
-
-<file path=ppt/notesSlides/notesSlide9.xml><?xml version="1.0" encoding="utf-8"?>
-<p:notes xmlns:a="http://schemas.openxmlformats.org/drawingml/2006/main" xmlns:r="http://schemas.openxmlformats.org/officeDocument/2006/relationships" xmlns:p="http://schemas.openxmlformats.org/presentationml/2006/main" showMasterSp="0" showMasterPhAnim="0">
-  <p:cSld>
-    <p:spTree>
-      <p:nvGrpSpPr>
-        <p:cNvPr id="1" name="Shape 50">
-          <a:extLst>
-            <a:ext uri="{FF2B5EF4-FFF2-40B4-BE49-F238E27FC236}">
-              <a16:creationId xmlns:a16="http://schemas.microsoft.com/office/drawing/2014/main" id="{0FD5EF7D-668E-00D1-060A-D2E1811195F2}"/>
-            </a:ext>
-          </a:extLst>
-        </p:cNvPr>
-        <p:cNvGrpSpPr/>
-        <p:nvPr/>
-      </p:nvGrpSpPr>
-      <p:grpSpPr>
-        <a:xfrm>
-          <a:off x="0" y="0"/>
-          <a:ext cx="0" cy="0"/>
-          <a:chOff x="0" y="0"/>
-          <a:chExt cx="0" cy="0"/>
-        </a:xfrm>
-      </p:grpSpPr>
-      <p:sp>
-        <p:nvSpPr>
-          <p:cNvPr id="51" name="Google Shape;51;p:notes">
-            <a:extLst>
-              <a:ext uri="{FF2B5EF4-FFF2-40B4-BE49-F238E27FC236}">
-                <a16:creationId xmlns:a16="http://schemas.microsoft.com/office/drawing/2014/main" id="{009DCA95-76EE-DE3F-CC98-65B9A72DD928}"/>
-              </a:ext>
-            </a:extLst>
-          </p:cNvPr>
-          <p:cNvSpPr>
-            <a:spLocks noGrp="1" noRot="1" noChangeAspect="1"/>
-          </p:cNvSpPr>
-          <p:nvPr>
-            <p:ph type="sldImg" idx="2"/>
-          </p:nvPr>
-        </p:nvSpPr>
-        <p:spPr>
-          <a:xfrm>
-            <a:off x="381000" y="685800"/>
-            <a:ext cx="6096000" cy="3429000"/>
-          </a:xfrm>
-          <a:custGeom>
-            <a:avLst/>
-            <a:gdLst/>
-            <a:ahLst/>
-            <a:cxnLst/>
-            <a:rect l="l" t="t" r="r" b="b"/>
-            <a:pathLst>
-              <a:path w="120000" h="120000" extrusionOk="0">
-                <a:moveTo>
-                  <a:pt x="0" y="0"/>
-                </a:moveTo>
-                <a:lnTo>
-                  <a:pt x="120000" y="0"/>
-                </a:lnTo>
-                <a:lnTo>
-                  <a:pt x="120000" y="120000"/>
-                </a:lnTo>
-                <a:lnTo>
-                  <a:pt x="0" y="120000"/>
-                </a:lnTo>
-                <a:close/>
-              </a:path>
-            </a:pathLst>
-          </a:custGeom>
-        </p:spPr>
-      </p:sp>
-      <p:sp>
-        <p:nvSpPr>
-          <p:cNvPr id="52" name="Google Shape;52;p:notes">
-            <a:extLst>
-              <a:ext uri="{FF2B5EF4-FFF2-40B4-BE49-F238E27FC236}">
-                <a16:creationId xmlns:a16="http://schemas.microsoft.com/office/drawing/2014/main" id="{D1F61234-7CA9-6258-8237-DA83987890E4}"/>
-              </a:ext>
-            </a:extLst>
-          </p:cNvPr>
-          <p:cNvSpPr txBox="1">
-            <a:spLocks noGrp="1"/>
-          </p:cNvSpPr>
-          <p:nvPr>
-            <p:ph type="body" idx="1"/>
-          </p:nvPr>
-        </p:nvSpPr>
-        <p:spPr>
-          <a:xfrm>
-            <a:off x="685800" y="4343400"/>
-            <a:ext cx="5486400" cy="4114800"/>
-          </a:xfrm>
-          <a:prstGeom prst="rect">
-            <a:avLst/>
-          </a:prstGeom>
-        </p:spPr>
-        <p:txBody>
-          <a:bodyPr spcFirstLastPara="1" wrap="square" lIns="91425" tIns="91425" rIns="91425" bIns="91425" anchor="t" anchorCtr="0">
-            <a:noAutofit/>
-          </a:bodyPr>
-          <a:lstStyle/>
-          <a:p>
-            <a:pPr marL="0" lvl="0" indent="0" algn="l" rtl="0">
-              <a:spcBef>
-                <a:spcPts val="0"/>
-              </a:spcBef>
-              <a:spcAft>
-                <a:spcPts val="0"/>
-              </a:spcAft>
-              <a:buNone/>
-            </a:pPr>
-            <a:endParaRPr/>
-          </a:p>
-        </p:txBody>
-      </p:sp>
-    </p:spTree>
-    <p:extLst>
-      <p:ext uri="{BB962C8B-B14F-4D97-AF65-F5344CB8AC3E}">
-        <p14:creationId xmlns:p14="http://schemas.microsoft.com/office/powerpoint/2010/main" val="1607290205"/>
       </p:ext>
     </p:extLst>
   </p:cSld>
@@ -6774,6 +7519,974 @@
   <p:cSld>
     <p:spTree>
       <p:nvGrpSpPr>
+        <p:cNvPr id="1" name="Shape 59">
+          <a:extLst>
+            <a:ext uri="{FF2B5EF4-FFF2-40B4-BE49-F238E27FC236}">
+              <a16:creationId xmlns:a16="http://schemas.microsoft.com/office/drawing/2014/main" id="{42F24529-CFE0-5FA9-FB54-43F03632233F}"/>
+            </a:ext>
+          </a:extLst>
+        </p:cNvPr>
+        <p:cNvGrpSpPr/>
+        <p:nvPr/>
+      </p:nvGrpSpPr>
+      <p:grpSpPr>
+        <a:xfrm>
+          <a:off x="0" y="0"/>
+          <a:ext cx="0" cy="0"/>
+          <a:chOff x="0" y="0"/>
+          <a:chExt cx="0" cy="0"/>
+        </a:xfrm>
+      </p:grpSpPr>
+      <p:sp>
+        <p:nvSpPr>
+          <p:cNvPr id="60" name="Google Shape;60;p14">
+            <a:extLst>
+              <a:ext uri="{FF2B5EF4-FFF2-40B4-BE49-F238E27FC236}">
+                <a16:creationId xmlns:a16="http://schemas.microsoft.com/office/drawing/2014/main" id="{8D9EAC0E-527A-DAFF-F1FE-651C8F5C98B8}"/>
+              </a:ext>
+            </a:extLst>
+          </p:cNvPr>
+          <p:cNvSpPr txBox="1">
+            <a:spLocks noGrp="1"/>
+          </p:cNvSpPr>
+          <p:nvPr>
+            <p:ph type="title"/>
+          </p:nvPr>
+        </p:nvSpPr>
+        <p:spPr>
+          <a:xfrm>
+            <a:off x="311700" y="-1"/>
+            <a:ext cx="8520600" cy="812801"/>
+          </a:xfrm>
+          <a:prstGeom prst="rect">
+            <a:avLst/>
+          </a:prstGeom>
+        </p:spPr>
+        <p:txBody>
+          <a:bodyPr spcFirstLastPara="1" wrap="square" lIns="91425" tIns="91425" rIns="91425" bIns="91425" anchor="t" anchorCtr="0">
+            <a:noAutofit/>
+          </a:bodyPr>
+          <a:lstStyle/>
+          <a:p>
+            <a:pPr lvl="0"/>
+            <a:r>
+              <a:rPr lang="en" sz="2500" dirty="0"/>
+              <a:t>Task 2 Open MPI + Open MP Code </a:t>
+            </a:r>
+            <a:r>
+              <a:rPr lang="en-MY" sz="2500" dirty="0"/>
+              <a:t>Parallel Partitioning Schemes</a:t>
+            </a:r>
+            <a:endParaRPr sz="2500" dirty="0"/>
+          </a:p>
+        </p:txBody>
+      </p:sp>
+      <p:sp>
+        <p:nvSpPr>
+          <p:cNvPr id="61" name="Google Shape;61;p14">
+            <a:extLst>
+              <a:ext uri="{FF2B5EF4-FFF2-40B4-BE49-F238E27FC236}">
+                <a16:creationId xmlns:a16="http://schemas.microsoft.com/office/drawing/2014/main" id="{569C7C10-D39B-86AA-F7B8-36EB1C77C188}"/>
+              </a:ext>
+            </a:extLst>
+          </p:cNvPr>
+          <p:cNvSpPr txBox="1">
+            <a:spLocks noGrp="1"/>
+          </p:cNvSpPr>
+          <p:nvPr>
+            <p:ph type="body" idx="1"/>
+          </p:nvPr>
+        </p:nvSpPr>
+        <p:spPr>
+          <a:xfrm>
+            <a:off x="311700" y="1164492"/>
+            <a:ext cx="8520600" cy="3422382"/>
+          </a:xfrm>
+          <a:prstGeom prst="rect">
+            <a:avLst/>
+          </a:prstGeom>
+        </p:spPr>
+        <p:txBody>
+          <a:bodyPr spcFirstLastPara="1" wrap="square" lIns="91425" tIns="91425" rIns="91425" bIns="91425" anchor="t" anchorCtr="0">
+            <a:normAutofit/>
+          </a:bodyPr>
+          <a:lstStyle/>
+          <a:p>
+            <a:pPr marL="0" lvl="0" indent="0" algn="l" rtl="0">
+              <a:spcBef>
+                <a:spcPts val="0"/>
+              </a:spcBef>
+              <a:spcAft>
+                <a:spcPts val="1200"/>
+              </a:spcAft>
+              <a:buNone/>
+            </a:pPr>
+            <a:r>
+              <a:rPr lang="en-MY" sz="1600" dirty="0"/>
+              <a:t>Workload distribution operates across two distinct hierarchical layers to prevent thread idling and balance trial division workloads:</a:t>
+            </a:r>
+          </a:p>
+          <a:p>
+            <a:pPr marL="0" lvl="0" indent="0" algn="l" rtl="0">
+              <a:spcBef>
+                <a:spcPts val="0"/>
+              </a:spcBef>
+              <a:spcAft>
+                <a:spcPts val="1200"/>
+              </a:spcAft>
+              <a:buNone/>
+            </a:pPr>
+            <a:r>
+              <a:rPr lang="en-MY" sz="1600" dirty="0"/>
+              <a:t>Layer 1: Process-Level Distribution (Inter-Process / MPI)</a:t>
+            </a:r>
+          </a:p>
+          <a:p>
+            <a:pPr marL="0" lvl="0" indent="0" algn="l" rtl="0">
+              <a:spcBef>
+                <a:spcPts val="0"/>
+              </a:spcBef>
+              <a:spcAft>
+                <a:spcPts val="1200"/>
+              </a:spcAft>
+              <a:buNone/>
+            </a:pPr>
+            <a:r>
+              <a:rPr lang="en-MY" sz="1600" dirty="0"/>
+              <a:t>Block / Cyclic / Block-Cyclic Allocation: Candidates or candidate blocks are dealt round-robin among MPI processes based on their MPI rank r and process count P. </a:t>
+            </a:r>
+          </a:p>
+          <a:p>
+            <a:pPr marL="0" lvl="0" indent="0" algn="l" rtl="0">
+              <a:spcBef>
+                <a:spcPts val="0"/>
+              </a:spcBef>
+              <a:spcAft>
+                <a:spcPts val="1200"/>
+              </a:spcAft>
+              <a:buNone/>
+            </a:pPr>
+            <a:r>
+              <a:rPr lang="en-MY" sz="1600" dirty="0"/>
+              <a:t>Coarse Load Balancing: Ensures high-level compute balance across distinct machines or CPU sockets. </a:t>
+            </a:r>
+          </a:p>
+          <a:p>
+            <a:pPr marL="0" lvl="0" indent="0" algn="l" rtl="0">
+              <a:spcBef>
+                <a:spcPts val="0"/>
+              </a:spcBef>
+              <a:spcAft>
+                <a:spcPts val="1200"/>
+              </a:spcAft>
+              <a:buNone/>
+            </a:pPr>
+            <a:endParaRPr sz="1600" dirty="0"/>
+          </a:p>
+        </p:txBody>
+      </p:sp>
+    </p:spTree>
+    <p:extLst>
+      <p:ext uri="{BB962C8B-B14F-4D97-AF65-F5344CB8AC3E}">
+        <p14:creationId xmlns:p14="http://schemas.microsoft.com/office/powerpoint/2010/main" val="1889495280"/>
+      </p:ext>
+    </p:extLst>
+  </p:cSld>
+  <p:clrMapOvr>
+    <a:masterClrMapping/>
+  </p:clrMapOvr>
+</p:sld>
+</file>
+
+<file path=ppt/slides/slide11.xml><?xml version="1.0" encoding="utf-8"?>
+<p:sld xmlns:a="http://schemas.openxmlformats.org/drawingml/2006/main" xmlns:r="http://schemas.openxmlformats.org/officeDocument/2006/relationships" xmlns:p="http://schemas.openxmlformats.org/presentationml/2006/main">
+  <p:cSld>
+    <p:spTree>
+      <p:nvGrpSpPr>
+        <p:cNvPr id="1" name="Shape 59">
+          <a:extLst>
+            <a:ext uri="{FF2B5EF4-FFF2-40B4-BE49-F238E27FC236}">
+              <a16:creationId xmlns:a16="http://schemas.microsoft.com/office/drawing/2014/main" id="{EB5EFF8F-7746-192E-3B97-88FA9C0C4E82}"/>
+            </a:ext>
+          </a:extLst>
+        </p:cNvPr>
+        <p:cNvGrpSpPr/>
+        <p:nvPr/>
+      </p:nvGrpSpPr>
+      <p:grpSpPr>
+        <a:xfrm>
+          <a:off x="0" y="0"/>
+          <a:ext cx="0" cy="0"/>
+          <a:chOff x="0" y="0"/>
+          <a:chExt cx="0" cy="0"/>
+        </a:xfrm>
+      </p:grpSpPr>
+      <p:sp>
+        <p:nvSpPr>
+          <p:cNvPr id="60" name="Google Shape;60;p14">
+            <a:extLst>
+              <a:ext uri="{FF2B5EF4-FFF2-40B4-BE49-F238E27FC236}">
+                <a16:creationId xmlns:a16="http://schemas.microsoft.com/office/drawing/2014/main" id="{EB33225A-5173-8445-A969-FDF60F4161A9}"/>
+              </a:ext>
+            </a:extLst>
+          </p:cNvPr>
+          <p:cNvSpPr txBox="1">
+            <a:spLocks noGrp="1"/>
+          </p:cNvSpPr>
+          <p:nvPr>
+            <p:ph type="title"/>
+          </p:nvPr>
+        </p:nvSpPr>
+        <p:spPr>
+          <a:xfrm>
+            <a:off x="311700" y="-1"/>
+            <a:ext cx="8520600" cy="812801"/>
+          </a:xfrm>
+          <a:prstGeom prst="rect">
+            <a:avLst/>
+          </a:prstGeom>
+        </p:spPr>
+        <p:txBody>
+          <a:bodyPr spcFirstLastPara="1" wrap="square" lIns="91425" tIns="91425" rIns="91425" bIns="91425" anchor="t" anchorCtr="0">
+            <a:noAutofit/>
+          </a:bodyPr>
+          <a:lstStyle/>
+          <a:p>
+            <a:pPr lvl="0"/>
+            <a:r>
+              <a:rPr lang="en" sz="2500" dirty="0"/>
+              <a:t>Task 2 Open MPI + Open MP Code </a:t>
+            </a:r>
+            <a:r>
+              <a:rPr lang="en-MY" sz="2500" dirty="0"/>
+              <a:t>Parallel Partitioning Schemes</a:t>
+            </a:r>
+            <a:endParaRPr sz="2500" dirty="0"/>
+          </a:p>
+        </p:txBody>
+      </p:sp>
+      <p:sp>
+        <p:nvSpPr>
+          <p:cNvPr id="61" name="Google Shape;61;p14">
+            <a:extLst>
+              <a:ext uri="{FF2B5EF4-FFF2-40B4-BE49-F238E27FC236}">
+                <a16:creationId xmlns:a16="http://schemas.microsoft.com/office/drawing/2014/main" id="{55A918E6-4677-344F-8CA5-A01B651AAD9E}"/>
+              </a:ext>
+            </a:extLst>
+          </p:cNvPr>
+          <p:cNvSpPr txBox="1">
+            <a:spLocks noGrp="1"/>
+          </p:cNvSpPr>
+          <p:nvPr>
+            <p:ph type="body" idx="1"/>
+          </p:nvPr>
+        </p:nvSpPr>
+        <p:spPr>
+          <a:xfrm>
+            <a:off x="311700" y="1164492"/>
+            <a:ext cx="8520600" cy="3422382"/>
+          </a:xfrm>
+          <a:prstGeom prst="rect">
+            <a:avLst/>
+          </a:prstGeom>
+        </p:spPr>
+        <p:txBody>
+          <a:bodyPr spcFirstLastPara="1" wrap="square" lIns="91425" tIns="91425" rIns="91425" bIns="91425" anchor="t" anchorCtr="0">
+            <a:normAutofit/>
+          </a:bodyPr>
+          <a:lstStyle/>
+          <a:p>
+            <a:pPr marL="0" lvl="0" indent="0" algn="l" rtl="0">
+              <a:spcBef>
+                <a:spcPts val="0"/>
+              </a:spcBef>
+              <a:spcAft>
+                <a:spcPts val="1200"/>
+              </a:spcAft>
+              <a:buNone/>
+            </a:pPr>
+            <a:r>
+              <a:rPr lang="en-MY" sz="1600" dirty="0"/>
+              <a:t>Layer 2: Thread-Level Distribution (Intra-Process / OpenMP)</a:t>
+            </a:r>
+          </a:p>
+          <a:p>
+            <a:pPr marL="0" lvl="0" indent="0" algn="l" rtl="0">
+              <a:spcBef>
+                <a:spcPts val="0"/>
+              </a:spcBef>
+              <a:spcAft>
+                <a:spcPts val="1200"/>
+              </a:spcAft>
+              <a:buNone/>
+            </a:pPr>
+            <a:r>
+              <a:rPr lang="en-MY" sz="1600" dirty="0"/>
+              <a:t>Static / Dynamic / Guided Scheduling: OpenMP pragmas (#pragma </a:t>
+            </a:r>
+            <a:r>
+              <a:rPr lang="en-MY" sz="1600" dirty="0" err="1"/>
+              <a:t>omp</a:t>
+            </a:r>
+            <a:r>
+              <a:rPr lang="en-MY" sz="1600" dirty="0"/>
+              <a:t> parallel for schedule(...)) partition the process's assigned candidate chunk among local threads. </a:t>
+            </a:r>
+          </a:p>
+          <a:p>
+            <a:pPr marL="0" lvl="0" indent="0" algn="l" rtl="0">
+              <a:spcBef>
+                <a:spcPts val="0"/>
+              </a:spcBef>
+              <a:spcAft>
+                <a:spcPts val="1200"/>
+              </a:spcAft>
+              <a:buNone/>
+            </a:pPr>
+            <a:r>
+              <a:rPr lang="en-MY" sz="1600" dirty="0"/>
+              <a:t>Fine-Grained Load Balancing: Because higher candidate values require more trial division steps, dynamic or cyclic thread scheduling prevents thread starvation within the same shared-memory node. </a:t>
+            </a:r>
+          </a:p>
+        </p:txBody>
+      </p:sp>
+    </p:spTree>
+    <p:extLst>
+      <p:ext uri="{BB962C8B-B14F-4D97-AF65-F5344CB8AC3E}">
+        <p14:creationId xmlns:p14="http://schemas.microsoft.com/office/powerpoint/2010/main" val="1100287153"/>
+      </p:ext>
+    </p:extLst>
+  </p:cSld>
+  <p:clrMapOvr>
+    <a:masterClrMapping/>
+  </p:clrMapOvr>
+</p:sld>
+</file>
+
+<file path=ppt/slides/slide12.xml><?xml version="1.0" encoding="utf-8"?>
+<p:sld xmlns:a="http://schemas.openxmlformats.org/drawingml/2006/main" xmlns:r="http://schemas.openxmlformats.org/officeDocument/2006/relationships" xmlns:p="http://schemas.openxmlformats.org/presentationml/2006/main">
+  <p:cSld>
+    <p:spTree>
+      <p:nvGrpSpPr>
+        <p:cNvPr id="1" name="Shape 121">
+          <a:extLst>
+            <a:ext uri="{FF2B5EF4-FFF2-40B4-BE49-F238E27FC236}">
+              <a16:creationId xmlns:a16="http://schemas.microsoft.com/office/drawing/2014/main" id="{52C16937-D166-3906-CD4F-FD1AD4F500EA}"/>
+            </a:ext>
+          </a:extLst>
+        </p:cNvPr>
+        <p:cNvGrpSpPr/>
+        <p:nvPr/>
+      </p:nvGrpSpPr>
+      <p:grpSpPr>
+        <a:xfrm>
+          <a:off x="0" y="0"/>
+          <a:ext cx="0" cy="0"/>
+          <a:chOff x="0" y="0"/>
+          <a:chExt cx="0" cy="0"/>
+        </a:xfrm>
+      </p:grpSpPr>
+      <p:sp>
+        <p:nvSpPr>
+          <p:cNvPr id="122" name="Google Shape;122;p23">
+            <a:extLst>
+              <a:ext uri="{FF2B5EF4-FFF2-40B4-BE49-F238E27FC236}">
+                <a16:creationId xmlns:a16="http://schemas.microsoft.com/office/drawing/2014/main" id="{4454DACD-D0EB-2CE2-7739-0F17E85AC07F}"/>
+              </a:ext>
+            </a:extLst>
+          </p:cNvPr>
+          <p:cNvSpPr txBox="1">
+            <a:spLocks noGrp="1"/>
+          </p:cNvSpPr>
+          <p:nvPr>
+            <p:ph type="title"/>
+          </p:nvPr>
+        </p:nvSpPr>
+        <p:spPr>
+          <a:xfrm>
+            <a:off x="311700" y="0"/>
+            <a:ext cx="8520600" cy="572700"/>
+          </a:xfrm>
+          <a:prstGeom prst="rect">
+            <a:avLst/>
+          </a:prstGeom>
+        </p:spPr>
+        <p:txBody>
+          <a:bodyPr spcFirstLastPara="1" wrap="square" lIns="91425" tIns="91425" rIns="91425" bIns="91425" anchor="t" anchorCtr="0">
+            <a:normAutofit fontScale="90000"/>
+          </a:bodyPr>
+          <a:lstStyle/>
+          <a:p>
+            <a:pPr lvl="0"/>
+            <a:r>
+              <a:rPr lang="en" dirty="0"/>
+              <a:t>Task 2 Open MPI + Open MP (graph 1)</a:t>
+            </a:r>
+            <a:endParaRPr dirty="0"/>
+          </a:p>
+        </p:txBody>
+      </p:sp>
+      <p:sp>
+        <p:nvSpPr>
+          <p:cNvPr id="123" name="Google Shape;123;p23">
+            <a:extLst>
+              <a:ext uri="{FF2B5EF4-FFF2-40B4-BE49-F238E27FC236}">
+                <a16:creationId xmlns:a16="http://schemas.microsoft.com/office/drawing/2014/main" id="{B7E550AA-AC33-283F-47ED-36E16225F537}"/>
+              </a:ext>
+            </a:extLst>
+          </p:cNvPr>
+          <p:cNvSpPr txBox="1">
+            <a:spLocks noGrp="1"/>
+          </p:cNvSpPr>
+          <p:nvPr>
+            <p:ph type="body" idx="1"/>
+          </p:nvPr>
+        </p:nvSpPr>
+        <p:spPr>
+          <a:xfrm>
+            <a:off x="5599775" y="1182175"/>
+            <a:ext cx="3360000" cy="3399300"/>
+          </a:xfrm>
+          <a:prstGeom prst="rect">
+            <a:avLst/>
+          </a:prstGeom>
+        </p:spPr>
+        <p:txBody>
+          <a:bodyPr spcFirstLastPara="1" wrap="square" lIns="91425" tIns="91425" rIns="91425" bIns="91425" anchor="t" anchorCtr="0">
+            <a:normAutofit/>
+          </a:bodyPr>
+          <a:lstStyle/>
+          <a:p>
+            <a:pPr marL="0" lvl="0" indent="0" algn="l" rtl="0">
+              <a:spcBef>
+                <a:spcPts val="0"/>
+              </a:spcBef>
+              <a:spcAft>
+                <a:spcPts val="0"/>
+              </a:spcAft>
+              <a:buNone/>
+            </a:pPr>
+            <a:r>
+              <a:rPr lang="en"/>
+              <a:t>Task 2 was run with 2 threads for this graph comparison.</a:t>
+            </a:r>
+            <a:endParaRPr/>
+          </a:p>
+          <a:p>
+            <a:pPr marL="0" lvl="0" indent="0" algn="l" rtl="0">
+              <a:spcBef>
+                <a:spcPts val="1200"/>
+              </a:spcBef>
+              <a:spcAft>
+                <a:spcPts val="1200"/>
+              </a:spcAft>
+              <a:buNone/>
+            </a:pPr>
+            <a:r>
+              <a:rPr lang="en"/>
+              <a:t>Task 1 is serial (runs on 1 thread).</a:t>
+            </a:r>
+            <a:endParaRPr/>
+          </a:p>
+        </p:txBody>
+      </p:sp>
+      <p:pic>
+        <p:nvPicPr>
+          <p:cNvPr id="124" name="Google Shape;124;p23">
+            <a:extLst>
+              <a:ext uri="{FF2B5EF4-FFF2-40B4-BE49-F238E27FC236}">
+                <a16:creationId xmlns:a16="http://schemas.microsoft.com/office/drawing/2014/main" id="{A5A86C08-F42E-BB96-1263-66661CF6F50D}"/>
+              </a:ext>
+            </a:extLst>
+          </p:cNvPr>
+          <p:cNvPicPr preferRelativeResize="0"/>
+          <p:nvPr/>
+        </p:nvPicPr>
+        <p:blipFill>
+          <a:blip r:embed="rId3">
+            <a:alphaModFix/>
+          </a:blip>
+          <a:stretch>
+            <a:fillRect/>
+          </a:stretch>
+        </p:blipFill>
+        <p:spPr>
+          <a:xfrm>
+            <a:off x="311700" y="790875"/>
+            <a:ext cx="5104626" cy="3148749"/>
+          </a:xfrm>
+          <a:prstGeom prst="rect">
+            <a:avLst/>
+          </a:prstGeom>
+          <a:noFill/>
+          <a:ln>
+            <a:noFill/>
+          </a:ln>
+        </p:spPr>
+      </p:pic>
+    </p:spTree>
+    <p:extLst>
+      <p:ext uri="{BB962C8B-B14F-4D97-AF65-F5344CB8AC3E}">
+        <p14:creationId xmlns:p14="http://schemas.microsoft.com/office/powerpoint/2010/main" val="1027733824"/>
+      </p:ext>
+    </p:extLst>
+  </p:cSld>
+  <p:clrMapOvr>
+    <a:masterClrMapping/>
+  </p:clrMapOvr>
+</p:sld>
+</file>
+
+<file path=ppt/slides/slide13.xml><?xml version="1.0" encoding="utf-8"?>
+<p:sld xmlns:a="http://schemas.openxmlformats.org/drawingml/2006/main" xmlns:r="http://schemas.openxmlformats.org/officeDocument/2006/relationships" xmlns:p="http://schemas.openxmlformats.org/presentationml/2006/main">
+  <p:cSld>
+    <p:spTree>
+      <p:nvGrpSpPr>
+        <p:cNvPr id="1" name="Shape 53">
+          <a:extLst>
+            <a:ext uri="{FF2B5EF4-FFF2-40B4-BE49-F238E27FC236}">
+              <a16:creationId xmlns:a16="http://schemas.microsoft.com/office/drawing/2014/main" id="{59E4D482-1C32-3BEA-C46A-87BD91DD2941}"/>
+            </a:ext>
+          </a:extLst>
+        </p:cNvPr>
+        <p:cNvGrpSpPr/>
+        <p:nvPr/>
+      </p:nvGrpSpPr>
+      <p:grpSpPr>
+        <a:xfrm>
+          <a:off x="0" y="0"/>
+          <a:ext cx="0" cy="0"/>
+          <a:chOff x="0" y="0"/>
+          <a:chExt cx="0" cy="0"/>
+        </a:xfrm>
+      </p:grpSpPr>
+      <p:sp>
+        <p:nvSpPr>
+          <p:cNvPr id="54" name="Google Shape;54;p13">
+            <a:extLst>
+              <a:ext uri="{FF2B5EF4-FFF2-40B4-BE49-F238E27FC236}">
+                <a16:creationId xmlns:a16="http://schemas.microsoft.com/office/drawing/2014/main" id="{A54B520D-853D-95DB-EC3F-C2B08891D3A8}"/>
+              </a:ext>
+            </a:extLst>
+          </p:cNvPr>
+          <p:cNvSpPr txBox="1">
+            <a:spLocks noGrp="1"/>
+          </p:cNvSpPr>
+          <p:nvPr>
+            <p:ph type="ctrTitle"/>
+          </p:nvPr>
+        </p:nvSpPr>
+        <p:spPr>
+          <a:xfrm>
+            <a:off x="311708" y="744575"/>
+            <a:ext cx="8520600" cy="2052600"/>
+          </a:xfrm>
+          <a:prstGeom prst="rect">
+            <a:avLst/>
+          </a:prstGeom>
+        </p:spPr>
+        <p:txBody>
+          <a:bodyPr spcFirstLastPara="1" wrap="square" lIns="91425" tIns="91425" rIns="91425" bIns="91425" anchor="b" anchorCtr="0">
+            <a:normAutofit/>
+          </a:bodyPr>
+          <a:lstStyle/>
+          <a:p>
+            <a:pPr lvl="0"/>
+            <a:r>
+              <a:rPr lang="en" sz="4000" dirty="0"/>
+              <a:t>Task 3 </a:t>
+            </a:r>
+            <a:r>
+              <a:rPr lang="en-MY" sz="4000" dirty="0"/>
+              <a:t>Performance Evaluation</a:t>
+            </a:r>
+            <a:endParaRPr sz="4000" dirty="0"/>
+          </a:p>
+        </p:txBody>
+      </p:sp>
+      <p:sp>
+        <p:nvSpPr>
+          <p:cNvPr id="55" name="Google Shape;55;p13">
+            <a:extLst>
+              <a:ext uri="{FF2B5EF4-FFF2-40B4-BE49-F238E27FC236}">
+                <a16:creationId xmlns:a16="http://schemas.microsoft.com/office/drawing/2014/main" id="{61633085-EB71-E833-635D-5311C4C2AC04}"/>
+              </a:ext>
+            </a:extLst>
+          </p:cNvPr>
+          <p:cNvSpPr txBox="1">
+            <a:spLocks noGrp="1"/>
+          </p:cNvSpPr>
+          <p:nvPr>
+            <p:ph type="subTitle" idx="1"/>
+          </p:nvPr>
+        </p:nvSpPr>
+        <p:spPr>
+          <a:xfrm>
+            <a:off x="311700" y="2834125"/>
+            <a:ext cx="8520600" cy="792600"/>
+          </a:xfrm>
+          <a:prstGeom prst="rect">
+            <a:avLst/>
+          </a:prstGeom>
+        </p:spPr>
+        <p:txBody>
+          <a:bodyPr spcFirstLastPara="1" wrap="square" lIns="91425" tIns="91425" rIns="91425" bIns="91425" anchor="t" anchorCtr="0">
+            <a:normAutofit/>
+          </a:bodyPr>
+          <a:lstStyle/>
+          <a:p>
+            <a:pPr marL="0" lvl="0" indent="0" algn="ctr" rtl="0">
+              <a:spcBef>
+                <a:spcPts val="0"/>
+              </a:spcBef>
+              <a:spcAft>
+                <a:spcPts val="0"/>
+              </a:spcAft>
+              <a:buNone/>
+            </a:pPr>
+            <a:r>
+              <a:rPr lang="en" dirty="0"/>
+              <a:t>Finding Prime Numbers</a:t>
+            </a:r>
+            <a:endParaRPr dirty="0"/>
+          </a:p>
+        </p:txBody>
+      </p:sp>
+    </p:spTree>
+    <p:extLst>
+      <p:ext uri="{BB962C8B-B14F-4D97-AF65-F5344CB8AC3E}">
+        <p14:creationId xmlns:p14="http://schemas.microsoft.com/office/powerpoint/2010/main" val="824480525"/>
+      </p:ext>
+    </p:extLst>
+  </p:cSld>
+  <p:clrMapOvr>
+    <a:masterClrMapping/>
+  </p:clrMapOvr>
+</p:sld>
+</file>
+
+<file path=ppt/slides/slide14.xml><?xml version="1.0" encoding="utf-8"?>
+<p:sld xmlns:a="http://schemas.openxmlformats.org/drawingml/2006/main" xmlns:r="http://schemas.openxmlformats.org/officeDocument/2006/relationships" xmlns:p="http://schemas.openxmlformats.org/presentationml/2006/main">
+  <p:cSld>
+    <p:spTree>
+      <p:nvGrpSpPr>
+        <p:cNvPr id="1" name="Shape 59">
+          <a:extLst>
+            <a:ext uri="{FF2B5EF4-FFF2-40B4-BE49-F238E27FC236}">
+              <a16:creationId xmlns:a16="http://schemas.microsoft.com/office/drawing/2014/main" id="{AD30C1DC-28C7-348B-4F4C-D23B69C43CF0}"/>
+            </a:ext>
+          </a:extLst>
+        </p:cNvPr>
+        <p:cNvGrpSpPr/>
+        <p:nvPr/>
+      </p:nvGrpSpPr>
+      <p:grpSpPr>
+        <a:xfrm>
+          <a:off x="0" y="0"/>
+          <a:ext cx="0" cy="0"/>
+          <a:chOff x="0" y="0"/>
+          <a:chExt cx="0" cy="0"/>
+        </a:xfrm>
+      </p:grpSpPr>
+      <p:sp>
+        <p:nvSpPr>
+          <p:cNvPr id="60" name="Google Shape;60;p14">
+            <a:extLst>
+              <a:ext uri="{FF2B5EF4-FFF2-40B4-BE49-F238E27FC236}">
+                <a16:creationId xmlns:a16="http://schemas.microsoft.com/office/drawing/2014/main" id="{9AF780A6-5D9B-59EA-0E99-F9CA07F12E86}"/>
+              </a:ext>
+            </a:extLst>
+          </p:cNvPr>
+          <p:cNvSpPr txBox="1">
+            <a:spLocks noGrp="1"/>
+          </p:cNvSpPr>
+          <p:nvPr>
+            <p:ph type="title"/>
+          </p:nvPr>
+        </p:nvSpPr>
+        <p:spPr>
+          <a:xfrm>
+            <a:off x="311700" y="0"/>
+            <a:ext cx="8520600" cy="572700"/>
+          </a:xfrm>
+          <a:prstGeom prst="rect">
+            <a:avLst/>
+          </a:prstGeom>
+        </p:spPr>
+        <p:txBody>
+          <a:bodyPr spcFirstLastPara="1" wrap="square" lIns="91425" tIns="91425" rIns="91425" bIns="91425" anchor="t" anchorCtr="0">
+            <a:normAutofit fontScale="90000"/>
+          </a:bodyPr>
+          <a:lstStyle/>
+          <a:p>
+            <a:pPr marL="0" lvl="0" indent="0" algn="l" rtl="0">
+              <a:spcBef>
+                <a:spcPts val="0"/>
+              </a:spcBef>
+              <a:spcAft>
+                <a:spcPts val="0"/>
+              </a:spcAft>
+              <a:buNone/>
+            </a:pPr>
+            <a:r>
+              <a:rPr lang="en" dirty="0"/>
+              <a:t>Task 3 Performance Evaluation</a:t>
+            </a:r>
+            <a:endParaRPr dirty="0"/>
+          </a:p>
+        </p:txBody>
+      </p:sp>
+      <p:sp>
+        <p:nvSpPr>
+          <p:cNvPr id="61" name="Google Shape;61;p14">
+            <a:extLst>
+              <a:ext uri="{FF2B5EF4-FFF2-40B4-BE49-F238E27FC236}">
+                <a16:creationId xmlns:a16="http://schemas.microsoft.com/office/drawing/2014/main" id="{A9F7B473-9534-0983-7E9E-F10811F9C47C}"/>
+              </a:ext>
+            </a:extLst>
+          </p:cNvPr>
+          <p:cNvSpPr txBox="1">
+            <a:spLocks noGrp="1"/>
+          </p:cNvSpPr>
+          <p:nvPr>
+            <p:ph type="body" idx="1"/>
+          </p:nvPr>
+        </p:nvSpPr>
+        <p:spPr>
+          <a:xfrm>
+            <a:off x="311700" y="841375"/>
+            <a:ext cx="8520600" cy="3745500"/>
+          </a:xfrm>
+          <a:prstGeom prst="rect">
+            <a:avLst/>
+          </a:prstGeom>
+        </p:spPr>
+        <p:txBody>
+          <a:bodyPr spcFirstLastPara="1" wrap="square" lIns="91425" tIns="91425" rIns="91425" bIns="91425" anchor="t" anchorCtr="0">
+            <a:normAutofit/>
+          </a:bodyPr>
+          <a:lstStyle/>
+          <a:p>
+            <a:pPr marL="0" lvl="0" indent="0" algn="l" rtl="0">
+              <a:spcBef>
+                <a:spcPts val="0"/>
+              </a:spcBef>
+              <a:spcAft>
+                <a:spcPts val="1200"/>
+              </a:spcAft>
+              <a:buNone/>
+            </a:pPr>
+            <a:r>
+              <a:rPr lang="en-MY" sz="1600" dirty="0"/>
+              <a:t>Yabba dabba doo</a:t>
+            </a:r>
+          </a:p>
+          <a:p>
+            <a:pPr marL="0" lvl="0" indent="0" algn="l" rtl="0">
+              <a:spcBef>
+                <a:spcPts val="0"/>
+              </a:spcBef>
+              <a:spcAft>
+                <a:spcPts val="1200"/>
+              </a:spcAft>
+              <a:buNone/>
+            </a:pPr>
+            <a:endParaRPr sz="1600" dirty="0"/>
+          </a:p>
+        </p:txBody>
+      </p:sp>
+    </p:spTree>
+    <p:extLst>
+      <p:ext uri="{BB962C8B-B14F-4D97-AF65-F5344CB8AC3E}">
+        <p14:creationId xmlns:p14="http://schemas.microsoft.com/office/powerpoint/2010/main" val="3618929094"/>
+      </p:ext>
+    </p:extLst>
+  </p:cSld>
+  <p:clrMapOvr>
+    <a:masterClrMapping/>
+  </p:clrMapOvr>
+</p:sld>
+</file>
+
+<file path=ppt/slides/slide15.xml><?xml version="1.0" encoding="utf-8"?>
+<p:sld xmlns:a="http://schemas.openxmlformats.org/drawingml/2006/main" xmlns:r="http://schemas.openxmlformats.org/officeDocument/2006/relationships" xmlns:p="http://schemas.openxmlformats.org/presentationml/2006/main">
+  <p:cSld>
+    <p:spTree>
+      <p:nvGrpSpPr>
+        <p:cNvPr id="1" name="Shape 121">
+          <a:extLst>
+            <a:ext uri="{FF2B5EF4-FFF2-40B4-BE49-F238E27FC236}">
+              <a16:creationId xmlns:a16="http://schemas.microsoft.com/office/drawing/2014/main" id="{3A6A18AC-A509-FCA6-E5AC-294A3A98512A}"/>
+            </a:ext>
+          </a:extLst>
+        </p:cNvPr>
+        <p:cNvGrpSpPr/>
+        <p:nvPr/>
+      </p:nvGrpSpPr>
+      <p:grpSpPr>
+        <a:xfrm>
+          <a:off x="0" y="0"/>
+          <a:ext cx="0" cy="0"/>
+          <a:chOff x="0" y="0"/>
+          <a:chExt cx="0" cy="0"/>
+        </a:xfrm>
+      </p:grpSpPr>
+      <p:sp>
+        <p:nvSpPr>
+          <p:cNvPr id="122" name="Google Shape;122;p23">
+            <a:extLst>
+              <a:ext uri="{FF2B5EF4-FFF2-40B4-BE49-F238E27FC236}">
+                <a16:creationId xmlns:a16="http://schemas.microsoft.com/office/drawing/2014/main" id="{41606CD0-3464-62B6-24A4-9E28E40E2B34}"/>
+              </a:ext>
+            </a:extLst>
+          </p:cNvPr>
+          <p:cNvSpPr txBox="1">
+            <a:spLocks noGrp="1"/>
+          </p:cNvSpPr>
+          <p:nvPr>
+            <p:ph type="title"/>
+          </p:nvPr>
+        </p:nvSpPr>
+        <p:spPr>
+          <a:xfrm>
+            <a:off x="311700" y="0"/>
+            <a:ext cx="8520600" cy="572700"/>
+          </a:xfrm>
+          <a:prstGeom prst="rect">
+            <a:avLst/>
+          </a:prstGeom>
+        </p:spPr>
+        <p:txBody>
+          <a:bodyPr spcFirstLastPara="1" wrap="square" lIns="91425" tIns="91425" rIns="91425" bIns="91425" anchor="t" anchorCtr="0">
+            <a:normAutofit fontScale="90000"/>
+          </a:bodyPr>
+          <a:lstStyle/>
+          <a:p>
+            <a:pPr lvl="0"/>
+            <a:r>
+              <a:rPr lang="en" dirty="0"/>
+              <a:t>Task 3 Performance Evaluation (graph 1)</a:t>
+            </a:r>
+            <a:endParaRPr dirty="0"/>
+          </a:p>
+        </p:txBody>
+      </p:sp>
+      <p:sp>
+        <p:nvSpPr>
+          <p:cNvPr id="123" name="Google Shape;123;p23">
+            <a:extLst>
+              <a:ext uri="{FF2B5EF4-FFF2-40B4-BE49-F238E27FC236}">
+                <a16:creationId xmlns:a16="http://schemas.microsoft.com/office/drawing/2014/main" id="{3851F7A3-58BA-D255-9E11-C1C104140E1D}"/>
+              </a:ext>
+            </a:extLst>
+          </p:cNvPr>
+          <p:cNvSpPr txBox="1">
+            <a:spLocks noGrp="1"/>
+          </p:cNvSpPr>
+          <p:nvPr>
+            <p:ph type="body" idx="1"/>
+          </p:nvPr>
+        </p:nvSpPr>
+        <p:spPr>
+          <a:xfrm>
+            <a:off x="5599775" y="1182175"/>
+            <a:ext cx="3360000" cy="3399300"/>
+          </a:xfrm>
+          <a:prstGeom prst="rect">
+            <a:avLst/>
+          </a:prstGeom>
+        </p:spPr>
+        <p:txBody>
+          <a:bodyPr spcFirstLastPara="1" wrap="square" lIns="91425" tIns="91425" rIns="91425" bIns="91425" anchor="t" anchorCtr="0">
+            <a:normAutofit/>
+          </a:bodyPr>
+          <a:lstStyle/>
+          <a:p>
+            <a:pPr marL="0" lvl="0" indent="0" algn="l" rtl="0">
+              <a:spcBef>
+                <a:spcPts val="0"/>
+              </a:spcBef>
+              <a:spcAft>
+                <a:spcPts val="0"/>
+              </a:spcAft>
+              <a:buNone/>
+            </a:pPr>
+            <a:r>
+              <a:rPr lang="en"/>
+              <a:t>Task 2 was run with 2 threads for this graph comparison.</a:t>
+            </a:r>
+            <a:endParaRPr/>
+          </a:p>
+          <a:p>
+            <a:pPr marL="0" lvl="0" indent="0" algn="l" rtl="0">
+              <a:spcBef>
+                <a:spcPts val="1200"/>
+              </a:spcBef>
+              <a:spcAft>
+                <a:spcPts val="1200"/>
+              </a:spcAft>
+              <a:buNone/>
+            </a:pPr>
+            <a:r>
+              <a:rPr lang="en"/>
+              <a:t>Task 1 is serial (runs on 1 thread).</a:t>
+            </a:r>
+            <a:endParaRPr/>
+          </a:p>
+        </p:txBody>
+      </p:sp>
+      <p:pic>
+        <p:nvPicPr>
+          <p:cNvPr id="124" name="Google Shape;124;p23">
+            <a:extLst>
+              <a:ext uri="{FF2B5EF4-FFF2-40B4-BE49-F238E27FC236}">
+                <a16:creationId xmlns:a16="http://schemas.microsoft.com/office/drawing/2014/main" id="{532AB07F-E594-6D31-CDB9-24238A2A70BE}"/>
+              </a:ext>
+            </a:extLst>
+          </p:cNvPr>
+          <p:cNvPicPr preferRelativeResize="0"/>
+          <p:nvPr/>
+        </p:nvPicPr>
+        <p:blipFill>
+          <a:blip r:embed="rId3">
+            <a:alphaModFix/>
+          </a:blip>
+          <a:stretch>
+            <a:fillRect/>
+          </a:stretch>
+        </p:blipFill>
+        <p:spPr>
+          <a:xfrm>
+            <a:off x="311700" y="790875"/>
+            <a:ext cx="5104626" cy="3148749"/>
+          </a:xfrm>
+          <a:prstGeom prst="rect">
+            <a:avLst/>
+          </a:prstGeom>
+          <a:noFill/>
+          <a:ln>
+            <a:noFill/>
+          </a:ln>
+        </p:spPr>
+      </p:pic>
+    </p:spTree>
+    <p:extLst>
+      <p:ext uri="{BB962C8B-B14F-4D97-AF65-F5344CB8AC3E}">
+        <p14:creationId xmlns:p14="http://schemas.microsoft.com/office/powerpoint/2010/main" val="529028742"/>
+      </p:ext>
+    </p:extLst>
+  </p:cSld>
+  <p:clrMapOvr>
+    <a:masterClrMapping/>
+  </p:clrMapOvr>
+</p:sld>
+</file>
+
+<file path=ppt/slides/slide16.xml><?xml version="1.0" encoding="utf-8"?>
+<p:sld xmlns:a="http://schemas.openxmlformats.org/drawingml/2006/main" xmlns:r="http://schemas.openxmlformats.org/officeDocument/2006/relationships" xmlns:p="http://schemas.openxmlformats.org/presentationml/2006/main">
+  <p:cSld>
+    <p:spTree>
+      <p:nvGrpSpPr>
         <p:cNvPr id="1" name="Shape 190"/>
         <p:cNvGrpSpPr/>
         <p:nvPr/>
@@ -7410,6 +9123,507 @@
   <p:cSld>
     <p:spTree>
       <p:nvGrpSpPr>
+        <p:cNvPr id="1" name="Shape 121"/>
+        <p:cNvGrpSpPr/>
+        <p:nvPr/>
+      </p:nvGrpSpPr>
+      <p:grpSpPr>
+        <a:xfrm>
+          <a:off x="0" y="0"/>
+          <a:ext cx="0" cy="0"/>
+          <a:chOff x="0" y="0"/>
+          <a:chExt cx="0" cy="0"/>
+        </a:xfrm>
+      </p:grpSpPr>
+      <p:sp>
+        <p:nvSpPr>
+          <p:cNvPr id="122" name="Google Shape;122;p23"/>
+          <p:cNvSpPr txBox="1">
+            <a:spLocks noGrp="1"/>
+          </p:cNvSpPr>
+          <p:nvPr>
+            <p:ph type="title"/>
+          </p:nvPr>
+        </p:nvSpPr>
+        <p:spPr>
+          <a:xfrm>
+            <a:off x="311700" y="0"/>
+            <a:ext cx="8520600" cy="572700"/>
+          </a:xfrm>
+          <a:prstGeom prst="rect">
+            <a:avLst/>
+          </a:prstGeom>
+        </p:spPr>
+        <p:txBody>
+          <a:bodyPr spcFirstLastPara="1" wrap="square" lIns="91425" tIns="91425" rIns="91425" bIns="91425" anchor="t" anchorCtr="0">
+            <a:normAutofit fontScale="90000"/>
+          </a:bodyPr>
+          <a:lstStyle/>
+          <a:p>
+            <a:pPr lvl="0"/>
+            <a:r>
+              <a:rPr lang="en" dirty="0"/>
+              <a:t>Task 1 Open MPI (graph 1)</a:t>
+            </a:r>
+            <a:endParaRPr dirty="0"/>
+          </a:p>
+        </p:txBody>
+      </p:sp>
+      <p:sp>
+        <p:nvSpPr>
+          <p:cNvPr id="123" name="Google Shape;123;p23"/>
+          <p:cNvSpPr txBox="1">
+            <a:spLocks noGrp="1"/>
+          </p:cNvSpPr>
+          <p:nvPr>
+            <p:ph type="body" idx="1"/>
+          </p:nvPr>
+        </p:nvSpPr>
+        <p:spPr>
+          <a:xfrm>
+            <a:off x="5599775" y="1182175"/>
+            <a:ext cx="3360000" cy="3399300"/>
+          </a:xfrm>
+          <a:prstGeom prst="rect">
+            <a:avLst/>
+          </a:prstGeom>
+        </p:spPr>
+        <p:txBody>
+          <a:bodyPr spcFirstLastPara="1" wrap="square" lIns="91425" tIns="91425" rIns="91425" bIns="91425" anchor="t" anchorCtr="0">
+            <a:normAutofit/>
+          </a:bodyPr>
+          <a:lstStyle/>
+          <a:p>
+            <a:pPr marL="0" lvl="0" indent="0">
+              <a:buNone/>
+            </a:pPr>
+            <a:r>
+              <a:rPr lang="en-MY" dirty="0"/>
+              <a:t>Open MPI was run with 4 processes and cyclic partitioning for this graph.</a:t>
+            </a:r>
+          </a:p>
+          <a:p>
+            <a:pPr marL="0" lvl="0" indent="0">
+              <a:buNone/>
+            </a:pPr>
+            <a:endParaRPr lang="en-MY" dirty="0"/>
+          </a:p>
+          <a:p>
+            <a:pPr marL="0" lvl="0" indent="0">
+              <a:buNone/>
+            </a:pPr>
+            <a:r>
+              <a:rPr lang="en-MY" dirty="0"/>
+              <a:t>OpenMP was run with 4 threads for this graph.</a:t>
+            </a:r>
+          </a:p>
+        </p:txBody>
+      </p:sp>
+      <p:pic>
+        <p:nvPicPr>
+          <p:cNvPr id="2" name="Picture 1">
+            <a:extLst>
+              <a:ext uri="{FF2B5EF4-FFF2-40B4-BE49-F238E27FC236}">
+                <a16:creationId xmlns:a16="http://schemas.microsoft.com/office/drawing/2014/main" id="{C74B145E-3DDC-0827-6397-983F7F7ED55F}"/>
+              </a:ext>
+            </a:extLst>
+          </p:cNvPr>
+          <p:cNvPicPr>
+            <a:picLocks noChangeAspect="1"/>
+          </p:cNvPicPr>
+          <p:nvPr/>
+        </p:nvPicPr>
+        <p:blipFill>
+          <a:blip r:embed="rId3"/>
+          <a:stretch>
+            <a:fillRect/>
+          </a:stretch>
+        </p:blipFill>
+        <p:spPr>
+          <a:xfrm>
+            <a:off x="311700" y="1003544"/>
+            <a:ext cx="5145005" cy="3136412"/>
+          </a:xfrm>
+          <a:prstGeom prst="rect">
+            <a:avLst/>
+          </a:prstGeom>
+        </p:spPr>
+      </p:pic>
+    </p:spTree>
+  </p:cSld>
+  <p:clrMapOvr>
+    <a:masterClrMapping/>
+  </p:clrMapOvr>
+</p:sld>
+</file>
+
+<file path=ppt/slides/slide6.xml><?xml version="1.0" encoding="utf-8"?>
+<p:sld xmlns:a="http://schemas.openxmlformats.org/drawingml/2006/main" xmlns:r="http://schemas.openxmlformats.org/officeDocument/2006/relationships" xmlns:p="http://schemas.openxmlformats.org/presentationml/2006/main">
+  <p:cSld>
+    <p:spTree>
+      <p:nvGrpSpPr>
+        <p:cNvPr id="1" name="Shape 121">
+          <a:extLst>
+            <a:ext uri="{FF2B5EF4-FFF2-40B4-BE49-F238E27FC236}">
+              <a16:creationId xmlns:a16="http://schemas.microsoft.com/office/drawing/2014/main" id="{58618BBA-5039-2977-80E2-CE9B93F01853}"/>
+            </a:ext>
+          </a:extLst>
+        </p:cNvPr>
+        <p:cNvGrpSpPr/>
+        <p:nvPr/>
+      </p:nvGrpSpPr>
+      <p:grpSpPr>
+        <a:xfrm>
+          <a:off x="0" y="0"/>
+          <a:ext cx="0" cy="0"/>
+          <a:chOff x="0" y="0"/>
+          <a:chExt cx="0" cy="0"/>
+        </a:xfrm>
+      </p:grpSpPr>
+      <p:sp>
+        <p:nvSpPr>
+          <p:cNvPr id="122" name="Google Shape;122;p23">
+            <a:extLst>
+              <a:ext uri="{FF2B5EF4-FFF2-40B4-BE49-F238E27FC236}">
+                <a16:creationId xmlns:a16="http://schemas.microsoft.com/office/drawing/2014/main" id="{012AEE91-F177-ABC5-FC9D-0940E5DF1CD3}"/>
+              </a:ext>
+            </a:extLst>
+          </p:cNvPr>
+          <p:cNvSpPr txBox="1">
+            <a:spLocks noGrp="1"/>
+          </p:cNvSpPr>
+          <p:nvPr>
+            <p:ph type="title"/>
+          </p:nvPr>
+        </p:nvSpPr>
+        <p:spPr>
+          <a:xfrm>
+            <a:off x="311700" y="0"/>
+            <a:ext cx="8520600" cy="572700"/>
+          </a:xfrm>
+          <a:prstGeom prst="rect">
+            <a:avLst/>
+          </a:prstGeom>
+        </p:spPr>
+        <p:txBody>
+          <a:bodyPr spcFirstLastPara="1" wrap="square" lIns="91425" tIns="91425" rIns="91425" bIns="91425" anchor="t" anchorCtr="0">
+            <a:normAutofit fontScale="90000"/>
+          </a:bodyPr>
+          <a:lstStyle/>
+          <a:p>
+            <a:pPr lvl="0"/>
+            <a:r>
+              <a:rPr lang="en" dirty="0"/>
+              <a:t>Task 1 Open MPI (graph 2)</a:t>
+            </a:r>
+            <a:endParaRPr dirty="0"/>
+          </a:p>
+        </p:txBody>
+      </p:sp>
+      <p:sp>
+        <p:nvSpPr>
+          <p:cNvPr id="123" name="Google Shape;123;p23">
+            <a:extLst>
+              <a:ext uri="{FF2B5EF4-FFF2-40B4-BE49-F238E27FC236}">
+                <a16:creationId xmlns:a16="http://schemas.microsoft.com/office/drawing/2014/main" id="{93E222F5-5800-C9C7-92D2-38B0AFB94C9A}"/>
+              </a:ext>
+            </a:extLst>
+          </p:cNvPr>
+          <p:cNvSpPr txBox="1">
+            <a:spLocks noGrp="1"/>
+          </p:cNvSpPr>
+          <p:nvPr>
+            <p:ph type="body" idx="1"/>
+          </p:nvPr>
+        </p:nvSpPr>
+        <p:spPr>
+          <a:xfrm>
+            <a:off x="5599775" y="1182175"/>
+            <a:ext cx="3360000" cy="3399300"/>
+          </a:xfrm>
+          <a:prstGeom prst="rect">
+            <a:avLst/>
+          </a:prstGeom>
+        </p:spPr>
+        <p:txBody>
+          <a:bodyPr spcFirstLastPara="1" wrap="square" lIns="91425" tIns="91425" rIns="91425" bIns="91425" anchor="t" anchorCtr="0">
+            <a:normAutofit/>
+          </a:bodyPr>
+          <a:lstStyle/>
+          <a:p>
+            <a:pPr marL="0" lvl="0" indent="0" algn="l" rtl="0">
+              <a:spcBef>
+                <a:spcPts val="0"/>
+              </a:spcBef>
+              <a:spcAft>
+                <a:spcPts val="0"/>
+              </a:spcAft>
+              <a:buNone/>
+            </a:pPr>
+            <a:r>
+              <a:rPr lang="en" dirty="0"/>
+              <a:t>Open MPI was run with 4 processes and cyclic partitioning for this graph.</a:t>
+            </a:r>
+          </a:p>
+          <a:p>
+            <a:pPr marL="0" lvl="0" indent="0" algn="l" rtl="0">
+              <a:spcBef>
+                <a:spcPts val="0"/>
+              </a:spcBef>
+              <a:spcAft>
+                <a:spcPts val="0"/>
+              </a:spcAft>
+              <a:buNone/>
+            </a:pPr>
+            <a:endParaRPr lang="en" dirty="0"/>
+          </a:p>
+          <a:p>
+            <a:pPr marL="0" lvl="0" indent="0" algn="l" rtl="0">
+              <a:spcBef>
+                <a:spcPts val="0"/>
+              </a:spcBef>
+              <a:spcAft>
+                <a:spcPts val="0"/>
+              </a:spcAft>
+              <a:buNone/>
+            </a:pPr>
+            <a:r>
+              <a:rPr lang="en" dirty="0"/>
+              <a:t>OpenMP was run with 4 threads for this graph.</a:t>
+            </a:r>
+            <a:endParaRPr dirty="0"/>
+          </a:p>
+        </p:txBody>
+      </p:sp>
+      <p:pic>
+        <p:nvPicPr>
+          <p:cNvPr id="4" name="Picture 3">
+            <a:extLst>
+              <a:ext uri="{FF2B5EF4-FFF2-40B4-BE49-F238E27FC236}">
+                <a16:creationId xmlns:a16="http://schemas.microsoft.com/office/drawing/2014/main" id="{7F2CF125-5F50-A1FF-0219-A5B5228C3537}"/>
+              </a:ext>
+            </a:extLst>
+          </p:cNvPr>
+          <p:cNvPicPr>
+            <a:picLocks noChangeAspect="1"/>
+          </p:cNvPicPr>
+          <p:nvPr/>
+        </p:nvPicPr>
+        <p:blipFill>
+          <a:blip r:embed="rId3"/>
+          <a:stretch>
+            <a:fillRect/>
+          </a:stretch>
+        </p:blipFill>
+        <p:spPr>
+          <a:xfrm>
+            <a:off x="311700" y="1024405"/>
+            <a:ext cx="5016988" cy="3094689"/>
+          </a:xfrm>
+          <a:prstGeom prst="rect">
+            <a:avLst/>
+          </a:prstGeom>
+        </p:spPr>
+      </p:pic>
+    </p:spTree>
+    <p:extLst>
+      <p:ext uri="{BB962C8B-B14F-4D97-AF65-F5344CB8AC3E}">
+        <p14:creationId xmlns:p14="http://schemas.microsoft.com/office/powerpoint/2010/main" val="1413315195"/>
+      </p:ext>
+    </p:extLst>
+  </p:cSld>
+  <p:clrMapOvr>
+    <a:masterClrMapping/>
+  </p:clrMapOvr>
+</p:sld>
+</file>
+
+<file path=ppt/slides/slide7.xml><?xml version="1.0" encoding="utf-8"?>
+<p:sld xmlns:a="http://schemas.openxmlformats.org/drawingml/2006/main" xmlns:r="http://schemas.openxmlformats.org/officeDocument/2006/relationships" xmlns:p="http://schemas.openxmlformats.org/presentationml/2006/main">
+  <p:cSld>
+    <p:spTree>
+      <p:nvGrpSpPr>
+        <p:cNvPr id="1" name="Shape 121">
+          <a:extLst>
+            <a:ext uri="{FF2B5EF4-FFF2-40B4-BE49-F238E27FC236}">
+              <a16:creationId xmlns:a16="http://schemas.microsoft.com/office/drawing/2014/main" id="{0BF1B462-3739-D9D6-FF91-A55929FCAA38}"/>
+            </a:ext>
+          </a:extLst>
+        </p:cNvPr>
+        <p:cNvGrpSpPr/>
+        <p:nvPr/>
+      </p:nvGrpSpPr>
+      <p:grpSpPr>
+        <a:xfrm>
+          <a:off x="0" y="0"/>
+          <a:ext cx="0" cy="0"/>
+          <a:chOff x="0" y="0"/>
+          <a:chExt cx="0" cy="0"/>
+        </a:xfrm>
+      </p:grpSpPr>
+      <p:sp>
+        <p:nvSpPr>
+          <p:cNvPr id="122" name="Google Shape;122;p23">
+            <a:extLst>
+              <a:ext uri="{FF2B5EF4-FFF2-40B4-BE49-F238E27FC236}">
+                <a16:creationId xmlns:a16="http://schemas.microsoft.com/office/drawing/2014/main" id="{FE38EDB7-F2C7-EF25-784D-40E1BC5F9E81}"/>
+              </a:ext>
+            </a:extLst>
+          </p:cNvPr>
+          <p:cNvSpPr txBox="1">
+            <a:spLocks noGrp="1"/>
+          </p:cNvSpPr>
+          <p:nvPr>
+            <p:ph type="title"/>
+          </p:nvPr>
+        </p:nvSpPr>
+        <p:spPr>
+          <a:xfrm>
+            <a:off x="311700" y="0"/>
+            <a:ext cx="8520600" cy="572700"/>
+          </a:xfrm>
+          <a:prstGeom prst="rect">
+            <a:avLst/>
+          </a:prstGeom>
+        </p:spPr>
+        <p:txBody>
+          <a:bodyPr spcFirstLastPara="1" wrap="square" lIns="91425" tIns="91425" rIns="91425" bIns="91425" anchor="t" anchorCtr="0">
+            <a:normAutofit fontScale="90000"/>
+          </a:bodyPr>
+          <a:lstStyle/>
+          <a:p>
+            <a:pPr lvl="0"/>
+            <a:r>
+              <a:rPr lang="en" dirty="0"/>
+              <a:t>Task 1 Open MPI (graph 3)</a:t>
+            </a:r>
+            <a:endParaRPr dirty="0"/>
+          </a:p>
+        </p:txBody>
+      </p:sp>
+      <p:sp>
+        <p:nvSpPr>
+          <p:cNvPr id="123" name="Google Shape;123;p23">
+            <a:extLst>
+              <a:ext uri="{FF2B5EF4-FFF2-40B4-BE49-F238E27FC236}">
+                <a16:creationId xmlns:a16="http://schemas.microsoft.com/office/drawing/2014/main" id="{EC4EF5C9-EEAF-F508-FB3D-7195E5EA6172}"/>
+              </a:ext>
+            </a:extLst>
+          </p:cNvPr>
+          <p:cNvSpPr txBox="1">
+            <a:spLocks noGrp="1"/>
+          </p:cNvSpPr>
+          <p:nvPr>
+            <p:ph type="body" idx="1"/>
+          </p:nvPr>
+        </p:nvSpPr>
+        <p:spPr>
+          <a:xfrm>
+            <a:off x="5599775" y="1182175"/>
+            <a:ext cx="3360000" cy="3399300"/>
+          </a:xfrm>
+          <a:prstGeom prst="rect">
+            <a:avLst/>
+          </a:prstGeom>
+        </p:spPr>
+        <p:txBody>
+          <a:bodyPr spcFirstLastPara="1" wrap="square" lIns="91425" tIns="91425" rIns="91425" bIns="91425" anchor="t" anchorCtr="0">
+            <a:normAutofit/>
+          </a:bodyPr>
+          <a:lstStyle/>
+          <a:p>
+            <a:pPr marL="0" lvl="0" indent="0" algn="l" rtl="0">
+              <a:spcBef>
+                <a:spcPts val="0"/>
+              </a:spcBef>
+              <a:spcAft>
+                <a:spcPts val="0"/>
+              </a:spcAft>
+              <a:buNone/>
+            </a:pPr>
+            <a:r>
+              <a:rPr lang="en" dirty="0"/>
+              <a:t>Open MPI was run with cyclic partitioning for this graph.</a:t>
+            </a:r>
+          </a:p>
+          <a:p>
+            <a:pPr marL="0" lvl="0" indent="0" algn="l" rtl="0">
+              <a:spcBef>
+                <a:spcPts val="0"/>
+              </a:spcBef>
+              <a:spcAft>
+                <a:spcPts val="0"/>
+              </a:spcAft>
+              <a:buNone/>
+            </a:pPr>
+            <a:endParaRPr lang="en" dirty="0"/>
+          </a:p>
+          <a:p>
+            <a:pPr marL="0" lvl="0" indent="0" algn="l" rtl="0">
+              <a:spcBef>
+                <a:spcPts val="0"/>
+              </a:spcBef>
+              <a:spcAft>
+                <a:spcPts val="0"/>
+              </a:spcAft>
+              <a:buNone/>
+            </a:pPr>
+            <a:r>
+              <a:rPr lang="en" dirty="0"/>
+              <a:t>Both Open MPI and OpenMP was run with an n of 205,000,000 for this graph.</a:t>
+            </a:r>
+            <a:endParaRPr dirty="0"/>
+          </a:p>
+        </p:txBody>
+      </p:sp>
+      <p:pic>
+        <p:nvPicPr>
+          <p:cNvPr id="2" name="Picture 1">
+            <a:extLst>
+              <a:ext uri="{FF2B5EF4-FFF2-40B4-BE49-F238E27FC236}">
+                <a16:creationId xmlns:a16="http://schemas.microsoft.com/office/drawing/2014/main" id="{6C2B8405-3052-CBCA-9C36-17C7AAB90B32}"/>
+              </a:ext>
+            </a:extLst>
+          </p:cNvPr>
+          <p:cNvPicPr>
+            <a:picLocks noChangeAspect="1"/>
+          </p:cNvPicPr>
+          <p:nvPr/>
+        </p:nvPicPr>
+        <p:blipFill>
+          <a:blip r:embed="rId3"/>
+          <a:stretch>
+            <a:fillRect/>
+          </a:stretch>
+        </p:blipFill>
+        <p:spPr>
+          <a:xfrm>
+            <a:off x="311700" y="1042714"/>
+            <a:ext cx="4957625" cy="3058072"/>
+          </a:xfrm>
+          <a:prstGeom prst="rect">
+            <a:avLst/>
+          </a:prstGeom>
+        </p:spPr>
+      </p:pic>
+    </p:spTree>
+    <p:extLst>
+      <p:ext uri="{BB962C8B-B14F-4D97-AF65-F5344CB8AC3E}">
+        <p14:creationId xmlns:p14="http://schemas.microsoft.com/office/powerpoint/2010/main" val="1767072563"/>
+      </p:ext>
+    </p:extLst>
+  </p:cSld>
+  <p:clrMapOvr>
+    <a:masterClrMapping/>
+  </p:clrMapOvr>
+</p:sld>
+</file>
+
+<file path=ppt/slides/slide8.xml><?xml version="1.0" encoding="utf-8"?>
+<p:sld xmlns:a="http://schemas.openxmlformats.org/drawingml/2006/main" xmlns:r="http://schemas.openxmlformats.org/officeDocument/2006/relationships" xmlns:p="http://schemas.openxmlformats.org/presentationml/2006/main">
+  <p:cSld>
+    <p:spTree>
+      <p:nvGrpSpPr>
         <p:cNvPr id="1" name="Shape 53">
           <a:extLst>
             <a:ext uri="{FF2B5EF4-FFF2-40B4-BE49-F238E27FC236}">
@@ -7529,7 +9743,7 @@
 </p:sld>
 </file>
 
-<file path=ppt/slides/slide6.xml><?xml version="1.0" encoding="utf-8"?>
+<file path=ppt/slides/slide9.xml><?xml version="1.0" encoding="utf-8"?>
 <p:sld xmlns:a="http://schemas.openxmlformats.org/drawingml/2006/main" xmlns:r="http://schemas.openxmlformats.org/officeDocument/2006/relationships" xmlns:p="http://schemas.openxmlformats.org/presentationml/2006/main">
   <p:cSld>
     <p:spTree>
@@ -7762,483 +9976,6 @@
     <p:extLst>
       <p:ext uri="{BB962C8B-B14F-4D97-AF65-F5344CB8AC3E}">
         <p14:creationId xmlns:p14="http://schemas.microsoft.com/office/powerpoint/2010/main" val="1376272356"/>
-      </p:ext>
-    </p:extLst>
-  </p:cSld>
-  <p:clrMapOvr>
-    <a:masterClrMapping/>
-  </p:clrMapOvr>
-</p:sld>
-</file>
-
-<file path=ppt/slides/slide7.xml><?xml version="1.0" encoding="utf-8"?>
-<p:sld xmlns:a="http://schemas.openxmlformats.org/drawingml/2006/main" xmlns:r="http://schemas.openxmlformats.org/officeDocument/2006/relationships" xmlns:p="http://schemas.openxmlformats.org/presentationml/2006/main">
-  <p:cSld>
-    <p:spTree>
-      <p:nvGrpSpPr>
-        <p:cNvPr id="1" name="Shape 59">
-          <a:extLst>
-            <a:ext uri="{FF2B5EF4-FFF2-40B4-BE49-F238E27FC236}">
-              <a16:creationId xmlns:a16="http://schemas.microsoft.com/office/drawing/2014/main" id="{42F24529-CFE0-5FA9-FB54-43F03632233F}"/>
-            </a:ext>
-          </a:extLst>
-        </p:cNvPr>
-        <p:cNvGrpSpPr/>
-        <p:nvPr/>
-      </p:nvGrpSpPr>
-      <p:grpSpPr>
-        <a:xfrm>
-          <a:off x="0" y="0"/>
-          <a:ext cx="0" cy="0"/>
-          <a:chOff x="0" y="0"/>
-          <a:chExt cx="0" cy="0"/>
-        </a:xfrm>
-      </p:grpSpPr>
-      <p:sp>
-        <p:nvSpPr>
-          <p:cNvPr id="60" name="Google Shape;60;p14">
-            <a:extLst>
-              <a:ext uri="{FF2B5EF4-FFF2-40B4-BE49-F238E27FC236}">
-                <a16:creationId xmlns:a16="http://schemas.microsoft.com/office/drawing/2014/main" id="{8D9EAC0E-527A-DAFF-F1FE-651C8F5C98B8}"/>
-              </a:ext>
-            </a:extLst>
-          </p:cNvPr>
-          <p:cNvSpPr txBox="1">
-            <a:spLocks noGrp="1"/>
-          </p:cNvSpPr>
-          <p:nvPr>
-            <p:ph type="title"/>
-          </p:nvPr>
-        </p:nvSpPr>
-        <p:spPr>
-          <a:xfrm>
-            <a:off x="311700" y="-1"/>
-            <a:ext cx="8520600" cy="812801"/>
-          </a:xfrm>
-          <a:prstGeom prst="rect">
-            <a:avLst/>
-          </a:prstGeom>
-        </p:spPr>
-        <p:txBody>
-          <a:bodyPr spcFirstLastPara="1" wrap="square" lIns="91425" tIns="91425" rIns="91425" bIns="91425" anchor="t" anchorCtr="0">
-            <a:noAutofit/>
-          </a:bodyPr>
-          <a:lstStyle/>
-          <a:p>
-            <a:pPr lvl="0"/>
-            <a:r>
-              <a:rPr lang="en" sz="2500" dirty="0"/>
-              <a:t>Task 2 Open MPI + Open MP Code </a:t>
-            </a:r>
-            <a:r>
-              <a:rPr lang="en-MY" sz="2500" dirty="0"/>
-              <a:t>Parallel Partitioning Schemes</a:t>
-            </a:r>
-            <a:endParaRPr sz="2500" dirty="0"/>
-          </a:p>
-        </p:txBody>
-      </p:sp>
-      <p:sp>
-        <p:nvSpPr>
-          <p:cNvPr id="61" name="Google Shape;61;p14">
-            <a:extLst>
-              <a:ext uri="{FF2B5EF4-FFF2-40B4-BE49-F238E27FC236}">
-                <a16:creationId xmlns:a16="http://schemas.microsoft.com/office/drawing/2014/main" id="{569C7C10-D39B-86AA-F7B8-36EB1C77C188}"/>
-              </a:ext>
-            </a:extLst>
-          </p:cNvPr>
-          <p:cNvSpPr txBox="1">
-            <a:spLocks noGrp="1"/>
-          </p:cNvSpPr>
-          <p:nvPr>
-            <p:ph type="body" idx="1"/>
-          </p:nvPr>
-        </p:nvSpPr>
-        <p:spPr>
-          <a:xfrm>
-            <a:off x="311700" y="1164492"/>
-            <a:ext cx="8520600" cy="3422382"/>
-          </a:xfrm>
-          <a:prstGeom prst="rect">
-            <a:avLst/>
-          </a:prstGeom>
-        </p:spPr>
-        <p:txBody>
-          <a:bodyPr spcFirstLastPara="1" wrap="square" lIns="91425" tIns="91425" rIns="91425" bIns="91425" anchor="t" anchorCtr="0">
-            <a:normAutofit/>
-          </a:bodyPr>
-          <a:lstStyle/>
-          <a:p>
-            <a:pPr marL="0" lvl="0" indent="0" algn="l" rtl="0">
-              <a:spcBef>
-                <a:spcPts val="0"/>
-              </a:spcBef>
-              <a:spcAft>
-                <a:spcPts val="1200"/>
-              </a:spcAft>
-              <a:buNone/>
-            </a:pPr>
-            <a:r>
-              <a:rPr lang="en-MY" sz="1600" dirty="0"/>
-              <a:t>Workload distribution operates across two distinct hierarchical layers to prevent thread idling and balance trial division workloads:</a:t>
-            </a:r>
-          </a:p>
-          <a:p>
-            <a:pPr marL="0" lvl="0" indent="0" algn="l" rtl="0">
-              <a:spcBef>
-                <a:spcPts val="0"/>
-              </a:spcBef>
-              <a:spcAft>
-                <a:spcPts val="1200"/>
-              </a:spcAft>
-              <a:buNone/>
-            </a:pPr>
-            <a:r>
-              <a:rPr lang="en-MY" sz="1600" dirty="0"/>
-              <a:t>Layer 1: Process-Level Distribution (Inter-Process / MPI)</a:t>
-            </a:r>
-          </a:p>
-          <a:p>
-            <a:pPr marL="0" lvl="0" indent="0" algn="l" rtl="0">
-              <a:spcBef>
-                <a:spcPts val="0"/>
-              </a:spcBef>
-              <a:spcAft>
-                <a:spcPts val="1200"/>
-              </a:spcAft>
-              <a:buNone/>
-            </a:pPr>
-            <a:r>
-              <a:rPr lang="en-MY" sz="1600" dirty="0"/>
-              <a:t>Block / Cyclic / Block-Cyclic Allocation: Candidates or candidate blocks are dealt round-robin among MPI processes based on their MPI rank r and process count P. </a:t>
-            </a:r>
-          </a:p>
-          <a:p>
-            <a:pPr marL="0" lvl="0" indent="0" algn="l" rtl="0">
-              <a:spcBef>
-                <a:spcPts val="0"/>
-              </a:spcBef>
-              <a:spcAft>
-                <a:spcPts val="1200"/>
-              </a:spcAft>
-              <a:buNone/>
-            </a:pPr>
-            <a:r>
-              <a:rPr lang="en-MY" sz="1600" dirty="0"/>
-              <a:t>Coarse Load Balancing: Ensures high-level compute balance across distinct machines or CPU sockets. </a:t>
-            </a:r>
-          </a:p>
-          <a:p>
-            <a:pPr marL="0" lvl="0" indent="0" algn="l" rtl="0">
-              <a:spcBef>
-                <a:spcPts val="0"/>
-              </a:spcBef>
-              <a:spcAft>
-                <a:spcPts val="1200"/>
-              </a:spcAft>
-              <a:buNone/>
-            </a:pPr>
-            <a:endParaRPr sz="1600" dirty="0"/>
-          </a:p>
-        </p:txBody>
-      </p:sp>
-    </p:spTree>
-    <p:extLst>
-      <p:ext uri="{BB962C8B-B14F-4D97-AF65-F5344CB8AC3E}">
-        <p14:creationId xmlns:p14="http://schemas.microsoft.com/office/powerpoint/2010/main" val="1889495280"/>
-      </p:ext>
-    </p:extLst>
-  </p:cSld>
-  <p:clrMapOvr>
-    <a:masterClrMapping/>
-  </p:clrMapOvr>
-</p:sld>
-</file>
-
-<file path=ppt/slides/slide8.xml><?xml version="1.0" encoding="utf-8"?>
-<p:sld xmlns:a="http://schemas.openxmlformats.org/drawingml/2006/main" xmlns:r="http://schemas.openxmlformats.org/officeDocument/2006/relationships" xmlns:p="http://schemas.openxmlformats.org/presentationml/2006/main">
-  <p:cSld>
-    <p:spTree>
-      <p:nvGrpSpPr>
-        <p:cNvPr id="1" name="Shape 59">
-          <a:extLst>
-            <a:ext uri="{FF2B5EF4-FFF2-40B4-BE49-F238E27FC236}">
-              <a16:creationId xmlns:a16="http://schemas.microsoft.com/office/drawing/2014/main" id="{EB5EFF8F-7746-192E-3B97-88FA9C0C4E82}"/>
-            </a:ext>
-          </a:extLst>
-        </p:cNvPr>
-        <p:cNvGrpSpPr/>
-        <p:nvPr/>
-      </p:nvGrpSpPr>
-      <p:grpSpPr>
-        <a:xfrm>
-          <a:off x="0" y="0"/>
-          <a:ext cx="0" cy="0"/>
-          <a:chOff x="0" y="0"/>
-          <a:chExt cx="0" cy="0"/>
-        </a:xfrm>
-      </p:grpSpPr>
-      <p:sp>
-        <p:nvSpPr>
-          <p:cNvPr id="60" name="Google Shape;60;p14">
-            <a:extLst>
-              <a:ext uri="{FF2B5EF4-FFF2-40B4-BE49-F238E27FC236}">
-                <a16:creationId xmlns:a16="http://schemas.microsoft.com/office/drawing/2014/main" id="{EB33225A-5173-8445-A969-FDF60F4161A9}"/>
-              </a:ext>
-            </a:extLst>
-          </p:cNvPr>
-          <p:cNvSpPr txBox="1">
-            <a:spLocks noGrp="1"/>
-          </p:cNvSpPr>
-          <p:nvPr>
-            <p:ph type="title"/>
-          </p:nvPr>
-        </p:nvSpPr>
-        <p:spPr>
-          <a:xfrm>
-            <a:off x="311700" y="-1"/>
-            <a:ext cx="8520600" cy="812801"/>
-          </a:xfrm>
-          <a:prstGeom prst="rect">
-            <a:avLst/>
-          </a:prstGeom>
-        </p:spPr>
-        <p:txBody>
-          <a:bodyPr spcFirstLastPara="1" wrap="square" lIns="91425" tIns="91425" rIns="91425" bIns="91425" anchor="t" anchorCtr="0">
-            <a:noAutofit/>
-          </a:bodyPr>
-          <a:lstStyle/>
-          <a:p>
-            <a:pPr lvl="0"/>
-            <a:r>
-              <a:rPr lang="en" sz="2500" dirty="0"/>
-              <a:t>Task 2 Open MPI + Open MP Code </a:t>
-            </a:r>
-            <a:r>
-              <a:rPr lang="en-MY" sz="2500" dirty="0"/>
-              <a:t>Parallel Partitioning Schemes</a:t>
-            </a:r>
-            <a:endParaRPr sz="2500" dirty="0"/>
-          </a:p>
-        </p:txBody>
-      </p:sp>
-      <p:sp>
-        <p:nvSpPr>
-          <p:cNvPr id="61" name="Google Shape;61;p14">
-            <a:extLst>
-              <a:ext uri="{FF2B5EF4-FFF2-40B4-BE49-F238E27FC236}">
-                <a16:creationId xmlns:a16="http://schemas.microsoft.com/office/drawing/2014/main" id="{55A918E6-4677-344F-8CA5-A01B651AAD9E}"/>
-              </a:ext>
-            </a:extLst>
-          </p:cNvPr>
-          <p:cNvSpPr txBox="1">
-            <a:spLocks noGrp="1"/>
-          </p:cNvSpPr>
-          <p:nvPr>
-            <p:ph type="body" idx="1"/>
-          </p:nvPr>
-        </p:nvSpPr>
-        <p:spPr>
-          <a:xfrm>
-            <a:off x="311700" y="1164492"/>
-            <a:ext cx="8520600" cy="3422382"/>
-          </a:xfrm>
-          <a:prstGeom prst="rect">
-            <a:avLst/>
-          </a:prstGeom>
-        </p:spPr>
-        <p:txBody>
-          <a:bodyPr spcFirstLastPara="1" wrap="square" lIns="91425" tIns="91425" rIns="91425" bIns="91425" anchor="t" anchorCtr="0">
-            <a:normAutofit/>
-          </a:bodyPr>
-          <a:lstStyle/>
-          <a:p>
-            <a:pPr marL="0" lvl="0" indent="0" algn="l" rtl="0">
-              <a:spcBef>
-                <a:spcPts val="0"/>
-              </a:spcBef>
-              <a:spcAft>
-                <a:spcPts val="1200"/>
-              </a:spcAft>
-              <a:buNone/>
-            </a:pPr>
-            <a:r>
-              <a:rPr lang="en-MY" sz="1600" dirty="0"/>
-              <a:t>Layer 2: Thread-Level Distribution (Intra-Process / OpenMP)</a:t>
-            </a:r>
-          </a:p>
-          <a:p>
-            <a:pPr marL="0" lvl="0" indent="0" algn="l" rtl="0">
-              <a:spcBef>
-                <a:spcPts val="0"/>
-              </a:spcBef>
-              <a:spcAft>
-                <a:spcPts val="1200"/>
-              </a:spcAft>
-              <a:buNone/>
-            </a:pPr>
-            <a:r>
-              <a:rPr lang="en-MY" sz="1600" dirty="0"/>
-              <a:t>Static / Dynamic / Guided Scheduling: OpenMP pragmas (#pragma </a:t>
-            </a:r>
-            <a:r>
-              <a:rPr lang="en-MY" sz="1600" dirty="0" err="1"/>
-              <a:t>omp</a:t>
-            </a:r>
-            <a:r>
-              <a:rPr lang="en-MY" sz="1600" dirty="0"/>
-              <a:t> parallel for schedule(...)) partition the process's assigned candidate chunk among local threads. </a:t>
-            </a:r>
-          </a:p>
-          <a:p>
-            <a:pPr marL="0" lvl="0" indent="0" algn="l" rtl="0">
-              <a:spcBef>
-                <a:spcPts val="0"/>
-              </a:spcBef>
-              <a:spcAft>
-                <a:spcPts val="1200"/>
-              </a:spcAft>
-              <a:buNone/>
-            </a:pPr>
-            <a:r>
-              <a:rPr lang="en-MY" sz="1600" dirty="0"/>
-              <a:t>Fine-Grained Load Balancing: Because higher candidate values require more trial division steps, dynamic or cyclic thread scheduling prevents thread starvation within the same shared-memory node. </a:t>
-            </a:r>
-          </a:p>
-        </p:txBody>
-      </p:sp>
-    </p:spTree>
-    <p:extLst>
-      <p:ext uri="{BB962C8B-B14F-4D97-AF65-F5344CB8AC3E}">
-        <p14:creationId xmlns:p14="http://schemas.microsoft.com/office/powerpoint/2010/main" val="1100287153"/>
-      </p:ext>
-    </p:extLst>
-  </p:cSld>
-  <p:clrMapOvr>
-    <a:masterClrMapping/>
-  </p:clrMapOvr>
-</p:sld>
-</file>
-
-<file path=ppt/slides/slide9.xml><?xml version="1.0" encoding="utf-8"?>
-<p:sld xmlns:a="http://schemas.openxmlformats.org/drawingml/2006/main" xmlns:r="http://schemas.openxmlformats.org/officeDocument/2006/relationships" xmlns:p="http://schemas.openxmlformats.org/presentationml/2006/main">
-  <p:cSld>
-    <p:spTree>
-      <p:nvGrpSpPr>
-        <p:cNvPr id="1" name="Shape 53">
-          <a:extLst>
-            <a:ext uri="{FF2B5EF4-FFF2-40B4-BE49-F238E27FC236}">
-              <a16:creationId xmlns:a16="http://schemas.microsoft.com/office/drawing/2014/main" id="{59E4D482-1C32-3BEA-C46A-87BD91DD2941}"/>
-            </a:ext>
-          </a:extLst>
-        </p:cNvPr>
-        <p:cNvGrpSpPr/>
-        <p:nvPr/>
-      </p:nvGrpSpPr>
-      <p:grpSpPr>
-        <a:xfrm>
-          <a:off x="0" y="0"/>
-          <a:ext cx="0" cy="0"/>
-          <a:chOff x="0" y="0"/>
-          <a:chExt cx="0" cy="0"/>
-        </a:xfrm>
-      </p:grpSpPr>
-      <p:sp>
-        <p:nvSpPr>
-          <p:cNvPr id="54" name="Google Shape;54;p13">
-            <a:extLst>
-              <a:ext uri="{FF2B5EF4-FFF2-40B4-BE49-F238E27FC236}">
-                <a16:creationId xmlns:a16="http://schemas.microsoft.com/office/drawing/2014/main" id="{A54B520D-853D-95DB-EC3F-C2B08891D3A8}"/>
-              </a:ext>
-            </a:extLst>
-          </p:cNvPr>
-          <p:cNvSpPr txBox="1">
-            <a:spLocks noGrp="1"/>
-          </p:cNvSpPr>
-          <p:nvPr>
-            <p:ph type="ctrTitle"/>
-          </p:nvPr>
-        </p:nvSpPr>
-        <p:spPr>
-          <a:xfrm>
-            <a:off x="311708" y="744575"/>
-            <a:ext cx="8520600" cy="2052600"/>
-          </a:xfrm>
-          <a:prstGeom prst="rect">
-            <a:avLst/>
-          </a:prstGeom>
-        </p:spPr>
-        <p:txBody>
-          <a:bodyPr spcFirstLastPara="1" wrap="square" lIns="91425" tIns="91425" rIns="91425" bIns="91425" anchor="b" anchorCtr="0">
-            <a:normAutofit/>
-          </a:bodyPr>
-          <a:lstStyle/>
-          <a:p>
-            <a:pPr lvl="0"/>
-            <a:r>
-              <a:rPr lang="en" sz="4000" dirty="0"/>
-              <a:t>Task 3 </a:t>
-            </a:r>
-            <a:r>
-              <a:rPr lang="en-MY" sz="4000" dirty="0"/>
-              <a:t>Performance Evaluation</a:t>
-            </a:r>
-            <a:endParaRPr sz="4000" dirty="0"/>
-          </a:p>
-        </p:txBody>
-      </p:sp>
-      <p:sp>
-        <p:nvSpPr>
-          <p:cNvPr id="55" name="Google Shape;55;p13">
-            <a:extLst>
-              <a:ext uri="{FF2B5EF4-FFF2-40B4-BE49-F238E27FC236}">
-                <a16:creationId xmlns:a16="http://schemas.microsoft.com/office/drawing/2014/main" id="{61633085-EB71-E833-635D-5311C4C2AC04}"/>
-              </a:ext>
-            </a:extLst>
-          </p:cNvPr>
-          <p:cNvSpPr txBox="1">
-            <a:spLocks noGrp="1"/>
-          </p:cNvSpPr>
-          <p:nvPr>
-            <p:ph type="subTitle" idx="1"/>
-          </p:nvPr>
-        </p:nvSpPr>
-        <p:spPr>
-          <a:xfrm>
-            <a:off x="311700" y="2834125"/>
-            <a:ext cx="8520600" cy="792600"/>
-          </a:xfrm>
-          <a:prstGeom prst="rect">
-            <a:avLst/>
-          </a:prstGeom>
-        </p:spPr>
-        <p:txBody>
-          <a:bodyPr spcFirstLastPara="1" wrap="square" lIns="91425" tIns="91425" rIns="91425" bIns="91425" anchor="t" anchorCtr="0">
-            <a:normAutofit/>
-          </a:bodyPr>
-          <a:lstStyle/>
-          <a:p>
-            <a:pPr marL="0" lvl="0" indent="0" algn="ctr" rtl="0">
-              <a:spcBef>
-                <a:spcPts val="0"/>
-              </a:spcBef>
-              <a:spcAft>
-                <a:spcPts val="0"/>
-              </a:spcAft>
-              <a:buNone/>
-            </a:pPr>
-            <a:r>
-              <a:rPr lang="en" dirty="0"/>
-              <a:t>Finding Prime Numbers</a:t>
-            </a:r>
-            <a:endParaRPr dirty="0"/>
-          </a:p>
-        </p:txBody>
-      </p:sp>
-    </p:spTree>
-    <p:extLst>
-      <p:ext uri="{BB962C8B-B14F-4D97-AF65-F5344CB8AC3E}">
-        <p14:creationId xmlns:p14="http://schemas.microsoft.com/office/powerpoint/2010/main" val="824480525"/>
       </p:ext>
     </p:extLst>
   </p:cSld>
